--- a/slides/docker-session4-dockerfile-resources.pptx
+++ b/slides/docker-session4-dockerfile-resources.pptx
@@ -2,44 +2,41 @@
 <file path=ppt/presentation.xml><?xml version="1.0" encoding="utf-8"?>
 <p:presentation xmlns:p="http://schemas.openxmlformats.org/presentationml/2006/main">
   <p:sldMasterIdLst>
-    <p:sldMasterId xmlns:r="http://schemas.openxmlformats.org/officeDocument/2006/relationships" id="2147483648" r:id="R1121d3d3dc1746d0"/>
+    <p:sldMasterId xmlns:r="http://schemas.openxmlformats.org/officeDocument/2006/relationships" id="2147483648" r:id="R51c73586e0df4aae"/>
   </p:sldMasterIdLst>
-  <p:notesMasterIdLst>
-    <p:notesMasterId xmlns:r="http://schemas.openxmlformats.org/officeDocument/2006/relationships" r:id="Rd74203a62f8f4e1d"/>
-  </p:notesMasterIdLst>
   <p:sldIdLst>
-    <p:sldId xmlns:r="http://schemas.openxmlformats.org/officeDocument/2006/relationships" id="256" r:id="Rc583a30c9f574e4f"/>
-    <p:sldId xmlns:r="http://schemas.openxmlformats.org/officeDocument/2006/relationships" id="257" r:id="R0a471c9e32434ee6"/>
-    <p:sldId xmlns:r="http://schemas.openxmlformats.org/officeDocument/2006/relationships" id="258" r:id="Rbc60376b8cdd4bb4"/>
-    <p:sldId xmlns:r="http://schemas.openxmlformats.org/officeDocument/2006/relationships" id="259" r:id="Ra6d0a02543fa4030"/>
-    <p:sldId xmlns:r="http://schemas.openxmlformats.org/officeDocument/2006/relationships" id="260" r:id="Rd74458a6cb4e442a"/>
-    <p:sldId xmlns:r="http://schemas.openxmlformats.org/officeDocument/2006/relationships" id="261" r:id="R7e92b3bb853345a2"/>
-    <p:sldId xmlns:r="http://schemas.openxmlformats.org/officeDocument/2006/relationships" id="262" r:id="Ra463890ab614494a"/>
-    <p:sldId xmlns:r="http://schemas.openxmlformats.org/officeDocument/2006/relationships" id="263" r:id="R0ca8cdf5101d4348"/>
-    <p:sldId xmlns:r="http://schemas.openxmlformats.org/officeDocument/2006/relationships" id="264" r:id="R7b463f9455ad4b40"/>
-    <p:sldId xmlns:r="http://schemas.openxmlformats.org/officeDocument/2006/relationships" id="265" r:id="R6cdfbeff8d4b4c84"/>
-    <p:sldId xmlns:r="http://schemas.openxmlformats.org/officeDocument/2006/relationships" id="266" r:id="Rf1350960044b42fe"/>
-    <p:sldId xmlns:r="http://schemas.openxmlformats.org/officeDocument/2006/relationships" id="267" r:id="Rabecb17e80df4bb1"/>
-    <p:sldId xmlns:r="http://schemas.openxmlformats.org/officeDocument/2006/relationships" id="268" r:id="Rad01e2f8b5534fb7"/>
-    <p:sldId xmlns:r="http://schemas.openxmlformats.org/officeDocument/2006/relationships" id="269" r:id="Rba4f99aa611c4125"/>
-    <p:sldId xmlns:r="http://schemas.openxmlformats.org/officeDocument/2006/relationships" id="270" r:id="R11e4fcdeffa4463b"/>
-    <p:sldId xmlns:r="http://schemas.openxmlformats.org/officeDocument/2006/relationships" id="271" r:id="Rc9daddfe646b4dce"/>
-    <p:sldId xmlns:r="http://schemas.openxmlformats.org/officeDocument/2006/relationships" id="272" r:id="Re89fe023e7ef416e"/>
-    <p:sldId xmlns:r="http://schemas.openxmlformats.org/officeDocument/2006/relationships" id="273" r:id="R28cd3571d1e14a00"/>
-    <p:sldId xmlns:r="http://schemas.openxmlformats.org/officeDocument/2006/relationships" id="274" r:id="Rf545485bc0644174"/>
-    <p:sldId xmlns:r="http://schemas.openxmlformats.org/officeDocument/2006/relationships" id="275" r:id="Red30907acdb34800"/>
-    <p:sldId xmlns:r="http://schemas.openxmlformats.org/officeDocument/2006/relationships" id="276" r:id="R59fdd91fe2e945b5"/>
-    <p:sldId xmlns:r="http://schemas.openxmlformats.org/officeDocument/2006/relationships" id="277" r:id="Raa921aea6fef4391"/>
-    <p:sldId xmlns:r="http://schemas.openxmlformats.org/officeDocument/2006/relationships" id="278" r:id="R6cdb4de5db9d417e"/>
-    <p:sldId xmlns:r="http://schemas.openxmlformats.org/officeDocument/2006/relationships" id="279" r:id="Reda2abce23e7445a"/>
-    <p:sldId xmlns:r="http://schemas.openxmlformats.org/officeDocument/2006/relationships" id="280" r:id="R76d4fdf6039847b7"/>
-    <p:sldId xmlns:r="http://schemas.openxmlformats.org/officeDocument/2006/relationships" id="281" r:id="R9637846c0d684d65"/>
-    <p:sldId xmlns:r="http://schemas.openxmlformats.org/officeDocument/2006/relationships" id="282" r:id="R2f7d8f54c87f43ed"/>
-    <p:sldId xmlns:r="http://schemas.openxmlformats.org/officeDocument/2006/relationships" id="283" r:id="Re028bc97351e4f92"/>
-    <p:sldId xmlns:r="http://schemas.openxmlformats.org/officeDocument/2006/relationships" id="284" r:id="Rfc770958028e478d"/>
-    <p:sldId xmlns:r="http://schemas.openxmlformats.org/officeDocument/2006/relationships" id="285" r:id="Rbb914ec28d6840db"/>
-    <p:sldId xmlns:r="http://schemas.openxmlformats.org/officeDocument/2006/relationships" id="286" r:id="Re1315da5feb44afd"/>
-    <p:sldId xmlns:r="http://schemas.openxmlformats.org/officeDocument/2006/relationships" id="287" r:id="Rd1c802e73808443b"/>
+    <p:sldId xmlns:r="http://schemas.openxmlformats.org/officeDocument/2006/relationships" id="256" r:id="R4249a726db754144"/>
+    <p:sldId xmlns:r="http://schemas.openxmlformats.org/officeDocument/2006/relationships" id="257" r:id="R3756e80c560e466f"/>
+    <p:sldId xmlns:r="http://schemas.openxmlformats.org/officeDocument/2006/relationships" id="258" r:id="R2cbc7cb8ee394c74"/>
+    <p:sldId xmlns:r="http://schemas.openxmlformats.org/officeDocument/2006/relationships" id="259" r:id="Rb639ff8e4e31446a"/>
+    <p:sldId xmlns:r="http://schemas.openxmlformats.org/officeDocument/2006/relationships" id="260" r:id="R03a227b220914ba2"/>
+    <p:sldId xmlns:r="http://schemas.openxmlformats.org/officeDocument/2006/relationships" id="261" r:id="R81e94a9dc4f2475c"/>
+    <p:sldId xmlns:r="http://schemas.openxmlformats.org/officeDocument/2006/relationships" id="262" r:id="R5b484a6d39784ca5"/>
+    <p:sldId xmlns:r="http://schemas.openxmlformats.org/officeDocument/2006/relationships" id="263" r:id="Rf5f9986d0ea64937"/>
+    <p:sldId xmlns:r="http://schemas.openxmlformats.org/officeDocument/2006/relationships" id="264" r:id="R19fc1f8749da4907"/>
+    <p:sldId xmlns:r="http://schemas.openxmlformats.org/officeDocument/2006/relationships" id="265" r:id="R349323a25f904e9e"/>
+    <p:sldId xmlns:r="http://schemas.openxmlformats.org/officeDocument/2006/relationships" id="266" r:id="R4448a22c92e44af1"/>
+    <p:sldId xmlns:r="http://schemas.openxmlformats.org/officeDocument/2006/relationships" id="267" r:id="R9d19f78debf3492c"/>
+    <p:sldId xmlns:r="http://schemas.openxmlformats.org/officeDocument/2006/relationships" id="268" r:id="Rfd2595cc16434a97"/>
+    <p:sldId xmlns:r="http://schemas.openxmlformats.org/officeDocument/2006/relationships" id="269" r:id="Rccf662f41c874ed7"/>
+    <p:sldId xmlns:r="http://schemas.openxmlformats.org/officeDocument/2006/relationships" id="270" r:id="Ra1e97e9bbf4c4951"/>
+    <p:sldId xmlns:r="http://schemas.openxmlformats.org/officeDocument/2006/relationships" id="271" r:id="Rc46e68138c534670"/>
+    <p:sldId xmlns:r="http://schemas.openxmlformats.org/officeDocument/2006/relationships" id="272" r:id="Re4b3b31a7b254d13"/>
+    <p:sldId xmlns:r="http://schemas.openxmlformats.org/officeDocument/2006/relationships" id="273" r:id="Rb93b3fa0bc05425a"/>
+    <p:sldId xmlns:r="http://schemas.openxmlformats.org/officeDocument/2006/relationships" id="274" r:id="R28b83384e37f4c88"/>
+    <p:sldId xmlns:r="http://schemas.openxmlformats.org/officeDocument/2006/relationships" id="275" r:id="Rc9ba4814546d426b"/>
+    <p:sldId xmlns:r="http://schemas.openxmlformats.org/officeDocument/2006/relationships" id="276" r:id="Rf6502b6bfa304bc6"/>
+    <p:sldId xmlns:r="http://schemas.openxmlformats.org/officeDocument/2006/relationships" id="277" r:id="R54990c5cbc81436a"/>
+    <p:sldId xmlns:r="http://schemas.openxmlformats.org/officeDocument/2006/relationships" id="278" r:id="Ra4fa2f19ad5b4e6d"/>
+    <p:sldId xmlns:r="http://schemas.openxmlformats.org/officeDocument/2006/relationships" id="279" r:id="R4914973bbf234e39"/>
+    <p:sldId xmlns:r="http://schemas.openxmlformats.org/officeDocument/2006/relationships" id="280" r:id="R78d3eb8fc1d14dcc"/>
+    <p:sldId xmlns:r="http://schemas.openxmlformats.org/officeDocument/2006/relationships" id="281" r:id="R709f0492932f40ba"/>
+    <p:sldId xmlns:r="http://schemas.openxmlformats.org/officeDocument/2006/relationships" id="282" r:id="R850b44ad53e54bb8"/>
+    <p:sldId xmlns:r="http://schemas.openxmlformats.org/officeDocument/2006/relationships" id="283" r:id="Rac6f889fb5b346e7"/>
+    <p:sldId xmlns:r="http://schemas.openxmlformats.org/officeDocument/2006/relationships" id="284" r:id="R096cef8eec324544"/>
+    <p:sldId xmlns:r="http://schemas.openxmlformats.org/officeDocument/2006/relationships" id="285" r:id="Rbedd8024209a40a2"/>
+    <p:sldId xmlns:r="http://schemas.openxmlformats.org/officeDocument/2006/relationships" id="286" r:id="R906dcd8585de4ed3"/>
+    <p:sldId xmlns:r="http://schemas.openxmlformats.org/officeDocument/2006/relationships" id="287" r:id="Re6f4ac5d4b644d3c"/>
   </p:sldIdLst>
   <p:sldSz cx="12192000" cy="6858000"/>
   <p:notesSz cx="6858000" cy="9144000"/>
@@ -141,2633 +138,6 @@
 </p:presentation>
 </file>
 
-<file path=ppt/notesMasters/notesMaster1.xml><?xml version="1.0" encoding="utf-8"?>
-<p:notesMaster xmlns:p="http://schemas.openxmlformats.org/presentationml/2006/main">
-  <p:cSld>
-    <p:bg>
-      <p:bgRef idx="1001">
-        <a:schemeClr xmlns:a="http://schemas.openxmlformats.org/drawingml/2006/main" val="bg1"/>
-      </p:bgRef>
-    </p:bg>
-    <p:spTree>
-      <p:nvGrpSpPr>
-        <p:cNvPr id="1" name=""/>
-        <p:cNvGrpSpPr/>
-        <p:nvPr/>
-      </p:nvGrpSpPr>
-      <p:grpSpPr>
-        <a:xfrm xmlns:a="http://schemas.openxmlformats.org/drawingml/2006/main"/>
-      </p:grpSpPr>
-      <p:sp>
-        <p:nvSpPr>
-          <p:cNvPr id="2" name="Header Placeholder"/>
-          <p:cNvSpPr/>
-          <p:nvPr>
-            <p:ph type="hdr" sz="quarter"/>
-          </p:nvPr>
-        </p:nvSpPr>
-        <p:spPr>
-          <a:prstGeom xmlns:a="http://schemas.openxmlformats.org/drawingml/2006/main" prst="rect">
-            <a:avLst/>
-          </a:prstGeom>
-        </p:spPr>
-        <p:txBody>
-          <a:bodyPr xmlns:a="http://schemas.openxmlformats.org/drawingml/2006/main"/>
-          <a:lstStyle xmlns:a="http://schemas.openxmlformats.org/drawingml/2006/main"/>
-          <a:p xmlns:a="http://schemas.openxmlformats.org/drawingml/2006/main"/>
-        </p:txBody>
-      </p:sp>
-      <p:sp>
-        <p:nvSpPr>
-          <p:cNvPr id="3" name="Date Placeholder"/>
-          <p:cNvSpPr/>
-          <p:nvPr>
-            <p:ph type="dt" sz="quarter" idx="1"/>
-          </p:nvPr>
-        </p:nvSpPr>
-        <p:spPr>
-          <a:prstGeom xmlns:a="http://schemas.openxmlformats.org/drawingml/2006/main" prst="rect">
-            <a:avLst/>
-          </a:prstGeom>
-        </p:spPr>
-        <p:txBody>
-          <a:bodyPr xmlns:a="http://schemas.openxmlformats.org/drawingml/2006/main"/>
-          <a:lstStyle xmlns:a="http://schemas.openxmlformats.org/drawingml/2006/main"/>
-          <a:p xmlns:a="http://schemas.openxmlformats.org/drawingml/2006/main"/>
-        </p:txBody>
-      </p:sp>
-      <p:sp>
-        <p:nvSpPr>
-          <p:cNvPr id="4" name="Slide Image Placeholder"/>
-          <p:cNvSpPr/>
-          <p:nvPr>
-            <p:ph type="sldImg" idx="2"/>
-          </p:nvPr>
-        </p:nvSpPr>
-        <p:spPr>
-          <a:prstGeom xmlns:a="http://schemas.openxmlformats.org/drawingml/2006/main" prst="rect">
-            <a:avLst/>
-          </a:prstGeom>
-        </p:spPr>
-        <p:txBody>
-          <a:bodyPr xmlns:a="http://schemas.openxmlformats.org/drawingml/2006/main"/>
-          <a:lstStyle xmlns:a="http://schemas.openxmlformats.org/drawingml/2006/main"/>
-          <a:p xmlns:a="http://schemas.openxmlformats.org/drawingml/2006/main"/>
-        </p:txBody>
-      </p:sp>
-      <p:sp>
-        <p:nvSpPr>
-          <p:cNvPr id="5" name="Notes Placeholder"/>
-          <p:cNvSpPr/>
-          <p:nvPr>
-            <p:ph type="body" sz="quarter" idx="3"/>
-          </p:nvPr>
-        </p:nvSpPr>
-        <p:spPr>
-          <a:prstGeom xmlns:a="http://schemas.openxmlformats.org/drawingml/2006/main" prst="rect">
-            <a:avLst/>
-          </a:prstGeom>
-        </p:spPr>
-        <p:txBody>
-          <a:bodyPr xmlns:a="http://schemas.openxmlformats.org/drawingml/2006/main"/>
-          <a:lstStyle xmlns:a="http://schemas.openxmlformats.org/drawingml/2006/main"/>
-          <a:p xmlns:a="http://schemas.openxmlformats.org/drawingml/2006/main"/>
-        </p:txBody>
-      </p:sp>
-      <p:sp>
-        <p:nvSpPr>
-          <p:cNvPr id="6" name="Footer Placeholder"/>
-          <p:cNvSpPr/>
-          <p:nvPr>
-            <p:ph type="ftr" sz="quarter" idx="4"/>
-          </p:nvPr>
-        </p:nvSpPr>
-        <p:spPr>
-          <a:prstGeom xmlns:a="http://schemas.openxmlformats.org/drawingml/2006/main" prst="rect">
-            <a:avLst/>
-          </a:prstGeom>
-        </p:spPr>
-        <p:txBody>
-          <a:bodyPr xmlns:a="http://schemas.openxmlformats.org/drawingml/2006/main"/>
-          <a:lstStyle xmlns:a="http://schemas.openxmlformats.org/drawingml/2006/main"/>
-          <a:p xmlns:a="http://schemas.openxmlformats.org/drawingml/2006/main"/>
-        </p:txBody>
-      </p:sp>
-      <p:sp>
-        <p:nvSpPr>
-          <p:cNvPr id="7" name="Slide Number Placeholder"/>
-          <p:cNvSpPr/>
-          <p:nvPr>
-            <p:ph type="sldNum" sz="quarter" idx="5"/>
-          </p:nvPr>
-        </p:nvSpPr>
-        <p:spPr>
-          <a:prstGeom xmlns:a="http://schemas.openxmlformats.org/drawingml/2006/main" prst="rect">
-            <a:avLst/>
-          </a:prstGeom>
-        </p:spPr>
-        <p:txBody>
-          <a:bodyPr xmlns:a="http://schemas.openxmlformats.org/drawingml/2006/main"/>
-          <a:lstStyle xmlns:a="http://schemas.openxmlformats.org/drawingml/2006/main"/>
-          <a:p xmlns:a="http://schemas.openxmlformats.org/drawingml/2006/main"/>
-        </p:txBody>
-      </p:sp>
-    </p:spTree>
-  </p:cSld>
-  <p:clrMap bg1="lt1" tx1="dk1" bg2="lt2" tx2="dk2" accent1="accent1" accent2="accent2" accent3="accent3" accent4="accent4" accent5="accent5" accent6="accent6" hlink="hlink" folHlink="folHlink"/>
-  <p:notesStyle>
-    <a:lvl1pPr xmlns:a="http://schemas.openxmlformats.org/drawingml/2006/main" marL="0" algn="l" defTabSz="914400" rtl="0" eaLnBrk="1" latinLnBrk="0" hangingPunct="1">
-      <a:defRPr sz="1200" kern="1200"/>
-    </a:lvl1pPr>
-  </p:notesStyle>
-</p:notesMaster>
-</file>
-
-<file path=ppt/notesMasters/theme/theme3.xml><?xml version="1.0" encoding="utf-8"?>
-<a:theme xmlns:a="http://schemas.openxmlformats.org/drawingml/2006/main" name="ChatGPT">
-  <a:themeElements>
-    <a:clrScheme name="ChatGPT">
-      <a:dk1>
-        <a:srgbClr val="000000"/>
-      </a:dk1>
-      <a:lt1>
-        <a:srgbClr val="FFFFFF"/>
-      </a:lt1>
-      <a:dk2>
-        <a:srgbClr val="0E2841"/>
-      </a:dk2>
-      <a:lt2>
-        <a:srgbClr val="E8E8E8"/>
-      </a:lt2>
-      <a:accent1>
-        <a:srgbClr val="156082"/>
-      </a:accent1>
-      <a:accent2>
-        <a:srgbClr val="E97132"/>
-      </a:accent2>
-      <a:accent3>
-        <a:srgbClr val="196B24"/>
-      </a:accent3>
-      <a:accent4>
-        <a:srgbClr val="0F9ED5"/>
-      </a:accent4>
-      <a:accent5>
-        <a:srgbClr val="A02B93"/>
-      </a:accent5>
-      <a:accent6>
-        <a:srgbClr val="4EA72E"/>
-      </a:accent6>
-      <a:hlink>
-        <a:srgbClr val="467886"/>
-      </a:hlink>
-      <a:folHlink>
-        <a:srgbClr val="96607D"/>
-      </a:folHlink>
-    </a:clrScheme>
-    <a:fontScheme name="Office">
-      <a:majorFont>
-        <a:latin typeface="Calibri Light"/>
-        <a:ea typeface="Calibri Light"/>
-        <a:cs typeface="Calibri Light"/>
-      </a:majorFont>
-      <a:minorFont>
-        <a:latin typeface="Calibri"/>
-        <a:ea typeface="Calibri"/>
-        <a:cs typeface="Calibri"/>
-      </a:minorFont>
-    </a:fontScheme>
-    <a:fmtScheme name="ChatGPT">
-      <a:fillStyleLst>
-        <a:solidFill>
-          <a:schemeClr val="phClr"/>
-        </a:solidFill>
-        <a:gradFill>
-          <a:gsLst>
-            <a:gs pos="0">
-              <a:schemeClr val="phClr">
-                <a:tint val="67000"/>
-                <a:lumMod val="110000"/>
-                <a:satMod val="105000"/>
-              </a:schemeClr>
-            </a:gs>
-            <a:gs pos="50000">
-              <a:schemeClr val="phClr">
-                <a:tint val="73000"/>
-                <a:lumMod val="105000"/>
-                <a:satMod val="103000"/>
-              </a:schemeClr>
-            </a:gs>
-            <a:gs pos="100000">
-              <a:schemeClr val="phClr">
-                <a:tint val="81000"/>
-                <a:lumMod val="105000"/>
-                <a:satMod val="109000"/>
-              </a:schemeClr>
-            </a:gs>
-          </a:gsLst>
-          <a:lin ang="5400000" scaled="0"/>
-        </a:gradFill>
-        <a:gradFill>
-          <a:gsLst>
-            <a:gs pos="0">
-              <a:schemeClr val="phClr">
-                <a:tint val="94000"/>
-                <a:lumMod val="102000"/>
-                <a:satMod val="103000"/>
-              </a:schemeClr>
-            </a:gs>
-            <a:gs pos="50000">
-              <a:schemeClr val="phClr">
-                <a:shade val="100000"/>
-                <a:lumMod val="100000"/>
-                <a:satMod val="110000"/>
-              </a:schemeClr>
-            </a:gs>
-            <a:gs pos="100000">
-              <a:schemeClr val="phClr">
-                <a:shade val="78000"/>
-                <a:lumMod val="99000"/>
-                <a:satMod val="120000"/>
-              </a:schemeClr>
-            </a:gs>
-          </a:gsLst>
-          <a:lin ang="5400000" scaled="0"/>
-        </a:gradFill>
-      </a:fillStyleLst>
-      <a:lnStyleLst>
-        <a:ln w="12700">
-          <a:solidFill>
-            <a:schemeClr val="phClr"/>
-          </a:solidFill>
-          <a:prstDash val="solid"/>
-        </a:ln>
-        <a:ln w="19050">
-          <a:solidFill>
-            <a:schemeClr val="phClr"/>
-          </a:solidFill>
-          <a:prstDash val="solid"/>
-        </a:ln>
-        <a:ln w="25400">
-          <a:solidFill>
-            <a:schemeClr val="phClr"/>
-          </a:solidFill>
-          <a:prstDash val="solid"/>
-        </a:ln>
-      </a:lnStyleLst>
-      <a:effectStyleLst>
-        <a:effectStyle>
-          <a:effectLst/>
-        </a:effectStyle>
-        <a:effectStyle>
-          <a:effectLst/>
-        </a:effectStyle>
-        <a:effectStyle>
-          <a:effectLst>
-            <a:outerShdw blurRad="57150" dist="19050" dir="5400000">
-              <a:srgbClr val="000000">
-                <a:alpha val="16000"/>
-              </a:srgbClr>
-            </a:outerShdw>
-          </a:effectLst>
-        </a:effectStyle>
-        <a:effectStyle>
-          <a:effectLst>
-            <a:outerShdw blurRad="19050" dist="9525" dir="5400000">
-              <a:srgbClr val="000000">
-                <a:alpha val="6000"/>
-              </a:srgbClr>
-            </a:outerShdw>
-          </a:effectLst>
-        </a:effectStyle>
-        <a:effectStyle>
-          <a:effectLst>
-            <a:outerShdw blurRad="28575" dist="9525" dir="5400000">
-              <a:srgbClr val="000000">
-                <a:alpha val="8000"/>
-              </a:srgbClr>
-            </a:outerShdw>
-          </a:effectLst>
-        </a:effectStyle>
-        <a:effectStyle>
-          <a:effectLst>
-            <a:outerShdw blurRad="57150" dist="19050" dir="5400000">
-              <a:srgbClr val="000000">
-                <a:alpha val="10000"/>
-              </a:srgbClr>
-            </a:outerShdw>
-          </a:effectLst>
-        </a:effectStyle>
-        <a:effectStyle>
-          <a:effectLst>
-            <a:outerShdw blurRad="114300" dist="38100" dir="5400000">
-              <a:srgbClr val="000000">
-                <a:alpha val="12000"/>
-              </a:srgbClr>
-            </a:outerShdw>
-          </a:effectLst>
-        </a:effectStyle>
-        <a:effectStyle>
-          <a:effectLst>
-            <a:outerShdw blurRad="171450" dist="57150" dir="5400000">
-              <a:srgbClr val="000000">
-                <a:alpha val="16000"/>
-              </a:srgbClr>
-            </a:outerShdw>
-          </a:effectLst>
-        </a:effectStyle>
-        <a:effectStyle>
-          <a:effectLst>
-            <a:outerShdw blurRad="266700" dist="95250" dir="5400000">
-              <a:srgbClr val="000000">
-                <a:alpha val="24000"/>
-              </a:srgbClr>
-            </a:outerShdw>
-          </a:effectLst>
-        </a:effectStyle>
-      </a:effectStyleLst>
-      <a:bgFillStyleLst>
-        <a:solidFill>
-          <a:schemeClr val="phClr"/>
-        </a:solidFill>
-        <a:solidFill>
-          <a:schemeClr val="phClr">
-            <a:tint val="95000"/>
-            <a:satMod val="170000"/>
-          </a:schemeClr>
-        </a:solidFill>
-        <a:gradFill>
-          <a:gsLst>
-            <a:gs pos="0">
-              <a:schemeClr val="phClr">
-                <a:tint val="93000"/>
-                <a:shade val="98000"/>
-                <a:lumMod val="102000"/>
-                <a:satMod val="150000"/>
-              </a:schemeClr>
-            </a:gs>
-            <a:gs pos="50000">
-              <a:schemeClr val="phClr">
-                <a:tint val="98000"/>
-                <a:shade val="90000"/>
-                <a:lumMod val="103000"/>
-                <a:satMod val="130000"/>
-              </a:schemeClr>
-            </a:gs>
-            <a:gs pos="100000">
-              <a:schemeClr val="phClr">
-                <a:shade val="63000"/>
-                <a:satMod val="120000"/>
-              </a:schemeClr>
-            </a:gs>
-          </a:gsLst>
-          <a:lin ang="5400000" scaled="0"/>
-        </a:gradFill>
-      </a:bgFillStyleLst>
-    </a:fmtScheme>
-  </a:themeElements>
-</a:theme>
-</file>
-
-<file path=ppt/notesSlides/notesSlide1.xml><?xml version="1.0" encoding="utf-8"?>
-<p:notes xmlns:p="http://schemas.openxmlformats.org/presentationml/2006/main">
-  <p:cSld>
-    <p:spTree>
-      <p:nvGrpSpPr>
-        <p:cNvPr id="1" name=""/>
-        <p:cNvGrpSpPr/>
-        <p:nvPr/>
-      </p:nvGrpSpPr>
-      <p:grpSpPr>
-        <a:xfrm xmlns:a="http://schemas.openxmlformats.org/drawingml/2006/main"/>
-      </p:grpSpPr>
-      <p:sp>
-        <p:nvSpPr>
-          <p:cNvPr id="2" name="Slide Image Placeholder 1"/>
-          <p:cNvSpPr>
-            <a:spLocks xmlns:a="http://schemas.openxmlformats.org/drawingml/2006/main" noGrp="1"/>
-          </p:cNvSpPr>
-          <p:nvPr>
-            <p:ph type="sldImg" idx="0"/>
-          </p:nvPr>
-        </p:nvSpPr>
-        <p:spPr/>
-      </p:sp>
-      <p:sp>
-        <p:nvSpPr>
-          <p:cNvPr id="3" name="Notes Placeholder 2"/>
-          <p:cNvSpPr>
-            <a:spLocks xmlns:a="http://schemas.openxmlformats.org/drawingml/2006/main" noGrp="1"/>
-          </p:cNvSpPr>
-          <p:nvPr>
-            <p:ph type="body" idx="1"/>
-          </p:nvPr>
-        </p:nvSpPr>
-        <p:spPr/>
-        <p:txBody>
-          <a:bodyPr xmlns:a="http://schemas.openxmlformats.org/drawingml/2006/main"/>
-          <a:lstStyle xmlns:a="http://schemas.openxmlformats.org/drawingml/2006/main"/>
-          <a:p xmlns:a="http://schemas.openxmlformats.org/drawingml/2006/main">
-            <a:r>
-              <a:t>第四堂把前面學過的容器操作轉成可重複交付的 Image，後半段處理多容器網路與資源限制。</a:t>
-            </a:r>
-          </a:p>
-        </p:txBody>
-      </p:sp>
-      <p:sp>
-        <p:nvSpPr>
-          <p:cNvPr id="4" name="Slide Number Placeholder 3"/>
-          <p:cNvSpPr>
-            <a:spLocks xmlns:a="http://schemas.openxmlformats.org/drawingml/2006/main" noGrp="1"/>
-          </p:cNvSpPr>
-          <p:nvPr>
-            <p:ph type="sldNum" idx="5"/>
-          </p:nvPr>
-        </p:nvSpPr>
-        <p:spPr/>
-        <p:txBody>
-          <a:bodyPr xmlns:a="http://schemas.openxmlformats.org/drawingml/2006/main"/>
-          <a:lstStyle xmlns:a="http://schemas.openxmlformats.org/drawingml/2006/main"/>
-          <a:p xmlns:a="http://schemas.openxmlformats.org/drawingml/2006/main"/>
-        </p:txBody>
-      </p:sp>
-    </p:spTree>
-  </p:cSld>
-  <p:clrMapOvr>
-    <a:masterClrMapping xmlns:a="http://schemas.openxmlformats.org/drawingml/2006/main"/>
-  </p:clrMapOvr>
-</p:notes>
-</file>
-
-<file path=ppt/notesSlides/notesSlide10.xml><?xml version="1.0" encoding="utf-8"?>
-<p:notes xmlns:p="http://schemas.openxmlformats.org/presentationml/2006/main">
-  <p:cSld>
-    <p:spTree>
-      <p:nvGrpSpPr>
-        <p:cNvPr id="1" name=""/>
-        <p:cNvGrpSpPr/>
-        <p:nvPr/>
-      </p:nvGrpSpPr>
-      <p:grpSpPr>
-        <a:xfrm xmlns:a="http://schemas.openxmlformats.org/drawingml/2006/main"/>
-      </p:grpSpPr>
-      <p:sp>
-        <p:nvSpPr>
-          <p:cNvPr id="2" name="Slide Image Placeholder 1"/>
-          <p:cNvSpPr>
-            <a:spLocks xmlns:a="http://schemas.openxmlformats.org/drawingml/2006/main" noGrp="1"/>
-          </p:cNvSpPr>
-          <p:nvPr>
-            <p:ph type="sldImg" idx="0"/>
-          </p:nvPr>
-        </p:nvSpPr>
-        <p:spPr/>
-      </p:sp>
-      <p:sp>
-        <p:nvSpPr>
-          <p:cNvPr id="3" name="Notes Placeholder 2"/>
-          <p:cNvSpPr>
-            <a:spLocks xmlns:a="http://schemas.openxmlformats.org/drawingml/2006/main" noGrp="1"/>
-          </p:cNvSpPr>
-          <p:nvPr>
-            <p:ph type="body" idx="1"/>
-          </p:nvPr>
-        </p:nvSpPr>
-        <p:spPr/>
-        <p:txBody>
-          <a:bodyPr xmlns:a="http://schemas.openxmlformats.org/drawingml/2006/main"/>
-          <a:lstStyle xmlns:a="http://schemas.openxmlformats.org/drawingml/2006/main"/>
-          <a:p xmlns:a="http://schemas.openxmlformats.org/drawingml/2006/main">
-            <a:r>
-              <a:t>練習題來自 exercises.md 第 4 堂實作題 P2。</a:t>
-            </a:r>
-          </a:p>
-        </p:txBody>
-      </p:sp>
-      <p:sp>
-        <p:nvSpPr>
-          <p:cNvPr id="4" name="Slide Number Placeholder 3"/>
-          <p:cNvSpPr>
-            <a:spLocks xmlns:a="http://schemas.openxmlformats.org/drawingml/2006/main" noGrp="1"/>
-          </p:cNvSpPr>
-          <p:nvPr>
-            <p:ph type="sldNum" idx="5"/>
-          </p:nvPr>
-        </p:nvSpPr>
-        <p:spPr/>
-        <p:txBody>
-          <a:bodyPr xmlns:a="http://schemas.openxmlformats.org/drawingml/2006/main"/>
-          <a:lstStyle xmlns:a="http://schemas.openxmlformats.org/drawingml/2006/main"/>
-          <a:p xmlns:a="http://schemas.openxmlformats.org/drawingml/2006/main"/>
-        </p:txBody>
-      </p:sp>
-    </p:spTree>
-  </p:cSld>
-  <p:clrMapOvr>
-    <a:masterClrMapping xmlns:a="http://schemas.openxmlformats.org/drawingml/2006/main"/>
-  </p:clrMapOvr>
-</p:notes>
-</file>
-
-<file path=ppt/notesSlides/notesSlide11.xml><?xml version="1.0" encoding="utf-8"?>
-<p:notes xmlns:p="http://schemas.openxmlformats.org/presentationml/2006/main">
-  <p:cSld>
-    <p:spTree>
-      <p:nvGrpSpPr>
-        <p:cNvPr id="1" name=""/>
-        <p:cNvGrpSpPr/>
-        <p:nvPr/>
-      </p:nvGrpSpPr>
-      <p:grpSpPr>
-        <a:xfrm xmlns:a="http://schemas.openxmlformats.org/drawingml/2006/main"/>
-      </p:grpSpPr>
-      <p:sp>
-        <p:nvSpPr>
-          <p:cNvPr id="2" name="Slide Image Placeholder 1"/>
-          <p:cNvSpPr>
-            <a:spLocks xmlns:a="http://schemas.openxmlformats.org/drawingml/2006/main" noGrp="1"/>
-          </p:cNvSpPr>
-          <p:nvPr>
-            <p:ph type="sldImg" idx="0"/>
-          </p:nvPr>
-        </p:nvSpPr>
-        <p:spPr/>
-      </p:sp>
-      <p:sp>
-        <p:nvSpPr>
-          <p:cNvPr id="3" name="Notes Placeholder 2"/>
-          <p:cNvSpPr>
-            <a:spLocks xmlns:a="http://schemas.openxmlformats.org/drawingml/2006/main" noGrp="1"/>
-          </p:cNvSpPr>
-          <p:nvPr>
-            <p:ph type="body" idx="1"/>
-          </p:nvPr>
-        </p:nvSpPr>
-        <p:spPr/>
-        <p:txBody>
-          <a:bodyPr xmlns:a="http://schemas.openxmlformats.org/drawingml/2006/main"/>
-          <a:lstStyle xmlns:a="http://schemas.openxmlformats.org/drawingml/2006/main"/>
-          <a:p xmlns:a="http://schemas.openxmlformats.org/drawingml/2006/main">
-            <a:r>
-              <a:t>優化不是單一技巧，而是大小、速度、乾淨度與安全性四個面向。</a:t>
-            </a:r>
-          </a:p>
-        </p:txBody>
-      </p:sp>
-      <p:sp>
-        <p:nvSpPr>
-          <p:cNvPr id="4" name="Slide Number Placeholder 3"/>
-          <p:cNvSpPr>
-            <a:spLocks xmlns:a="http://schemas.openxmlformats.org/drawingml/2006/main" noGrp="1"/>
-          </p:cNvSpPr>
-          <p:nvPr>
-            <p:ph type="sldNum" idx="5"/>
-          </p:nvPr>
-        </p:nvSpPr>
-        <p:spPr/>
-        <p:txBody>
-          <a:bodyPr xmlns:a="http://schemas.openxmlformats.org/drawingml/2006/main"/>
-          <a:lstStyle xmlns:a="http://schemas.openxmlformats.org/drawingml/2006/main"/>
-          <a:p xmlns:a="http://schemas.openxmlformats.org/drawingml/2006/main"/>
-        </p:txBody>
-      </p:sp>
-    </p:spTree>
-  </p:cSld>
-  <p:clrMapOvr>
-    <a:masterClrMapping xmlns:a="http://schemas.openxmlformats.org/drawingml/2006/main"/>
-  </p:clrMapOvr>
-</p:notes>
-</file>
-
-<file path=ppt/notesSlides/notesSlide12.xml><?xml version="1.0" encoding="utf-8"?>
-<p:notes xmlns:p="http://schemas.openxmlformats.org/presentationml/2006/main">
-  <p:cSld>
-    <p:spTree>
-      <p:nvGrpSpPr>
-        <p:cNvPr id="1" name=""/>
-        <p:cNvGrpSpPr/>
-        <p:nvPr/>
-      </p:nvGrpSpPr>
-      <p:grpSpPr>
-        <a:xfrm xmlns:a="http://schemas.openxmlformats.org/drawingml/2006/main"/>
-      </p:grpSpPr>
-      <p:sp>
-        <p:nvSpPr>
-          <p:cNvPr id="2" name="Slide Image Placeholder 1"/>
-          <p:cNvSpPr>
-            <a:spLocks xmlns:a="http://schemas.openxmlformats.org/drawingml/2006/main" noGrp="1"/>
-          </p:cNvSpPr>
-          <p:nvPr>
-            <p:ph type="sldImg" idx="0"/>
-          </p:nvPr>
-        </p:nvSpPr>
-        <p:spPr/>
-      </p:sp>
-      <p:sp>
-        <p:nvSpPr>
-          <p:cNvPr id="3" name="Notes Placeholder 2"/>
-          <p:cNvSpPr>
-            <a:spLocks xmlns:a="http://schemas.openxmlformats.org/drawingml/2006/main" noGrp="1"/>
-          </p:cNvSpPr>
-          <p:nvPr>
-            <p:ph type="body" idx="1"/>
-          </p:nvPr>
-        </p:nvSpPr>
-        <p:spPr/>
-        <p:txBody>
-          <a:bodyPr xmlns:a="http://schemas.openxmlformats.org/drawingml/2006/main"/>
-          <a:lstStyle xmlns:a="http://schemas.openxmlformats.org/drawingml/2006/main"/>
-          <a:p xmlns:a="http://schemas.openxmlformats.org/drawingml/2006/main">
-            <a:r>
-              <a:t>練習題來自 exercises.md 第 4 堂概念題 Q2-Q3。</a:t>
-            </a:r>
-          </a:p>
-        </p:txBody>
-      </p:sp>
-      <p:sp>
-        <p:nvSpPr>
-          <p:cNvPr id="4" name="Slide Number Placeholder 3"/>
-          <p:cNvSpPr>
-            <a:spLocks xmlns:a="http://schemas.openxmlformats.org/drawingml/2006/main" noGrp="1"/>
-          </p:cNvSpPr>
-          <p:nvPr>
-            <p:ph type="sldNum" idx="5"/>
-          </p:nvPr>
-        </p:nvSpPr>
-        <p:spPr/>
-        <p:txBody>
-          <a:bodyPr xmlns:a="http://schemas.openxmlformats.org/drawingml/2006/main"/>
-          <a:lstStyle xmlns:a="http://schemas.openxmlformats.org/drawingml/2006/main"/>
-          <a:p xmlns:a="http://schemas.openxmlformats.org/drawingml/2006/main"/>
-        </p:txBody>
-      </p:sp>
-    </p:spTree>
-  </p:cSld>
-  <p:clrMapOvr>
-    <a:masterClrMapping xmlns:a="http://schemas.openxmlformats.org/drawingml/2006/main"/>
-  </p:clrMapOvr>
-</p:notes>
-</file>
-
-<file path=ppt/notesSlides/notesSlide13.xml><?xml version="1.0" encoding="utf-8"?>
-<p:notes xmlns:p="http://schemas.openxmlformats.org/presentationml/2006/main">
-  <p:cSld>
-    <p:spTree>
-      <p:nvGrpSpPr>
-        <p:cNvPr id="1" name=""/>
-        <p:cNvGrpSpPr/>
-        <p:nvPr/>
-      </p:nvGrpSpPr>
-      <p:grpSpPr>
-        <a:xfrm xmlns:a="http://schemas.openxmlformats.org/drawingml/2006/main"/>
-      </p:grpSpPr>
-      <p:sp>
-        <p:nvSpPr>
-          <p:cNvPr id="2" name="Slide Image Placeholder 1"/>
-          <p:cNvSpPr>
-            <a:spLocks xmlns:a="http://schemas.openxmlformats.org/drawingml/2006/main" noGrp="1"/>
-          </p:cNvSpPr>
-          <p:nvPr>
-            <p:ph type="sldImg" idx="0"/>
-          </p:nvPr>
-        </p:nvSpPr>
-        <p:spPr/>
-      </p:sp>
-      <p:sp>
-        <p:nvSpPr>
-          <p:cNvPr id="3" name="Notes Placeholder 2"/>
-          <p:cNvSpPr>
-            <a:spLocks xmlns:a="http://schemas.openxmlformats.org/drawingml/2006/main" noGrp="1"/>
-          </p:cNvSpPr>
-          <p:nvPr>
-            <p:ph type="body" idx="1"/>
-          </p:nvPr>
-        </p:nvSpPr>
-        <p:spPr/>
-        <p:txBody>
-          <a:bodyPr xmlns:a="http://schemas.openxmlformats.org/drawingml/2006/main"/>
-          <a:lstStyle xmlns:a="http://schemas.openxmlformats.org/drawingml/2006/main"/>
-          <a:p xmlns:a="http://schemas.openxmlformats.org/drawingml/2006/main">
-            <a:r>
-              <a:t>這頁對應 session4.md 的優化版 Flask Dockerfile。</a:t>
-            </a:r>
-          </a:p>
-        </p:txBody>
-      </p:sp>
-      <p:sp>
-        <p:nvSpPr>
-          <p:cNvPr id="4" name="Slide Number Placeholder 3"/>
-          <p:cNvSpPr>
-            <a:spLocks xmlns:a="http://schemas.openxmlformats.org/drawingml/2006/main" noGrp="1"/>
-          </p:cNvSpPr>
-          <p:nvPr>
-            <p:ph type="sldNum" idx="5"/>
-          </p:nvPr>
-        </p:nvSpPr>
-        <p:spPr/>
-        <p:txBody>
-          <a:bodyPr xmlns:a="http://schemas.openxmlformats.org/drawingml/2006/main"/>
-          <a:lstStyle xmlns:a="http://schemas.openxmlformats.org/drawingml/2006/main"/>
-          <a:p xmlns:a="http://schemas.openxmlformats.org/drawingml/2006/main"/>
-        </p:txBody>
-      </p:sp>
-    </p:spTree>
-  </p:cSld>
-  <p:clrMapOvr>
-    <a:masterClrMapping xmlns:a="http://schemas.openxmlformats.org/drawingml/2006/main"/>
-  </p:clrMapOvr>
-</p:notes>
-</file>
-
-<file path=ppt/notesSlides/notesSlide14.xml><?xml version="1.0" encoding="utf-8"?>
-<p:notes xmlns:p="http://schemas.openxmlformats.org/presentationml/2006/main">
-  <p:cSld>
-    <p:spTree>
-      <p:nvGrpSpPr>
-        <p:cNvPr id="1" name=""/>
-        <p:cNvGrpSpPr/>
-        <p:nvPr/>
-      </p:nvGrpSpPr>
-      <p:grpSpPr>
-        <a:xfrm xmlns:a="http://schemas.openxmlformats.org/drawingml/2006/main"/>
-      </p:grpSpPr>
-      <p:sp>
-        <p:nvSpPr>
-          <p:cNvPr id="2" name="Slide Image Placeholder 1"/>
-          <p:cNvSpPr>
-            <a:spLocks xmlns:a="http://schemas.openxmlformats.org/drawingml/2006/main" noGrp="1"/>
-          </p:cNvSpPr>
-          <p:nvPr>
-            <p:ph type="sldImg" idx="0"/>
-          </p:nvPr>
-        </p:nvSpPr>
-        <p:spPr/>
-      </p:sp>
-      <p:sp>
-        <p:nvSpPr>
-          <p:cNvPr id="3" name="Notes Placeholder 2"/>
-          <p:cNvSpPr>
-            <a:spLocks xmlns:a="http://schemas.openxmlformats.org/drawingml/2006/main" noGrp="1"/>
-          </p:cNvSpPr>
-          <p:nvPr>
-            <p:ph type="body" idx="1"/>
-          </p:nvPr>
-        </p:nvSpPr>
-        <p:spPr/>
-        <p:txBody>
-          <a:bodyPr xmlns:a="http://schemas.openxmlformats.org/drawingml/2006/main"/>
-          <a:lstStyle xmlns:a="http://schemas.openxmlformats.org/drawingml/2006/main"/>
-          <a:p xmlns:a="http://schemas.openxmlformats.org/drawingml/2006/main">
-            <a:r>
-              <a:t>這頁用最常見排除項目，不放完整測試指令，避免太擠。</a:t>
-            </a:r>
-          </a:p>
-        </p:txBody>
-      </p:sp>
-      <p:sp>
-        <p:nvSpPr>
-          <p:cNvPr id="4" name="Slide Number Placeholder 3"/>
-          <p:cNvSpPr>
-            <a:spLocks xmlns:a="http://schemas.openxmlformats.org/drawingml/2006/main" noGrp="1"/>
-          </p:cNvSpPr>
-          <p:nvPr>
-            <p:ph type="sldNum" idx="5"/>
-          </p:nvPr>
-        </p:nvSpPr>
-        <p:spPr/>
-        <p:txBody>
-          <a:bodyPr xmlns:a="http://schemas.openxmlformats.org/drawingml/2006/main"/>
-          <a:lstStyle xmlns:a="http://schemas.openxmlformats.org/drawingml/2006/main"/>
-          <a:p xmlns:a="http://schemas.openxmlformats.org/drawingml/2006/main"/>
-        </p:txBody>
-      </p:sp>
-    </p:spTree>
-  </p:cSld>
-  <p:clrMapOvr>
-    <a:masterClrMapping xmlns:a="http://schemas.openxmlformats.org/drawingml/2006/main"/>
-  </p:clrMapOvr>
-</p:notes>
-</file>
-
-<file path=ppt/notesSlides/notesSlide15.xml><?xml version="1.0" encoding="utf-8"?>
-<p:notes xmlns:p="http://schemas.openxmlformats.org/presentationml/2006/main">
-  <p:cSld>
-    <p:spTree>
-      <p:nvGrpSpPr>
-        <p:cNvPr id="1" name=""/>
-        <p:cNvGrpSpPr/>
-        <p:nvPr/>
-      </p:nvGrpSpPr>
-      <p:grpSpPr>
-        <a:xfrm xmlns:a="http://schemas.openxmlformats.org/drawingml/2006/main"/>
-      </p:grpSpPr>
-      <p:sp>
-        <p:nvSpPr>
-          <p:cNvPr id="2" name="Slide Image Placeholder 1"/>
-          <p:cNvSpPr>
-            <a:spLocks xmlns:a="http://schemas.openxmlformats.org/drawingml/2006/main" noGrp="1"/>
-          </p:cNvSpPr>
-          <p:nvPr>
-            <p:ph type="sldImg" idx="0"/>
-          </p:nvPr>
-        </p:nvSpPr>
-        <p:spPr/>
-      </p:sp>
-      <p:sp>
-        <p:nvSpPr>
-          <p:cNvPr id="3" name="Notes Placeholder 2"/>
-          <p:cNvSpPr>
-            <a:spLocks xmlns:a="http://schemas.openxmlformats.org/drawingml/2006/main" noGrp="1"/>
-          </p:cNvSpPr>
-          <p:nvPr>
-            <p:ph type="body" idx="1"/>
-          </p:nvPr>
-        </p:nvSpPr>
-        <p:spPr/>
-        <p:txBody>
-          <a:bodyPr xmlns:a="http://schemas.openxmlformats.org/drawingml/2006/main"/>
-          <a:lstStyle xmlns:a="http://schemas.openxmlformats.org/drawingml/2006/main"/>
-          <a:p xmlns:a="http://schemas.openxmlformats.org/drawingml/2006/main">
-            <a:r>
-              <a:t>把 Dockerfile 的每個重要指令都用容器內檢查對應起來。</a:t>
-            </a:r>
-          </a:p>
-        </p:txBody>
-      </p:sp>
-      <p:sp>
-        <p:nvSpPr>
-          <p:cNvPr id="4" name="Slide Number Placeholder 3"/>
-          <p:cNvSpPr>
-            <a:spLocks xmlns:a="http://schemas.openxmlformats.org/drawingml/2006/main" noGrp="1"/>
-          </p:cNvSpPr>
-          <p:nvPr>
-            <p:ph type="sldNum" idx="5"/>
-          </p:nvPr>
-        </p:nvSpPr>
-        <p:spPr/>
-        <p:txBody>
-          <a:bodyPr xmlns:a="http://schemas.openxmlformats.org/drawingml/2006/main"/>
-          <a:lstStyle xmlns:a="http://schemas.openxmlformats.org/drawingml/2006/main"/>
-          <a:p xmlns:a="http://schemas.openxmlformats.org/drawingml/2006/main"/>
-        </p:txBody>
-      </p:sp>
-    </p:spTree>
-  </p:cSld>
-  <p:clrMapOvr>
-    <a:masterClrMapping xmlns:a="http://schemas.openxmlformats.org/drawingml/2006/main"/>
-  </p:clrMapOvr>
-</p:notes>
-</file>
-
-<file path=ppt/notesSlides/notesSlide16.xml><?xml version="1.0" encoding="utf-8"?>
-<p:notes xmlns:p="http://schemas.openxmlformats.org/presentationml/2006/main">
-  <p:cSld>
-    <p:spTree>
-      <p:nvGrpSpPr>
-        <p:cNvPr id="1" name=""/>
-        <p:cNvGrpSpPr/>
-        <p:nvPr/>
-      </p:nvGrpSpPr>
-      <p:grpSpPr>
-        <a:xfrm xmlns:a="http://schemas.openxmlformats.org/drawingml/2006/main"/>
-      </p:grpSpPr>
-      <p:sp>
-        <p:nvSpPr>
-          <p:cNvPr id="2" name="Slide Image Placeholder 1"/>
-          <p:cNvSpPr>
-            <a:spLocks xmlns:a="http://schemas.openxmlformats.org/drawingml/2006/main" noGrp="1"/>
-          </p:cNvSpPr>
-          <p:nvPr>
-            <p:ph type="sldImg" idx="0"/>
-          </p:nvPr>
-        </p:nvSpPr>
-        <p:spPr/>
-      </p:sp>
-      <p:sp>
-        <p:nvSpPr>
-          <p:cNvPr id="3" name="Notes Placeholder 2"/>
-          <p:cNvSpPr>
-            <a:spLocks xmlns:a="http://schemas.openxmlformats.org/drawingml/2006/main" noGrp="1"/>
-          </p:cNvSpPr>
-          <p:nvPr>
-            <p:ph type="body" idx="1"/>
-          </p:nvPr>
-        </p:nvSpPr>
-        <p:spPr/>
-        <p:txBody>
-          <a:bodyPr xmlns:a="http://schemas.openxmlformats.org/drawingml/2006/main"/>
-          <a:lstStyle xmlns:a="http://schemas.openxmlformats.org/drawingml/2006/main"/>
-          <a:p xmlns:a="http://schemas.openxmlformats.org/drawingml/2006/main">
-            <a:r>
-              <a:t>這頁用二分法避免學生把 image 和 container 的匯出混在一起。</a:t>
-            </a:r>
-          </a:p>
-        </p:txBody>
-      </p:sp>
-      <p:sp>
-        <p:nvSpPr>
-          <p:cNvPr id="4" name="Slide Number Placeholder 3"/>
-          <p:cNvSpPr>
-            <a:spLocks xmlns:a="http://schemas.openxmlformats.org/drawingml/2006/main" noGrp="1"/>
-          </p:cNvSpPr>
-          <p:nvPr>
-            <p:ph type="sldNum" idx="5"/>
-          </p:nvPr>
-        </p:nvSpPr>
-        <p:spPr/>
-        <p:txBody>
-          <a:bodyPr xmlns:a="http://schemas.openxmlformats.org/drawingml/2006/main"/>
-          <a:lstStyle xmlns:a="http://schemas.openxmlformats.org/drawingml/2006/main"/>
-          <a:p xmlns:a="http://schemas.openxmlformats.org/drawingml/2006/main"/>
-        </p:txBody>
-      </p:sp>
-    </p:spTree>
-  </p:cSld>
-  <p:clrMapOvr>
-    <a:masterClrMapping xmlns:a="http://schemas.openxmlformats.org/drawingml/2006/main"/>
-  </p:clrMapOvr>
-</p:notes>
-</file>
-
-<file path=ppt/notesSlides/notesSlide17.xml><?xml version="1.0" encoding="utf-8"?>
-<p:notes xmlns:p="http://schemas.openxmlformats.org/presentationml/2006/main">
-  <p:cSld>
-    <p:spTree>
-      <p:nvGrpSpPr>
-        <p:cNvPr id="1" name=""/>
-        <p:cNvGrpSpPr/>
-        <p:nvPr/>
-      </p:nvGrpSpPr>
-      <p:grpSpPr>
-        <a:xfrm xmlns:a="http://schemas.openxmlformats.org/drawingml/2006/main"/>
-      </p:grpSpPr>
-      <p:sp>
-        <p:nvSpPr>
-          <p:cNvPr id="2" name="Slide Image Placeholder 1"/>
-          <p:cNvSpPr>
-            <a:spLocks xmlns:a="http://schemas.openxmlformats.org/drawingml/2006/main" noGrp="1"/>
-          </p:cNvSpPr>
-          <p:nvPr>
-            <p:ph type="sldImg" idx="0"/>
-          </p:nvPr>
-        </p:nvSpPr>
-        <p:spPr/>
-      </p:sp>
-      <p:sp>
-        <p:nvSpPr>
-          <p:cNvPr id="3" name="Notes Placeholder 2"/>
-          <p:cNvSpPr>
-            <a:spLocks xmlns:a="http://schemas.openxmlformats.org/drawingml/2006/main" noGrp="1"/>
-          </p:cNvSpPr>
-          <p:nvPr>
-            <p:ph type="body" idx="1"/>
-          </p:nvPr>
-        </p:nvSpPr>
-        <p:spPr/>
-        <p:txBody>
-          <a:bodyPr xmlns:a="http://schemas.openxmlformats.org/drawingml/2006/main"/>
-          <a:lstStyle xmlns:a="http://schemas.openxmlformats.org/drawingml/2006/main"/>
-          <a:p xmlns:a="http://schemas.openxmlformats.org/drawingml/2006/main">
-            <a:r>
-              <a:t>這頁對應 Docker Hub tag / push / pull 流程，以及不要內嵌敏感資訊的提醒。</a:t>
-            </a:r>
-          </a:p>
-        </p:txBody>
-      </p:sp>
-      <p:sp>
-        <p:nvSpPr>
-          <p:cNvPr id="4" name="Slide Number Placeholder 3"/>
-          <p:cNvSpPr>
-            <a:spLocks xmlns:a="http://schemas.openxmlformats.org/drawingml/2006/main" noGrp="1"/>
-          </p:cNvSpPr>
-          <p:nvPr>
-            <p:ph type="sldNum" idx="5"/>
-          </p:nvPr>
-        </p:nvSpPr>
-        <p:spPr/>
-        <p:txBody>
-          <a:bodyPr xmlns:a="http://schemas.openxmlformats.org/drawingml/2006/main"/>
-          <a:lstStyle xmlns:a="http://schemas.openxmlformats.org/drawingml/2006/main"/>
-          <a:p xmlns:a="http://schemas.openxmlformats.org/drawingml/2006/main"/>
-        </p:txBody>
-      </p:sp>
-    </p:spTree>
-  </p:cSld>
-  <p:clrMapOvr>
-    <a:masterClrMapping xmlns:a="http://schemas.openxmlformats.org/drawingml/2006/main"/>
-  </p:clrMapOvr>
-</p:notes>
-</file>
-
-<file path=ppt/notesSlides/notesSlide18.xml><?xml version="1.0" encoding="utf-8"?>
-<p:notes xmlns:p="http://schemas.openxmlformats.org/presentationml/2006/main">
-  <p:cSld>
-    <p:spTree>
-      <p:nvGrpSpPr>
-        <p:cNvPr id="1" name=""/>
-        <p:cNvGrpSpPr/>
-        <p:nvPr/>
-      </p:nvGrpSpPr>
-      <p:grpSpPr>
-        <a:xfrm xmlns:a="http://schemas.openxmlformats.org/drawingml/2006/main"/>
-      </p:grpSpPr>
-      <p:sp>
-        <p:nvSpPr>
-          <p:cNvPr id="2" name="Slide Image Placeholder 1"/>
-          <p:cNvSpPr>
-            <a:spLocks xmlns:a="http://schemas.openxmlformats.org/drawingml/2006/main" noGrp="1"/>
-          </p:cNvSpPr>
-          <p:nvPr>
-            <p:ph type="sldImg" idx="0"/>
-          </p:nvPr>
-        </p:nvSpPr>
-        <p:spPr/>
-      </p:sp>
-      <p:sp>
-        <p:nvSpPr>
-          <p:cNvPr id="3" name="Notes Placeholder 2"/>
-          <p:cNvSpPr>
-            <a:spLocks xmlns:a="http://schemas.openxmlformats.org/drawingml/2006/main" noGrp="1"/>
-          </p:cNvSpPr>
-          <p:nvPr>
-            <p:ph type="body" idx="1"/>
-          </p:nvPr>
-        </p:nvSpPr>
-        <p:spPr/>
-        <p:txBody>
-          <a:bodyPr xmlns:a="http://schemas.openxmlformats.org/drawingml/2006/main"/>
-          <a:lstStyle xmlns:a="http://schemas.openxmlformats.org/drawingml/2006/main"/>
-          <a:p xmlns:a="http://schemas.openxmlformats.org/drawingml/2006/main">
-            <a:r>
-              <a:t>練習題來自 exercises.md 第 4 堂實作題 P3。</a:t>
-            </a:r>
-          </a:p>
-        </p:txBody>
-      </p:sp>
-      <p:sp>
-        <p:nvSpPr>
-          <p:cNvPr id="4" name="Slide Number Placeholder 3"/>
-          <p:cNvSpPr>
-            <a:spLocks xmlns:a="http://schemas.openxmlformats.org/drawingml/2006/main" noGrp="1"/>
-          </p:cNvSpPr>
-          <p:nvPr>
-            <p:ph type="sldNum" idx="5"/>
-          </p:nvPr>
-        </p:nvSpPr>
-        <p:spPr/>
-        <p:txBody>
-          <a:bodyPr xmlns:a="http://schemas.openxmlformats.org/drawingml/2006/main"/>
-          <a:lstStyle xmlns:a="http://schemas.openxmlformats.org/drawingml/2006/main"/>
-          <a:p xmlns:a="http://schemas.openxmlformats.org/drawingml/2006/main"/>
-        </p:txBody>
-      </p:sp>
-    </p:spTree>
-  </p:cSld>
-  <p:clrMapOvr>
-    <a:masterClrMapping xmlns:a="http://schemas.openxmlformats.org/drawingml/2006/main"/>
-  </p:clrMapOvr>
-</p:notes>
-</file>
-
-<file path=ppt/notesSlides/notesSlide19.xml><?xml version="1.0" encoding="utf-8"?>
-<p:notes xmlns:p="http://schemas.openxmlformats.org/presentationml/2006/main">
-  <p:cSld>
-    <p:spTree>
-      <p:nvGrpSpPr>
-        <p:cNvPr id="1" name=""/>
-        <p:cNvGrpSpPr/>
-        <p:nvPr/>
-      </p:nvGrpSpPr>
-      <p:grpSpPr>
-        <a:xfrm xmlns:a="http://schemas.openxmlformats.org/drawingml/2006/main"/>
-      </p:grpSpPr>
-      <p:sp>
-        <p:nvSpPr>
-          <p:cNvPr id="2" name="Slide Image Placeholder 1"/>
-          <p:cNvSpPr>
-            <a:spLocks xmlns:a="http://schemas.openxmlformats.org/drawingml/2006/main" noGrp="1"/>
-          </p:cNvSpPr>
-          <p:nvPr>
-            <p:ph type="sldImg" idx="0"/>
-          </p:nvPr>
-        </p:nvSpPr>
-        <p:spPr/>
-      </p:sp>
-      <p:sp>
-        <p:nvSpPr>
-          <p:cNvPr id="3" name="Notes Placeholder 2"/>
-          <p:cNvSpPr>
-            <a:spLocks xmlns:a="http://schemas.openxmlformats.org/drawingml/2006/main" noGrp="1"/>
-          </p:cNvSpPr>
-          <p:nvPr>
-            <p:ph type="body" idx="1"/>
-          </p:nvPr>
-        </p:nvSpPr>
-        <p:spPr/>
-        <p:txBody>
-          <a:bodyPr xmlns:a="http://schemas.openxmlformats.org/drawingml/2006/main"/>
-          <a:lstStyle xmlns:a="http://schemas.openxmlformats.org/drawingml/2006/main"/>
-          <a:p xmlns:a="http://schemas.openxmlformats.org/drawingml/2006/main">
-            <a:r>
-              <a:t>這頁銜接前一堂 Compose，也說明這一堂用 docker network 手動串接。</a:t>
-            </a:r>
-          </a:p>
-        </p:txBody>
-      </p:sp>
-      <p:sp>
-        <p:nvSpPr>
-          <p:cNvPr id="4" name="Slide Number Placeholder 3"/>
-          <p:cNvSpPr>
-            <a:spLocks xmlns:a="http://schemas.openxmlformats.org/drawingml/2006/main" noGrp="1"/>
-          </p:cNvSpPr>
-          <p:nvPr>
-            <p:ph type="sldNum" idx="5"/>
-          </p:nvPr>
-        </p:nvSpPr>
-        <p:spPr/>
-        <p:txBody>
-          <a:bodyPr xmlns:a="http://schemas.openxmlformats.org/drawingml/2006/main"/>
-          <a:lstStyle xmlns:a="http://schemas.openxmlformats.org/drawingml/2006/main"/>
-          <a:p xmlns:a="http://schemas.openxmlformats.org/drawingml/2006/main"/>
-        </p:txBody>
-      </p:sp>
-    </p:spTree>
-  </p:cSld>
-  <p:clrMapOvr>
-    <a:masterClrMapping xmlns:a="http://schemas.openxmlformats.org/drawingml/2006/main"/>
-  </p:clrMapOvr>
-</p:notes>
-</file>
-
-<file path=ppt/notesSlides/notesSlide2.xml><?xml version="1.0" encoding="utf-8"?>
-<p:notes xmlns:p="http://schemas.openxmlformats.org/presentationml/2006/main">
-  <p:cSld>
-    <p:spTree>
-      <p:nvGrpSpPr>
-        <p:cNvPr id="1" name=""/>
-        <p:cNvGrpSpPr/>
-        <p:nvPr/>
-      </p:nvGrpSpPr>
-      <p:grpSpPr>
-        <a:xfrm xmlns:a="http://schemas.openxmlformats.org/drawingml/2006/main"/>
-      </p:grpSpPr>
-      <p:sp>
-        <p:nvSpPr>
-          <p:cNvPr id="2" name="Slide Image Placeholder 1"/>
-          <p:cNvSpPr>
-            <a:spLocks xmlns:a="http://schemas.openxmlformats.org/drawingml/2006/main" noGrp="1"/>
-          </p:cNvSpPr>
-          <p:nvPr>
-            <p:ph type="sldImg" idx="0"/>
-          </p:nvPr>
-        </p:nvSpPr>
-        <p:spPr/>
-      </p:sp>
-      <p:sp>
-        <p:nvSpPr>
-          <p:cNvPr id="3" name="Notes Placeholder 2"/>
-          <p:cNvSpPr>
-            <a:spLocks xmlns:a="http://schemas.openxmlformats.org/drawingml/2006/main" noGrp="1"/>
-          </p:cNvSpPr>
-          <p:nvPr>
-            <p:ph type="body" idx="1"/>
-          </p:nvPr>
-        </p:nvSpPr>
-        <p:spPr/>
-        <p:txBody>
-          <a:bodyPr xmlns:a="http://schemas.openxmlformats.org/drawingml/2006/main"/>
-          <a:lstStyle xmlns:a="http://schemas.openxmlformats.org/drawingml/2006/main"/>
-          <a:p xmlns:a="http://schemas.openxmlformats.org/drawingml/2006/main">
-            <a:r>
-              <a:t>先交代時間安排。第四堂會比前幾堂多一些 Dockerfile 和資源控制的細節。</a:t>
-            </a:r>
-          </a:p>
-        </p:txBody>
-      </p:sp>
-      <p:sp>
-        <p:nvSpPr>
-          <p:cNvPr id="4" name="Slide Number Placeholder 3"/>
-          <p:cNvSpPr>
-            <a:spLocks xmlns:a="http://schemas.openxmlformats.org/drawingml/2006/main" noGrp="1"/>
-          </p:cNvSpPr>
-          <p:nvPr>
-            <p:ph type="sldNum" idx="5"/>
-          </p:nvPr>
-        </p:nvSpPr>
-        <p:spPr/>
-        <p:txBody>
-          <a:bodyPr xmlns:a="http://schemas.openxmlformats.org/drawingml/2006/main"/>
-          <a:lstStyle xmlns:a="http://schemas.openxmlformats.org/drawingml/2006/main"/>
-          <a:p xmlns:a="http://schemas.openxmlformats.org/drawingml/2006/main"/>
-        </p:txBody>
-      </p:sp>
-    </p:spTree>
-  </p:cSld>
-  <p:clrMapOvr>
-    <a:masterClrMapping xmlns:a="http://schemas.openxmlformats.org/drawingml/2006/main"/>
-  </p:clrMapOvr>
-</p:notes>
-</file>
-
-<file path=ppt/notesSlides/notesSlide20.xml><?xml version="1.0" encoding="utf-8"?>
-<p:notes xmlns:p="http://schemas.openxmlformats.org/presentationml/2006/main">
-  <p:cSld>
-    <p:spTree>
-      <p:nvGrpSpPr>
-        <p:cNvPr id="1" name=""/>
-        <p:cNvGrpSpPr/>
-        <p:nvPr/>
-      </p:nvGrpSpPr>
-      <p:grpSpPr>
-        <a:xfrm xmlns:a="http://schemas.openxmlformats.org/drawingml/2006/main"/>
-      </p:grpSpPr>
-      <p:sp>
-        <p:nvSpPr>
-          <p:cNvPr id="2" name="Slide Image Placeholder 1"/>
-          <p:cNvSpPr>
-            <a:spLocks xmlns:a="http://schemas.openxmlformats.org/drawingml/2006/main" noGrp="1"/>
-          </p:cNvSpPr>
-          <p:nvPr>
-            <p:ph type="sldImg" idx="0"/>
-          </p:nvPr>
-        </p:nvSpPr>
-        <p:spPr/>
-      </p:sp>
-      <p:sp>
-        <p:nvSpPr>
-          <p:cNvPr id="3" name="Notes Placeholder 2"/>
-          <p:cNvSpPr>
-            <a:spLocks xmlns:a="http://schemas.openxmlformats.org/drawingml/2006/main" noGrp="1"/>
-          </p:cNvSpPr>
-          <p:nvPr>
-            <p:ph type="body" idx="1"/>
-          </p:nvPr>
-        </p:nvSpPr>
-        <p:spPr/>
-        <p:txBody>
-          <a:bodyPr xmlns:a="http://schemas.openxmlformats.org/drawingml/2006/main"/>
-          <a:lstStyle xmlns:a="http://schemas.openxmlformats.org/drawingml/2006/main"/>
-          <a:p xmlns:a="http://schemas.openxmlformats.org/drawingml/2006/main">
-            <a:r>
-              <a:t>重點是容器之間不要用 localhost 找彼此；用容器名稱當 host。</a:t>
-            </a:r>
-          </a:p>
-        </p:txBody>
-      </p:sp>
-      <p:sp>
-        <p:nvSpPr>
-          <p:cNvPr id="4" name="Slide Number Placeholder 3"/>
-          <p:cNvSpPr>
-            <a:spLocks xmlns:a="http://schemas.openxmlformats.org/drawingml/2006/main" noGrp="1"/>
-          </p:cNvSpPr>
-          <p:nvPr>
-            <p:ph type="sldNum" idx="5"/>
-          </p:nvPr>
-        </p:nvSpPr>
-        <p:spPr/>
-        <p:txBody>
-          <a:bodyPr xmlns:a="http://schemas.openxmlformats.org/drawingml/2006/main"/>
-          <a:lstStyle xmlns:a="http://schemas.openxmlformats.org/drawingml/2006/main"/>
-          <a:p xmlns:a="http://schemas.openxmlformats.org/drawingml/2006/main"/>
-        </p:txBody>
-      </p:sp>
-    </p:spTree>
-  </p:cSld>
-  <p:clrMapOvr>
-    <a:masterClrMapping xmlns:a="http://schemas.openxmlformats.org/drawingml/2006/main"/>
-  </p:clrMapOvr>
-</p:notes>
-</file>
-
-<file path=ppt/notesSlides/notesSlide21.xml><?xml version="1.0" encoding="utf-8"?>
-<p:notes xmlns:p="http://schemas.openxmlformats.org/presentationml/2006/main">
-  <p:cSld>
-    <p:spTree>
-      <p:nvGrpSpPr>
-        <p:cNvPr id="1" name=""/>
-        <p:cNvGrpSpPr/>
-        <p:nvPr/>
-      </p:nvGrpSpPr>
-      <p:grpSpPr>
-        <a:xfrm xmlns:a="http://schemas.openxmlformats.org/drawingml/2006/main"/>
-      </p:grpSpPr>
-      <p:sp>
-        <p:nvSpPr>
-          <p:cNvPr id="2" name="Slide Image Placeholder 1"/>
-          <p:cNvSpPr>
-            <a:spLocks xmlns:a="http://schemas.openxmlformats.org/drawingml/2006/main" noGrp="1"/>
-          </p:cNvSpPr>
-          <p:nvPr>
-            <p:ph type="sldImg" idx="0"/>
-          </p:nvPr>
-        </p:nvSpPr>
-        <p:spPr/>
-      </p:sp>
-      <p:sp>
-        <p:nvSpPr>
-          <p:cNvPr id="3" name="Notes Placeholder 2"/>
-          <p:cNvSpPr>
-            <a:spLocks xmlns:a="http://schemas.openxmlformats.org/drawingml/2006/main" noGrp="1"/>
-          </p:cNvSpPr>
-          <p:nvPr>
-            <p:ph type="body" idx="1"/>
-          </p:nvPr>
-        </p:nvSpPr>
-        <p:spPr/>
-        <p:txBody>
-          <a:bodyPr xmlns:a="http://schemas.openxmlformats.org/drawingml/2006/main"/>
-          <a:lstStyle xmlns:a="http://schemas.openxmlformats.org/drawingml/2006/main"/>
-          <a:p xmlns:a="http://schemas.openxmlformats.org/drawingml/2006/main">
-            <a:r>
-              <a:t>對應 session4.md 的 app.py mysql.connector host='mysql-db' 與 network run 指令。</a:t>
-            </a:r>
-          </a:p>
-        </p:txBody>
-      </p:sp>
-      <p:sp>
-        <p:nvSpPr>
-          <p:cNvPr id="4" name="Slide Number Placeholder 3"/>
-          <p:cNvSpPr>
-            <a:spLocks xmlns:a="http://schemas.openxmlformats.org/drawingml/2006/main" noGrp="1"/>
-          </p:cNvSpPr>
-          <p:nvPr>
-            <p:ph type="sldNum" idx="5"/>
-          </p:nvPr>
-        </p:nvSpPr>
-        <p:spPr/>
-        <p:txBody>
-          <a:bodyPr xmlns:a="http://schemas.openxmlformats.org/drawingml/2006/main"/>
-          <a:lstStyle xmlns:a="http://schemas.openxmlformats.org/drawingml/2006/main"/>
-          <a:p xmlns:a="http://schemas.openxmlformats.org/drawingml/2006/main"/>
-        </p:txBody>
-      </p:sp>
-    </p:spTree>
-  </p:cSld>
-  <p:clrMapOvr>
-    <a:masterClrMapping xmlns:a="http://schemas.openxmlformats.org/drawingml/2006/main"/>
-  </p:clrMapOvr>
-</p:notes>
-</file>
-
-<file path=ppt/notesSlides/notesSlide22.xml><?xml version="1.0" encoding="utf-8"?>
-<p:notes xmlns:p="http://schemas.openxmlformats.org/presentationml/2006/main">
-  <p:cSld>
-    <p:spTree>
-      <p:nvGrpSpPr>
-        <p:cNvPr id="1" name=""/>
-        <p:cNvGrpSpPr/>
-        <p:nvPr/>
-      </p:nvGrpSpPr>
-      <p:grpSpPr>
-        <a:xfrm xmlns:a="http://schemas.openxmlformats.org/drawingml/2006/main"/>
-      </p:grpSpPr>
-      <p:sp>
-        <p:nvSpPr>
-          <p:cNvPr id="2" name="Slide Image Placeholder 1"/>
-          <p:cNvSpPr>
-            <a:spLocks xmlns:a="http://schemas.openxmlformats.org/drawingml/2006/main" noGrp="1"/>
-          </p:cNvSpPr>
-          <p:nvPr>
-            <p:ph type="sldImg" idx="0"/>
-          </p:nvPr>
-        </p:nvSpPr>
-        <p:spPr/>
-      </p:sp>
-      <p:sp>
-        <p:nvSpPr>
-          <p:cNvPr id="3" name="Notes Placeholder 2"/>
-          <p:cNvSpPr>
-            <a:spLocks xmlns:a="http://schemas.openxmlformats.org/drawingml/2006/main" noGrp="1"/>
-          </p:cNvSpPr>
-          <p:nvPr>
-            <p:ph type="body" idx="1"/>
-          </p:nvPr>
-        </p:nvSpPr>
-        <p:spPr/>
-        <p:txBody>
-          <a:bodyPr xmlns:a="http://schemas.openxmlformats.org/drawingml/2006/main"/>
-          <a:lstStyle xmlns:a="http://schemas.openxmlformats.org/drawingml/2006/main"/>
-          <a:p xmlns:a="http://schemas.openxmlformats.org/drawingml/2006/main">
-            <a:r>
-              <a:t>這頁是指令速查。若用 Compose，Compose 通常會自動建 network。</a:t>
-            </a:r>
-          </a:p>
-        </p:txBody>
-      </p:sp>
-      <p:sp>
-        <p:nvSpPr>
-          <p:cNvPr id="4" name="Slide Number Placeholder 3"/>
-          <p:cNvSpPr>
-            <a:spLocks xmlns:a="http://schemas.openxmlformats.org/drawingml/2006/main" noGrp="1"/>
-          </p:cNvSpPr>
-          <p:nvPr>
-            <p:ph type="sldNum" idx="5"/>
-          </p:nvPr>
-        </p:nvSpPr>
-        <p:spPr/>
-        <p:txBody>
-          <a:bodyPr xmlns:a="http://schemas.openxmlformats.org/drawingml/2006/main"/>
-          <a:lstStyle xmlns:a="http://schemas.openxmlformats.org/drawingml/2006/main"/>
-          <a:p xmlns:a="http://schemas.openxmlformats.org/drawingml/2006/main"/>
-        </p:txBody>
-      </p:sp>
-    </p:spTree>
-  </p:cSld>
-  <p:clrMapOvr>
-    <a:masterClrMapping xmlns:a="http://schemas.openxmlformats.org/drawingml/2006/main"/>
-  </p:clrMapOvr>
-</p:notes>
-</file>
-
-<file path=ppt/notesSlides/notesSlide23.xml><?xml version="1.0" encoding="utf-8"?>
-<p:notes xmlns:p="http://schemas.openxmlformats.org/presentationml/2006/main">
-  <p:cSld>
-    <p:spTree>
-      <p:nvGrpSpPr>
-        <p:cNvPr id="1" name=""/>
-        <p:cNvGrpSpPr/>
-        <p:nvPr/>
-      </p:nvGrpSpPr>
-      <p:grpSpPr>
-        <a:xfrm xmlns:a="http://schemas.openxmlformats.org/drawingml/2006/main"/>
-      </p:grpSpPr>
-      <p:sp>
-        <p:nvSpPr>
-          <p:cNvPr id="2" name="Slide Image Placeholder 1"/>
-          <p:cNvSpPr>
-            <a:spLocks xmlns:a="http://schemas.openxmlformats.org/drawingml/2006/main" noGrp="1"/>
-          </p:cNvSpPr>
-          <p:nvPr>
-            <p:ph type="sldImg" idx="0"/>
-          </p:nvPr>
-        </p:nvSpPr>
-        <p:spPr/>
-      </p:sp>
-      <p:sp>
-        <p:nvSpPr>
-          <p:cNvPr id="3" name="Notes Placeholder 2"/>
-          <p:cNvSpPr>
-            <a:spLocks xmlns:a="http://schemas.openxmlformats.org/drawingml/2006/main" noGrp="1"/>
-          </p:cNvSpPr>
-          <p:nvPr>
-            <p:ph type="body" idx="1"/>
-          </p:nvPr>
-        </p:nvSpPr>
-        <p:spPr/>
-        <p:txBody>
-          <a:bodyPr xmlns:a="http://schemas.openxmlformats.org/drawingml/2006/main"/>
-          <a:lstStyle xmlns:a="http://schemas.openxmlformats.org/drawingml/2006/main"/>
-          <a:p xmlns:a="http://schemas.openxmlformats.org/drawingml/2006/main">
-            <a:r>
-              <a:t>預設容器可使用主機可用資源。生產或多人開發機器上需要限制。</a:t>
-            </a:r>
-          </a:p>
-        </p:txBody>
-      </p:sp>
-      <p:sp>
-        <p:nvSpPr>
-          <p:cNvPr id="4" name="Slide Number Placeholder 3"/>
-          <p:cNvSpPr>
-            <a:spLocks xmlns:a="http://schemas.openxmlformats.org/drawingml/2006/main" noGrp="1"/>
-          </p:cNvSpPr>
-          <p:nvPr>
-            <p:ph type="sldNum" idx="5"/>
-          </p:nvPr>
-        </p:nvSpPr>
-        <p:spPr/>
-        <p:txBody>
-          <a:bodyPr xmlns:a="http://schemas.openxmlformats.org/drawingml/2006/main"/>
-          <a:lstStyle xmlns:a="http://schemas.openxmlformats.org/drawingml/2006/main"/>
-          <a:p xmlns:a="http://schemas.openxmlformats.org/drawingml/2006/main"/>
-        </p:txBody>
-      </p:sp>
-    </p:spTree>
-  </p:cSld>
-  <p:clrMapOvr>
-    <a:masterClrMapping xmlns:a="http://schemas.openxmlformats.org/drawingml/2006/main"/>
-  </p:clrMapOvr>
-</p:notes>
-</file>
-
-<file path=ppt/notesSlides/notesSlide24.xml><?xml version="1.0" encoding="utf-8"?>
-<p:notes xmlns:p="http://schemas.openxmlformats.org/presentationml/2006/main">
-  <p:cSld>
-    <p:spTree>
-      <p:nvGrpSpPr>
-        <p:cNvPr id="1" name=""/>
-        <p:cNvGrpSpPr/>
-        <p:nvPr/>
-      </p:nvGrpSpPr>
-      <p:grpSpPr>
-        <a:xfrm xmlns:a="http://schemas.openxmlformats.org/drawingml/2006/main"/>
-      </p:grpSpPr>
-      <p:sp>
-        <p:nvSpPr>
-          <p:cNvPr id="2" name="Slide Image Placeholder 1"/>
-          <p:cNvSpPr>
-            <a:spLocks xmlns:a="http://schemas.openxmlformats.org/drawingml/2006/main" noGrp="1"/>
-          </p:cNvSpPr>
-          <p:nvPr>
-            <p:ph type="sldImg" idx="0"/>
-          </p:nvPr>
-        </p:nvSpPr>
-        <p:spPr/>
-      </p:sp>
-      <p:sp>
-        <p:nvSpPr>
-          <p:cNvPr id="3" name="Notes Placeholder 2"/>
-          <p:cNvSpPr>
-            <a:spLocks xmlns:a="http://schemas.openxmlformats.org/drawingml/2006/main" noGrp="1"/>
-          </p:cNvSpPr>
-          <p:nvPr>
-            <p:ph type="body" idx="1"/>
-          </p:nvPr>
-        </p:nvSpPr>
-        <p:spPr/>
-        <p:txBody>
-          <a:bodyPr xmlns:a="http://schemas.openxmlformats.org/drawingml/2006/main"/>
-          <a:lstStyle xmlns:a="http://schemas.openxmlformats.org/drawingml/2006/main"/>
-          <a:p xmlns:a="http://schemas.openxmlformats.org/drawingml/2006/main">
-            <a:r>
-              <a:t>這頁用生成圖支撐概念，實際數字用可編輯文字呈現。</a:t>
-            </a:r>
-          </a:p>
-        </p:txBody>
-      </p:sp>
-      <p:sp>
-        <p:nvSpPr>
-          <p:cNvPr id="4" name="Slide Number Placeholder 3"/>
-          <p:cNvSpPr>
-            <a:spLocks xmlns:a="http://schemas.openxmlformats.org/drawingml/2006/main" noGrp="1"/>
-          </p:cNvSpPr>
-          <p:nvPr>
-            <p:ph type="sldNum" idx="5"/>
-          </p:nvPr>
-        </p:nvSpPr>
-        <p:spPr/>
-        <p:txBody>
-          <a:bodyPr xmlns:a="http://schemas.openxmlformats.org/drawingml/2006/main"/>
-          <a:lstStyle xmlns:a="http://schemas.openxmlformats.org/drawingml/2006/main"/>
-          <a:p xmlns:a="http://schemas.openxmlformats.org/drawingml/2006/main"/>
-        </p:txBody>
-      </p:sp>
-    </p:spTree>
-  </p:cSld>
-  <p:clrMapOvr>
-    <a:masterClrMapping xmlns:a="http://schemas.openxmlformats.org/drawingml/2006/main"/>
-  </p:clrMapOvr>
-</p:notes>
-</file>
-
-<file path=ppt/notesSlides/notesSlide25.xml><?xml version="1.0" encoding="utf-8"?>
-<p:notes xmlns:p="http://schemas.openxmlformats.org/presentationml/2006/main">
-  <p:cSld>
-    <p:spTree>
-      <p:nvGrpSpPr>
-        <p:cNvPr id="1" name=""/>
-        <p:cNvGrpSpPr/>
-        <p:nvPr/>
-      </p:nvGrpSpPr>
-      <p:grpSpPr>
-        <a:xfrm xmlns:a="http://schemas.openxmlformats.org/drawingml/2006/main"/>
-      </p:grpSpPr>
-      <p:sp>
-        <p:nvSpPr>
-          <p:cNvPr id="2" name="Slide Image Placeholder 1"/>
-          <p:cNvSpPr>
-            <a:spLocks xmlns:a="http://schemas.openxmlformats.org/drawingml/2006/main" noGrp="1"/>
-          </p:cNvSpPr>
-          <p:nvPr>
-            <p:ph type="sldImg" idx="0"/>
-          </p:nvPr>
-        </p:nvSpPr>
-        <p:spPr/>
-      </p:sp>
-      <p:sp>
-        <p:nvSpPr>
-          <p:cNvPr id="3" name="Notes Placeholder 2"/>
-          <p:cNvSpPr>
-            <a:spLocks xmlns:a="http://schemas.openxmlformats.org/drawingml/2006/main" noGrp="1"/>
-          </p:cNvSpPr>
-          <p:nvPr>
-            <p:ph type="body" idx="1"/>
-          </p:nvPr>
-        </p:nvSpPr>
-        <p:spPr/>
-        <p:txBody>
-          <a:bodyPr xmlns:a="http://schemas.openxmlformats.org/drawingml/2006/main"/>
-          <a:lstStyle xmlns:a="http://schemas.openxmlformats.org/drawingml/2006/main"/>
-          <a:p xmlns:a="http://schemas.openxmlformats.org/drawingml/2006/main">
-            <a:r>
-              <a:t>練習題來自 exercises.md 第 4 堂概念題 Q4。</a:t>
-            </a:r>
-          </a:p>
-        </p:txBody>
-      </p:sp>
-      <p:sp>
-        <p:nvSpPr>
-          <p:cNvPr id="4" name="Slide Number Placeholder 3"/>
-          <p:cNvSpPr>
-            <a:spLocks xmlns:a="http://schemas.openxmlformats.org/drawingml/2006/main" noGrp="1"/>
-          </p:cNvSpPr>
-          <p:nvPr>
-            <p:ph type="sldNum" idx="5"/>
-          </p:nvPr>
-        </p:nvSpPr>
-        <p:spPr/>
-        <p:txBody>
-          <a:bodyPr xmlns:a="http://schemas.openxmlformats.org/drawingml/2006/main"/>
-          <a:lstStyle xmlns:a="http://schemas.openxmlformats.org/drawingml/2006/main"/>
-          <a:p xmlns:a="http://schemas.openxmlformats.org/drawingml/2006/main"/>
-        </p:txBody>
-      </p:sp>
-    </p:spTree>
-  </p:cSld>
-  <p:clrMapOvr>
-    <a:masterClrMapping xmlns:a="http://schemas.openxmlformats.org/drawingml/2006/main"/>
-  </p:clrMapOvr>
-</p:notes>
-</file>
-
-<file path=ppt/notesSlides/notesSlide26.xml><?xml version="1.0" encoding="utf-8"?>
-<p:notes xmlns:p="http://schemas.openxmlformats.org/presentationml/2006/main">
-  <p:cSld>
-    <p:spTree>
-      <p:nvGrpSpPr>
-        <p:cNvPr id="1" name=""/>
-        <p:cNvGrpSpPr/>
-        <p:nvPr/>
-      </p:nvGrpSpPr>
-      <p:grpSpPr>
-        <a:xfrm xmlns:a="http://schemas.openxmlformats.org/drawingml/2006/main"/>
-      </p:grpSpPr>
-      <p:sp>
-        <p:nvSpPr>
-          <p:cNvPr id="2" name="Slide Image Placeholder 1"/>
-          <p:cNvSpPr>
-            <a:spLocks xmlns:a="http://schemas.openxmlformats.org/drawingml/2006/main" noGrp="1"/>
-          </p:cNvSpPr>
-          <p:nvPr>
-            <p:ph type="sldImg" idx="0"/>
-          </p:nvPr>
-        </p:nvSpPr>
-        <p:spPr/>
-      </p:sp>
-      <p:sp>
-        <p:nvSpPr>
-          <p:cNvPr id="3" name="Notes Placeholder 2"/>
-          <p:cNvSpPr>
-            <a:spLocks xmlns:a="http://schemas.openxmlformats.org/drawingml/2006/main" noGrp="1"/>
-          </p:cNvSpPr>
-          <p:nvPr>
-            <p:ph type="body" idx="1"/>
-          </p:nvPr>
-        </p:nvSpPr>
-        <p:spPr/>
-        <p:txBody>
-          <a:bodyPr xmlns:a="http://schemas.openxmlformats.org/drawingml/2006/main"/>
-          <a:lstStyle xmlns:a="http://schemas.openxmlformats.org/drawingml/2006/main"/>
-          <a:p xmlns:a="http://schemas.openxmlformats.org/drawingml/2006/main">
-            <a:r>
-              <a:t>用最小 CPU 壓力測試讓學生直觀看到限制效果。</a:t>
-            </a:r>
-          </a:p>
-        </p:txBody>
-      </p:sp>
-      <p:sp>
-        <p:nvSpPr>
-          <p:cNvPr id="4" name="Slide Number Placeholder 3"/>
-          <p:cNvSpPr>
-            <a:spLocks xmlns:a="http://schemas.openxmlformats.org/drawingml/2006/main" noGrp="1"/>
-          </p:cNvSpPr>
-          <p:nvPr>
-            <p:ph type="sldNum" idx="5"/>
-          </p:nvPr>
-        </p:nvSpPr>
-        <p:spPr/>
-        <p:txBody>
-          <a:bodyPr xmlns:a="http://schemas.openxmlformats.org/drawingml/2006/main"/>
-          <a:lstStyle xmlns:a="http://schemas.openxmlformats.org/drawingml/2006/main"/>
-          <a:p xmlns:a="http://schemas.openxmlformats.org/drawingml/2006/main"/>
-        </p:txBody>
-      </p:sp>
-    </p:spTree>
-  </p:cSld>
-  <p:clrMapOvr>
-    <a:masterClrMapping xmlns:a="http://schemas.openxmlformats.org/drawingml/2006/main"/>
-  </p:clrMapOvr>
-</p:notes>
-</file>
-
-<file path=ppt/notesSlides/notesSlide27.xml><?xml version="1.0" encoding="utf-8"?>
-<p:notes xmlns:p="http://schemas.openxmlformats.org/presentationml/2006/main">
-  <p:cSld>
-    <p:spTree>
-      <p:nvGrpSpPr>
-        <p:cNvPr id="1" name=""/>
-        <p:cNvGrpSpPr/>
-        <p:nvPr/>
-      </p:nvGrpSpPr>
-      <p:grpSpPr>
-        <a:xfrm xmlns:a="http://schemas.openxmlformats.org/drawingml/2006/main"/>
-      </p:grpSpPr>
-      <p:sp>
-        <p:nvSpPr>
-          <p:cNvPr id="2" name="Slide Image Placeholder 1"/>
-          <p:cNvSpPr>
-            <a:spLocks xmlns:a="http://schemas.openxmlformats.org/drawingml/2006/main" noGrp="1"/>
-          </p:cNvSpPr>
-          <p:nvPr>
-            <p:ph type="sldImg" idx="0"/>
-          </p:nvPr>
-        </p:nvSpPr>
-        <p:spPr/>
-      </p:sp>
-      <p:sp>
-        <p:nvSpPr>
-          <p:cNvPr id="3" name="Notes Placeholder 2"/>
-          <p:cNvSpPr>
-            <a:spLocks xmlns:a="http://schemas.openxmlformats.org/drawingml/2006/main" noGrp="1"/>
-          </p:cNvSpPr>
-          <p:nvPr>
-            <p:ph type="body" idx="1"/>
-          </p:nvPr>
-        </p:nvSpPr>
-        <p:spPr/>
-        <p:txBody>
-          <a:bodyPr xmlns:a="http://schemas.openxmlformats.org/drawingml/2006/main"/>
-          <a:lstStyle xmlns:a="http://schemas.openxmlformats.org/drawingml/2006/main"/>
-          <a:p xmlns:a="http://schemas.openxmlformats.org/drawingml/2006/main">
-            <a:r>
-              <a:t>提醒 Windows Docker Desktop 上部分資源參數可能受平台限制。</a:t>
-            </a:r>
-          </a:p>
-        </p:txBody>
-      </p:sp>
-      <p:sp>
-        <p:nvSpPr>
-          <p:cNvPr id="4" name="Slide Number Placeholder 3"/>
-          <p:cNvSpPr>
-            <a:spLocks xmlns:a="http://schemas.openxmlformats.org/drawingml/2006/main" noGrp="1"/>
-          </p:cNvSpPr>
-          <p:nvPr>
-            <p:ph type="sldNum" idx="5"/>
-          </p:nvPr>
-        </p:nvSpPr>
-        <p:spPr/>
-        <p:txBody>
-          <a:bodyPr xmlns:a="http://schemas.openxmlformats.org/drawingml/2006/main"/>
-          <a:lstStyle xmlns:a="http://schemas.openxmlformats.org/drawingml/2006/main"/>
-          <a:p xmlns:a="http://schemas.openxmlformats.org/drawingml/2006/main"/>
-        </p:txBody>
-      </p:sp>
-    </p:spTree>
-  </p:cSld>
-  <p:clrMapOvr>
-    <a:masterClrMapping xmlns:a="http://schemas.openxmlformats.org/drawingml/2006/main"/>
-  </p:clrMapOvr>
-</p:notes>
-</file>
-
-<file path=ppt/notesSlides/notesSlide28.xml><?xml version="1.0" encoding="utf-8"?>
-<p:notes xmlns:p="http://schemas.openxmlformats.org/presentationml/2006/main">
-  <p:cSld>
-    <p:spTree>
-      <p:nvGrpSpPr>
-        <p:cNvPr id="1" name=""/>
-        <p:cNvGrpSpPr/>
-        <p:nvPr/>
-      </p:nvGrpSpPr>
-      <p:grpSpPr>
-        <a:xfrm xmlns:a="http://schemas.openxmlformats.org/drawingml/2006/main"/>
-      </p:grpSpPr>
-      <p:sp>
-        <p:nvSpPr>
-          <p:cNvPr id="2" name="Slide Image Placeholder 1"/>
-          <p:cNvSpPr>
-            <a:spLocks xmlns:a="http://schemas.openxmlformats.org/drawingml/2006/main" noGrp="1"/>
-          </p:cNvSpPr>
-          <p:nvPr>
-            <p:ph type="sldImg" idx="0"/>
-          </p:nvPr>
-        </p:nvSpPr>
-        <p:spPr/>
-      </p:sp>
-      <p:sp>
-        <p:nvSpPr>
-          <p:cNvPr id="3" name="Notes Placeholder 2"/>
-          <p:cNvSpPr>
-            <a:spLocks xmlns:a="http://schemas.openxmlformats.org/drawingml/2006/main" noGrp="1"/>
-          </p:cNvSpPr>
-          <p:nvPr>
-            <p:ph type="body" idx="1"/>
-          </p:nvPr>
-        </p:nvSpPr>
-        <p:spPr/>
-        <p:txBody>
-          <a:bodyPr xmlns:a="http://schemas.openxmlformats.org/drawingml/2006/main"/>
-          <a:lstStyle xmlns:a="http://schemas.openxmlformats.org/drawingml/2006/main"/>
-          <a:p xmlns:a="http://schemas.openxmlformats.org/drawingml/2006/main">
-            <a:r>
-              <a:t>這頁對應 session4.md docker update 區段。</a:t>
-            </a:r>
-          </a:p>
-        </p:txBody>
-      </p:sp>
-      <p:sp>
-        <p:nvSpPr>
-          <p:cNvPr id="4" name="Slide Number Placeholder 3"/>
-          <p:cNvSpPr>
-            <a:spLocks xmlns:a="http://schemas.openxmlformats.org/drawingml/2006/main" noGrp="1"/>
-          </p:cNvSpPr>
-          <p:nvPr>
-            <p:ph type="sldNum" idx="5"/>
-          </p:nvPr>
-        </p:nvSpPr>
-        <p:spPr/>
-        <p:txBody>
-          <a:bodyPr xmlns:a="http://schemas.openxmlformats.org/drawingml/2006/main"/>
-          <a:lstStyle xmlns:a="http://schemas.openxmlformats.org/drawingml/2006/main"/>
-          <a:p xmlns:a="http://schemas.openxmlformats.org/drawingml/2006/main"/>
-        </p:txBody>
-      </p:sp>
-    </p:spTree>
-  </p:cSld>
-  <p:clrMapOvr>
-    <a:masterClrMapping xmlns:a="http://schemas.openxmlformats.org/drawingml/2006/main"/>
-  </p:clrMapOvr>
-</p:notes>
-</file>
-
-<file path=ppt/notesSlides/notesSlide29.xml><?xml version="1.0" encoding="utf-8"?>
-<p:notes xmlns:p="http://schemas.openxmlformats.org/presentationml/2006/main">
-  <p:cSld>
-    <p:spTree>
-      <p:nvGrpSpPr>
-        <p:cNvPr id="1" name=""/>
-        <p:cNvGrpSpPr/>
-        <p:nvPr/>
-      </p:nvGrpSpPr>
-      <p:grpSpPr>
-        <a:xfrm xmlns:a="http://schemas.openxmlformats.org/drawingml/2006/main"/>
-      </p:grpSpPr>
-      <p:sp>
-        <p:nvSpPr>
-          <p:cNvPr id="2" name="Slide Image Placeholder 1"/>
-          <p:cNvSpPr>
-            <a:spLocks xmlns:a="http://schemas.openxmlformats.org/drawingml/2006/main" noGrp="1"/>
-          </p:cNvSpPr>
-          <p:nvPr>
-            <p:ph type="sldImg" idx="0"/>
-          </p:nvPr>
-        </p:nvSpPr>
-        <p:spPr/>
-      </p:sp>
-      <p:sp>
-        <p:nvSpPr>
-          <p:cNvPr id="3" name="Notes Placeholder 2"/>
-          <p:cNvSpPr>
-            <a:spLocks xmlns:a="http://schemas.openxmlformats.org/drawingml/2006/main" noGrp="1"/>
-          </p:cNvSpPr>
-          <p:nvPr>
-            <p:ph type="body" idx="1"/>
-          </p:nvPr>
-        </p:nvSpPr>
-        <p:spPr/>
-        <p:txBody>
-          <a:bodyPr xmlns:a="http://schemas.openxmlformats.org/drawingml/2006/main"/>
-          <a:lstStyle xmlns:a="http://schemas.openxmlformats.org/drawingml/2006/main"/>
-          <a:p xmlns:a="http://schemas.openxmlformats.org/drawingml/2006/main">
-            <a:r>
-              <a:t>練習題來自 exercises.md 第 4 堂實作題 P4。</a:t>
-            </a:r>
-          </a:p>
-        </p:txBody>
-      </p:sp>
-      <p:sp>
-        <p:nvSpPr>
-          <p:cNvPr id="4" name="Slide Number Placeholder 3"/>
-          <p:cNvSpPr>
-            <a:spLocks xmlns:a="http://schemas.openxmlformats.org/drawingml/2006/main" noGrp="1"/>
-          </p:cNvSpPr>
-          <p:nvPr>
-            <p:ph type="sldNum" idx="5"/>
-          </p:nvPr>
-        </p:nvSpPr>
-        <p:spPr/>
-        <p:txBody>
-          <a:bodyPr xmlns:a="http://schemas.openxmlformats.org/drawingml/2006/main"/>
-          <a:lstStyle xmlns:a="http://schemas.openxmlformats.org/drawingml/2006/main"/>
-          <a:p xmlns:a="http://schemas.openxmlformats.org/drawingml/2006/main"/>
-        </p:txBody>
-      </p:sp>
-    </p:spTree>
-  </p:cSld>
-  <p:clrMapOvr>
-    <a:masterClrMapping xmlns:a="http://schemas.openxmlformats.org/drawingml/2006/main"/>
-  </p:clrMapOvr>
-</p:notes>
-</file>
-
-<file path=ppt/notesSlides/notesSlide3.xml><?xml version="1.0" encoding="utf-8"?>
-<p:notes xmlns:p="http://schemas.openxmlformats.org/presentationml/2006/main">
-  <p:cSld>
-    <p:spTree>
-      <p:nvGrpSpPr>
-        <p:cNvPr id="1" name=""/>
-        <p:cNvGrpSpPr/>
-        <p:nvPr/>
-      </p:nvGrpSpPr>
-      <p:grpSpPr>
-        <a:xfrm xmlns:a="http://schemas.openxmlformats.org/drawingml/2006/main"/>
-      </p:grpSpPr>
-      <p:sp>
-        <p:nvSpPr>
-          <p:cNvPr id="2" name="Slide Image Placeholder 1"/>
-          <p:cNvSpPr>
-            <a:spLocks xmlns:a="http://schemas.openxmlformats.org/drawingml/2006/main" noGrp="1"/>
-          </p:cNvSpPr>
-          <p:nvPr>
-            <p:ph type="sldImg" idx="0"/>
-          </p:nvPr>
-        </p:nvSpPr>
-        <p:spPr/>
-      </p:sp>
-      <p:sp>
-        <p:nvSpPr>
-          <p:cNvPr id="3" name="Notes Placeholder 2"/>
-          <p:cNvSpPr>
-            <a:spLocks xmlns:a="http://schemas.openxmlformats.org/drawingml/2006/main" noGrp="1"/>
-          </p:cNvSpPr>
-          <p:nvPr>
-            <p:ph type="body" idx="1"/>
-          </p:nvPr>
-        </p:nvSpPr>
-        <p:spPr/>
-        <p:txBody>
-          <a:bodyPr xmlns:a="http://schemas.openxmlformats.org/drawingml/2006/main"/>
-          <a:lstStyle xmlns:a="http://schemas.openxmlformats.org/drawingml/2006/main"/>
-          <a:p xmlns:a="http://schemas.openxmlformats.org/drawingml/2006/main">
-            <a:r>
-              <a:t>連回第一堂 Image 是模板的概念：這一堂學的是如何自己做模板。</a:t>
-            </a:r>
-          </a:p>
-        </p:txBody>
-      </p:sp>
-      <p:sp>
-        <p:nvSpPr>
-          <p:cNvPr id="4" name="Slide Number Placeholder 3"/>
-          <p:cNvSpPr>
-            <a:spLocks xmlns:a="http://schemas.openxmlformats.org/drawingml/2006/main" noGrp="1"/>
-          </p:cNvSpPr>
-          <p:nvPr>
-            <p:ph type="sldNum" idx="5"/>
-          </p:nvPr>
-        </p:nvSpPr>
-        <p:spPr/>
-        <p:txBody>
-          <a:bodyPr xmlns:a="http://schemas.openxmlformats.org/drawingml/2006/main"/>
-          <a:lstStyle xmlns:a="http://schemas.openxmlformats.org/drawingml/2006/main"/>
-          <a:p xmlns:a="http://schemas.openxmlformats.org/drawingml/2006/main"/>
-        </p:txBody>
-      </p:sp>
-    </p:spTree>
-  </p:cSld>
-  <p:clrMapOvr>
-    <a:masterClrMapping xmlns:a="http://schemas.openxmlformats.org/drawingml/2006/main"/>
-  </p:clrMapOvr>
-</p:notes>
-</file>
-
-<file path=ppt/notesSlides/notesSlide30.xml><?xml version="1.0" encoding="utf-8"?>
-<p:notes xmlns:p="http://schemas.openxmlformats.org/presentationml/2006/main">
-  <p:cSld>
-    <p:spTree>
-      <p:nvGrpSpPr>
-        <p:cNvPr id="1" name=""/>
-        <p:cNvGrpSpPr/>
-        <p:nvPr/>
-      </p:nvGrpSpPr>
-      <p:grpSpPr>
-        <a:xfrm xmlns:a="http://schemas.openxmlformats.org/drawingml/2006/main"/>
-      </p:grpSpPr>
-      <p:sp>
-        <p:nvSpPr>
-          <p:cNvPr id="2" name="Slide Image Placeholder 1"/>
-          <p:cNvSpPr>
-            <a:spLocks xmlns:a="http://schemas.openxmlformats.org/drawingml/2006/main" noGrp="1"/>
-          </p:cNvSpPr>
-          <p:nvPr>
-            <p:ph type="sldImg" idx="0"/>
-          </p:nvPr>
-        </p:nvSpPr>
-        <p:spPr/>
-      </p:sp>
-      <p:sp>
-        <p:nvSpPr>
-          <p:cNvPr id="3" name="Notes Placeholder 2"/>
-          <p:cNvSpPr>
-            <a:spLocks xmlns:a="http://schemas.openxmlformats.org/drawingml/2006/main" noGrp="1"/>
-          </p:cNvSpPr>
-          <p:nvPr>
-            <p:ph type="body" idx="1"/>
-          </p:nvPr>
-        </p:nvSpPr>
-        <p:spPr/>
-        <p:txBody>
-          <a:bodyPr xmlns:a="http://schemas.openxmlformats.org/drawingml/2006/main"/>
-          <a:lstStyle xmlns:a="http://schemas.openxmlformats.org/drawingml/2006/main"/>
-          <a:p xmlns:a="http://schemas.openxmlformats.org/drawingml/2006/main">
-            <a:r>
-              <a:t>來自 session4.md 多容器資源配置實戰演練。</a:t>
-            </a:r>
-          </a:p>
-        </p:txBody>
-      </p:sp>
-      <p:sp>
-        <p:nvSpPr>
-          <p:cNvPr id="4" name="Slide Number Placeholder 3"/>
-          <p:cNvSpPr>
-            <a:spLocks xmlns:a="http://schemas.openxmlformats.org/drawingml/2006/main" noGrp="1"/>
-          </p:cNvSpPr>
-          <p:nvPr>
-            <p:ph type="sldNum" idx="5"/>
-          </p:nvPr>
-        </p:nvSpPr>
-        <p:spPr/>
-        <p:txBody>
-          <a:bodyPr xmlns:a="http://schemas.openxmlformats.org/drawingml/2006/main"/>
-          <a:lstStyle xmlns:a="http://schemas.openxmlformats.org/drawingml/2006/main"/>
-          <a:p xmlns:a="http://schemas.openxmlformats.org/drawingml/2006/main"/>
-        </p:txBody>
-      </p:sp>
-    </p:spTree>
-  </p:cSld>
-  <p:clrMapOvr>
-    <a:masterClrMapping xmlns:a="http://schemas.openxmlformats.org/drawingml/2006/main"/>
-  </p:clrMapOvr>
-</p:notes>
-</file>
-
-<file path=ppt/notesSlides/notesSlide31.xml><?xml version="1.0" encoding="utf-8"?>
-<p:notes xmlns:p="http://schemas.openxmlformats.org/presentationml/2006/main">
-  <p:cSld>
-    <p:spTree>
-      <p:nvGrpSpPr>
-        <p:cNvPr id="1" name=""/>
-        <p:cNvGrpSpPr/>
-        <p:nvPr/>
-      </p:nvGrpSpPr>
-      <p:grpSpPr>
-        <a:xfrm xmlns:a="http://schemas.openxmlformats.org/drawingml/2006/main"/>
-      </p:grpSpPr>
-      <p:sp>
-        <p:nvSpPr>
-          <p:cNvPr id="2" name="Slide Image Placeholder 1"/>
-          <p:cNvSpPr>
-            <a:spLocks xmlns:a="http://schemas.openxmlformats.org/drawingml/2006/main" noGrp="1"/>
-          </p:cNvSpPr>
-          <p:nvPr>
-            <p:ph type="sldImg" idx="0"/>
-          </p:nvPr>
-        </p:nvSpPr>
-        <p:spPr/>
-      </p:sp>
-      <p:sp>
-        <p:nvSpPr>
-          <p:cNvPr id="3" name="Notes Placeholder 2"/>
-          <p:cNvSpPr>
-            <a:spLocks xmlns:a="http://schemas.openxmlformats.org/drawingml/2006/main" noGrp="1"/>
-          </p:cNvSpPr>
-          <p:nvPr>
-            <p:ph type="body" idx="1"/>
-          </p:nvPr>
-        </p:nvSpPr>
-        <p:spPr/>
-        <p:txBody>
-          <a:bodyPr xmlns:a="http://schemas.openxmlformats.org/drawingml/2006/main"/>
-          <a:lstStyle xmlns:a="http://schemas.openxmlformats.org/drawingml/2006/main"/>
-          <a:p xmlns:a="http://schemas.openxmlformats.org/drawingml/2006/main">
-            <a:r>
-              <a:t>練習題來自 exercises.md 第 4 堂挑戰題 C1-C2。</a:t>
-            </a:r>
-          </a:p>
-        </p:txBody>
-      </p:sp>
-      <p:sp>
-        <p:nvSpPr>
-          <p:cNvPr id="4" name="Slide Number Placeholder 3"/>
-          <p:cNvSpPr>
-            <a:spLocks xmlns:a="http://schemas.openxmlformats.org/drawingml/2006/main" noGrp="1"/>
-          </p:cNvSpPr>
-          <p:nvPr>
-            <p:ph type="sldNum" idx="5"/>
-          </p:nvPr>
-        </p:nvSpPr>
-        <p:spPr/>
-        <p:txBody>
-          <a:bodyPr xmlns:a="http://schemas.openxmlformats.org/drawingml/2006/main"/>
-          <a:lstStyle xmlns:a="http://schemas.openxmlformats.org/drawingml/2006/main"/>
-          <a:p xmlns:a="http://schemas.openxmlformats.org/drawingml/2006/main"/>
-        </p:txBody>
-      </p:sp>
-    </p:spTree>
-  </p:cSld>
-  <p:clrMapOvr>
-    <a:masterClrMapping xmlns:a="http://schemas.openxmlformats.org/drawingml/2006/main"/>
-  </p:clrMapOvr>
-</p:notes>
-</file>
-
-<file path=ppt/notesSlides/notesSlide32.xml><?xml version="1.0" encoding="utf-8"?>
-<p:notes xmlns:p="http://schemas.openxmlformats.org/presentationml/2006/main">
-  <p:cSld>
-    <p:spTree>
-      <p:nvGrpSpPr>
-        <p:cNvPr id="1" name=""/>
-        <p:cNvGrpSpPr/>
-        <p:nvPr/>
-      </p:nvGrpSpPr>
-      <p:grpSpPr>
-        <a:xfrm xmlns:a="http://schemas.openxmlformats.org/drawingml/2006/main"/>
-      </p:grpSpPr>
-      <p:sp>
-        <p:nvSpPr>
-          <p:cNvPr id="2" name="Slide Image Placeholder 1"/>
-          <p:cNvSpPr>
-            <a:spLocks xmlns:a="http://schemas.openxmlformats.org/drawingml/2006/main" noGrp="1"/>
-          </p:cNvSpPr>
-          <p:nvPr>
-            <p:ph type="sldImg" idx="0"/>
-          </p:nvPr>
-        </p:nvSpPr>
-        <p:spPr/>
-      </p:sp>
-      <p:sp>
-        <p:nvSpPr>
-          <p:cNvPr id="3" name="Notes Placeholder 2"/>
-          <p:cNvSpPr>
-            <a:spLocks xmlns:a="http://schemas.openxmlformats.org/drawingml/2006/main" noGrp="1"/>
-          </p:cNvSpPr>
-          <p:nvPr>
-            <p:ph type="body" idx="1"/>
-          </p:nvPr>
-        </p:nvSpPr>
-        <p:spPr/>
-        <p:txBody>
-          <a:bodyPr xmlns:a="http://schemas.openxmlformats.org/drawingml/2006/main"/>
-          <a:lstStyle xmlns:a="http://schemas.openxmlformats.org/drawingml/2006/main"/>
-          <a:p xmlns:a="http://schemas.openxmlformats.org/drawingml/2006/main">
-            <a:r>
-              <a:t>收斂本堂課重點，並自然接到第五堂 CI/CD。</a:t>
-            </a:r>
-          </a:p>
-        </p:txBody>
-      </p:sp>
-      <p:sp>
-        <p:nvSpPr>
-          <p:cNvPr id="4" name="Slide Number Placeholder 3"/>
-          <p:cNvSpPr>
-            <a:spLocks xmlns:a="http://schemas.openxmlformats.org/drawingml/2006/main" noGrp="1"/>
-          </p:cNvSpPr>
-          <p:nvPr>
-            <p:ph type="sldNum" idx="5"/>
-          </p:nvPr>
-        </p:nvSpPr>
-        <p:spPr/>
-        <p:txBody>
-          <a:bodyPr xmlns:a="http://schemas.openxmlformats.org/drawingml/2006/main"/>
-          <a:lstStyle xmlns:a="http://schemas.openxmlformats.org/drawingml/2006/main"/>
-          <a:p xmlns:a="http://schemas.openxmlformats.org/drawingml/2006/main"/>
-        </p:txBody>
-      </p:sp>
-    </p:spTree>
-  </p:cSld>
-  <p:clrMapOvr>
-    <a:masterClrMapping xmlns:a="http://schemas.openxmlformats.org/drawingml/2006/main"/>
-  </p:clrMapOvr>
-</p:notes>
-</file>
-
-<file path=ppt/notesSlides/notesSlide4.xml><?xml version="1.0" encoding="utf-8"?>
-<p:notes xmlns:p="http://schemas.openxmlformats.org/presentationml/2006/main">
-  <p:cSld>
-    <p:spTree>
-      <p:nvGrpSpPr>
-        <p:cNvPr id="1" name=""/>
-        <p:cNvGrpSpPr/>
-        <p:nvPr/>
-      </p:nvGrpSpPr>
-      <p:grpSpPr>
-        <a:xfrm xmlns:a="http://schemas.openxmlformats.org/drawingml/2006/main"/>
-      </p:grpSpPr>
-      <p:sp>
-        <p:nvSpPr>
-          <p:cNvPr id="2" name="Slide Image Placeholder 1"/>
-          <p:cNvSpPr>
-            <a:spLocks xmlns:a="http://schemas.openxmlformats.org/drawingml/2006/main" noGrp="1"/>
-          </p:cNvSpPr>
-          <p:nvPr>
-            <p:ph type="sldImg" idx="0"/>
-          </p:nvPr>
-        </p:nvSpPr>
-        <p:spPr/>
-      </p:sp>
-      <p:sp>
-        <p:nvSpPr>
-          <p:cNvPr id="3" name="Notes Placeholder 2"/>
-          <p:cNvSpPr>
-            <a:spLocks xmlns:a="http://schemas.openxmlformats.org/drawingml/2006/main" noGrp="1"/>
-          </p:cNvSpPr>
-          <p:nvPr>
-            <p:ph type="body" idx="1"/>
-          </p:nvPr>
-        </p:nvSpPr>
-        <p:spPr/>
-        <p:txBody>
-          <a:bodyPr xmlns:a="http://schemas.openxmlformats.org/drawingml/2006/main"/>
-          <a:lstStyle xmlns:a="http://schemas.openxmlformats.org/drawingml/2006/main"/>
-          <a:p xmlns:a="http://schemas.openxmlformats.org/drawingml/2006/main">
-            <a:r>
-              <a:t>Dockerfile 經過 build 產生 Image；Image 被 run 後產生 Container。</a:t>
-            </a:r>
-          </a:p>
-        </p:txBody>
-      </p:sp>
-      <p:sp>
-        <p:nvSpPr>
-          <p:cNvPr id="4" name="Slide Number Placeholder 3"/>
-          <p:cNvSpPr>
-            <a:spLocks xmlns:a="http://schemas.openxmlformats.org/drawingml/2006/main" noGrp="1"/>
-          </p:cNvSpPr>
-          <p:nvPr>
-            <p:ph type="sldNum" idx="5"/>
-          </p:nvPr>
-        </p:nvSpPr>
-        <p:spPr/>
-        <p:txBody>
-          <a:bodyPr xmlns:a="http://schemas.openxmlformats.org/drawingml/2006/main"/>
-          <a:lstStyle xmlns:a="http://schemas.openxmlformats.org/drawingml/2006/main"/>
-          <a:p xmlns:a="http://schemas.openxmlformats.org/drawingml/2006/main"/>
-        </p:txBody>
-      </p:sp>
-    </p:spTree>
-  </p:cSld>
-  <p:clrMapOvr>
-    <a:masterClrMapping xmlns:a="http://schemas.openxmlformats.org/drawingml/2006/main"/>
-  </p:clrMapOvr>
-</p:notes>
-</file>
-
-<file path=ppt/notesSlides/notesSlide5.xml><?xml version="1.0" encoding="utf-8"?>
-<p:notes xmlns:p="http://schemas.openxmlformats.org/presentationml/2006/main">
-  <p:cSld>
-    <p:spTree>
-      <p:nvGrpSpPr>
-        <p:cNvPr id="1" name=""/>
-        <p:cNvGrpSpPr/>
-        <p:nvPr/>
-      </p:nvGrpSpPr>
-      <p:grpSpPr>
-        <a:xfrm xmlns:a="http://schemas.openxmlformats.org/drawingml/2006/main"/>
-      </p:grpSpPr>
-      <p:sp>
-        <p:nvSpPr>
-          <p:cNvPr id="2" name="Slide Image Placeholder 1"/>
-          <p:cNvSpPr>
-            <a:spLocks xmlns:a="http://schemas.openxmlformats.org/drawingml/2006/main" noGrp="1"/>
-          </p:cNvSpPr>
-          <p:nvPr>
-            <p:ph type="sldImg" idx="0"/>
-          </p:nvPr>
-        </p:nvSpPr>
-        <p:spPr/>
-      </p:sp>
-      <p:sp>
-        <p:nvSpPr>
-          <p:cNvPr id="3" name="Notes Placeholder 2"/>
-          <p:cNvSpPr>
-            <a:spLocks xmlns:a="http://schemas.openxmlformats.org/drawingml/2006/main" noGrp="1"/>
-          </p:cNvSpPr>
-          <p:nvPr>
-            <p:ph type="body" idx="1"/>
-          </p:nvPr>
-        </p:nvSpPr>
-        <p:spPr/>
-        <p:txBody>
-          <a:bodyPr xmlns:a="http://schemas.openxmlformats.org/drawingml/2006/main"/>
-          <a:lstStyle xmlns:a="http://schemas.openxmlformats.org/drawingml/2006/main"/>
-          <a:p xmlns:a="http://schemas.openxmlformats.org/drawingml/2006/main">
-            <a:r>
-              <a:t>這頁只講基礎指令，不急著講所有 Dockerfile 指令。</a:t>
-            </a:r>
-          </a:p>
-        </p:txBody>
-      </p:sp>
-      <p:sp>
-        <p:nvSpPr>
-          <p:cNvPr id="4" name="Slide Number Placeholder 3"/>
-          <p:cNvSpPr>
-            <a:spLocks xmlns:a="http://schemas.openxmlformats.org/drawingml/2006/main" noGrp="1"/>
-          </p:cNvSpPr>
-          <p:nvPr>
-            <p:ph type="sldNum" idx="5"/>
-          </p:nvPr>
-        </p:nvSpPr>
-        <p:spPr/>
-        <p:txBody>
-          <a:bodyPr xmlns:a="http://schemas.openxmlformats.org/drawingml/2006/main"/>
-          <a:lstStyle xmlns:a="http://schemas.openxmlformats.org/drawingml/2006/main"/>
-          <a:p xmlns:a="http://schemas.openxmlformats.org/drawingml/2006/main"/>
-        </p:txBody>
-      </p:sp>
-    </p:spTree>
-  </p:cSld>
-  <p:clrMapOvr>
-    <a:masterClrMapping xmlns:a="http://schemas.openxmlformats.org/drawingml/2006/main"/>
-  </p:clrMapOvr>
-</p:notes>
-</file>
-
-<file path=ppt/notesSlides/notesSlide6.xml><?xml version="1.0" encoding="utf-8"?>
-<p:notes xmlns:p="http://schemas.openxmlformats.org/presentationml/2006/main">
-  <p:cSld>
-    <p:spTree>
-      <p:nvGrpSpPr>
-        <p:cNvPr id="1" name=""/>
-        <p:cNvGrpSpPr/>
-        <p:nvPr/>
-      </p:nvGrpSpPr>
-      <p:grpSpPr>
-        <a:xfrm xmlns:a="http://schemas.openxmlformats.org/drawingml/2006/main"/>
-      </p:grpSpPr>
-      <p:sp>
-        <p:nvSpPr>
-          <p:cNvPr id="2" name="Slide Image Placeholder 1"/>
-          <p:cNvSpPr>
-            <a:spLocks xmlns:a="http://schemas.openxmlformats.org/drawingml/2006/main" noGrp="1"/>
-          </p:cNvSpPr>
-          <p:nvPr>
-            <p:ph type="sldImg" idx="0"/>
-          </p:nvPr>
-        </p:nvSpPr>
-        <p:spPr/>
-      </p:sp>
-      <p:sp>
-        <p:nvSpPr>
-          <p:cNvPr id="3" name="Notes Placeholder 2"/>
-          <p:cNvSpPr>
-            <a:spLocks xmlns:a="http://schemas.openxmlformats.org/drawingml/2006/main" noGrp="1"/>
-          </p:cNvSpPr>
-          <p:nvPr>
-            <p:ph type="body" idx="1"/>
-          </p:nvPr>
-        </p:nvSpPr>
-        <p:spPr/>
-        <p:txBody>
-          <a:bodyPr xmlns:a="http://schemas.openxmlformats.org/drawingml/2006/main"/>
-          <a:lstStyle xmlns:a="http://schemas.openxmlformats.org/drawingml/2006/main"/>
-          <a:p xmlns:a="http://schemas.openxmlformats.org/drawingml/2006/main">
-            <a:r>
-              <a:t>練習題來自 exercises.md 第 4 堂實作題 P1。</a:t>
-            </a:r>
-          </a:p>
-        </p:txBody>
-      </p:sp>
-      <p:sp>
-        <p:nvSpPr>
-          <p:cNvPr id="4" name="Slide Number Placeholder 3"/>
-          <p:cNvSpPr>
-            <a:spLocks xmlns:a="http://schemas.openxmlformats.org/drawingml/2006/main" noGrp="1"/>
-          </p:cNvSpPr>
-          <p:nvPr>
-            <p:ph type="sldNum" idx="5"/>
-          </p:nvPr>
-        </p:nvSpPr>
-        <p:spPr/>
-        <p:txBody>
-          <a:bodyPr xmlns:a="http://schemas.openxmlformats.org/drawingml/2006/main"/>
-          <a:lstStyle xmlns:a="http://schemas.openxmlformats.org/drawingml/2006/main"/>
-          <a:p xmlns:a="http://schemas.openxmlformats.org/drawingml/2006/main"/>
-        </p:txBody>
-      </p:sp>
-    </p:spTree>
-  </p:cSld>
-  <p:clrMapOvr>
-    <a:masterClrMapping xmlns:a="http://schemas.openxmlformats.org/drawingml/2006/main"/>
-  </p:clrMapOvr>
-</p:notes>
-</file>
-
-<file path=ppt/notesSlides/notesSlide7.xml><?xml version="1.0" encoding="utf-8"?>
-<p:notes xmlns:p="http://schemas.openxmlformats.org/presentationml/2006/main">
-  <p:cSld>
-    <p:spTree>
-      <p:nvGrpSpPr>
-        <p:cNvPr id="1" name=""/>
-        <p:cNvGrpSpPr/>
-        <p:nvPr/>
-      </p:nvGrpSpPr>
-      <p:grpSpPr>
-        <a:xfrm xmlns:a="http://schemas.openxmlformats.org/drawingml/2006/main"/>
-      </p:grpSpPr>
-      <p:sp>
-        <p:nvSpPr>
-          <p:cNvPr id="2" name="Slide Image Placeholder 1"/>
-          <p:cNvSpPr>
-            <a:spLocks xmlns:a="http://schemas.openxmlformats.org/drawingml/2006/main" noGrp="1"/>
-          </p:cNvSpPr>
-          <p:nvPr>
-            <p:ph type="sldImg" idx="0"/>
-          </p:nvPr>
-        </p:nvSpPr>
-        <p:spPr/>
-      </p:sp>
-      <p:sp>
-        <p:nvSpPr>
-          <p:cNvPr id="3" name="Notes Placeholder 2"/>
-          <p:cNvSpPr>
-            <a:spLocks xmlns:a="http://schemas.openxmlformats.org/drawingml/2006/main" noGrp="1"/>
-          </p:cNvSpPr>
-          <p:nvPr>
-            <p:ph type="body" idx="1"/>
-          </p:nvPr>
-        </p:nvSpPr>
-        <p:spPr/>
-        <p:txBody>
-          <a:bodyPr xmlns:a="http://schemas.openxmlformats.org/drawingml/2006/main"/>
-          <a:lstStyle xmlns:a="http://schemas.openxmlformats.org/drawingml/2006/main"/>
-          <a:p xmlns:a="http://schemas.openxmlformats.org/drawingml/2006/main">
-            <a:r>
-              <a:t>建立正確習慣：不要只看到 build 完成就結束。</a:t>
-            </a:r>
-          </a:p>
-        </p:txBody>
-      </p:sp>
-      <p:sp>
-        <p:nvSpPr>
-          <p:cNvPr id="4" name="Slide Number Placeholder 3"/>
-          <p:cNvSpPr>
-            <a:spLocks xmlns:a="http://schemas.openxmlformats.org/drawingml/2006/main" noGrp="1"/>
-          </p:cNvSpPr>
-          <p:nvPr>
-            <p:ph type="sldNum" idx="5"/>
-          </p:nvPr>
-        </p:nvSpPr>
-        <p:spPr/>
-        <p:txBody>
-          <a:bodyPr xmlns:a="http://schemas.openxmlformats.org/drawingml/2006/main"/>
-          <a:lstStyle xmlns:a="http://schemas.openxmlformats.org/drawingml/2006/main"/>
-          <a:p xmlns:a="http://schemas.openxmlformats.org/drawingml/2006/main"/>
-        </p:txBody>
-      </p:sp>
-    </p:spTree>
-  </p:cSld>
-  <p:clrMapOvr>
-    <a:masterClrMapping xmlns:a="http://schemas.openxmlformats.org/drawingml/2006/main"/>
-  </p:clrMapOvr>
-</p:notes>
-</file>
-
-<file path=ppt/notesSlides/notesSlide8.xml><?xml version="1.0" encoding="utf-8"?>
-<p:notes xmlns:p="http://schemas.openxmlformats.org/presentationml/2006/main">
-  <p:cSld>
-    <p:spTree>
-      <p:nvGrpSpPr>
-        <p:cNvPr id="1" name=""/>
-        <p:cNvGrpSpPr/>
-        <p:nvPr/>
-      </p:nvGrpSpPr>
-      <p:grpSpPr>
-        <a:xfrm xmlns:a="http://schemas.openxmlformats.org/drawingml/2006/main"/>
-      </p:grpSpPr>
-      <p:sp>
-        <p:nvSpPr>
-          <p:cNvPr id="2" name="Slide Image Placeholder 1"/>
-          <p:cNvSpPr>
-            <a:spLocks xmlns:a="http://schemas.openxmlformats.org/drawingml/2006/main" noGrp="1"/>
-          </p:cNvSpPr>
-          <p:nvPr>
-            <p:ph type="sldImg" idx="0"/>
-          </p:nvPr>
-        </p:nvSpPr>
-        <p:spPr/>
-      </p:sp>
-      <p:sp>
-        <p:nvSpPr>
-          <p:cNvPr id="3" name="Notes Placeholder 2"/>
-          <p:cNvSpPr>
-            <a:spLocks xmlns:a="http://schemas.openxmlformats.org/drawingml/2006/main" noGrp="1"/>
-          </p:cNvSpPr>
-          <p:nvPr>
-            <p:ph type="body" idx="1"/>
-          </p:nvPr>
-        </p:nvSpPr>
-        <p:spPr/>
-        <p:txBody>
-          <a:bodyPr xmlns:a="http://schemas.openxmlformats.org/drawingml/2006/main"/>
-          <a:lstStyle xmlns:a="http://schemas.openxmlformats.org/drawingml/2006/main"/>
-          <a:p xmlns:a="http://schemas.openxmlformats.org/drawingml/2006/main">
-            <a:r>
-              <a:t>練習題來自 exercises.md 第 4 堂概念題 Q1。</a:t>
-            </a:r>
-          </a:p>
-        </p:txBody>
-      </p:sp>
-      <p:sp>
-        <p:nvSpPr>
-          <p:cNvPr id="4" name="Slide Number Placeholder 3"/>
-          <p:cNvSpPr>
-            <a:spLocks xmlns:a="http://schemas.openxmlformats.org/drawingml/2006/main" noGrp="1"/>
-          </p:cNvSpPr>
-          <p:nvPr>
-            <p:ph type="sldNum" idx="5"/>
-          </p:nvPr>
-        </p:nvSpPr>
-        <p:spPr/>
-        <p:txBody>
-          <a:bodyPr xmlns:a="http://schemas.openxmlformats.org/drawingml/2006/main"/>
-          <a:lstStyle xmlns:a="http://schemas.openxmlformats.org/drawingml/2006/main"/>
-          <a:p xmlns:a="http://schemas.openxmlformats.org/drawingml/2006/main"/>
-        </p:txBody>
-      </p:sp>
-    </p:spTree>
-  </p:cSld>
-  <p:clrMapOvr>
-    <a:masterClrMapping xmlns:a="http://schemas.openxmlformats.org/drawingml/2006/main"/>
-  </p:clrMapOvr>
-</p:notes>
-</file>
-
-<file path=ppt/notesSlides/notesSlide9.xml><?xml version="1.0" encoding="utf-8"?>
-<p:notes xmlns:p="http://schemas.openxmlformats.org/presentationml/2006/main">
-  <p:cSld>
-    <p:spTree>
-      <p:nvGrpSpPr>
-        <p:cNvPr id="1" name=""/>
-        <p:cNvGrpSpPr/>
-        <p:nvPr/>
-      </p:nvGrpSpPr>
-      <p:grpSpPr>
-        <a:xfrm xmlns:a="http://schemas.openxmlformats.org/drawingml/2006/main"/>
-      </p:grpSpPr>
-      <p:sp>
-        <p:nvSpPr>
-          <p:cNvPr id="2" name="Slide Image Placeholder 1"/>
-          <p:cNvSpPr>
-            <a:spLocks xmlns:a="http://schemas.openxmlformats.org/drawingml/2006/main" noGrp="1"/>
-          </p:cNvSpPr>
-          <p:nvPr>
-            <p:ph type="sldImg" idx="0"/>
-          </p:nvPr>
-        </p:nvSpPr>
-        <p:spPr/>
-      </p:sp>
-      <p:sp>
-        <p:nvSpPr>
-          <p:cNvPr id="3" name="Notes Placeholder 2"/>
-          <p:cNvSpPr>
-            <a:spLocks xmlns:a="http://schemas.openxmlformats.org/drawingml/2006/main" noGrp="1"/>
-          </p:cNvSpPr>
-          <p:nvPr>
-            <p:ph type="body" idx="1"/>
-          </p:nvPr>
-        </p:nvSpPr>
-        <p:spPr/>
-        <p:txBody>
-          <a:bodyPr xmlns:a="http://schemas.openxmlformats.org/drawingml/2006/main"/>
-          <a:lstStyle xmlns:a="http://schemas.openxmlformats.org/drawingml/2006/main"/>
-          <a:p xmlns:a="http://schemas.openxmlformats.org/drawingml/2006/main">
-            <a:r>
-              <a:t>用層的概念銜接下一頁的 layer 比較實驗。</a:t>
-            </a:r>
-          </a:p>
-        </p:txBody>
-      </p:sp>
-      <p:sp>
-        <p:nvSpPr>
-          <p:cNvPr id="4" name="Slide Number Placeholder 3"/>
-          <p:cNvSpPr>
-            <a:spLocks xmlns:a="http://schemas.openxmlformats.org/drawingml/2006/main" noGrp="1"/>
-          </p:cNvSpPr>
-          <p:nvPr>
-            <p:ph type="sldNum" idx="5"/>
-          </p:nvPr>
-        </p:nvSpPr>
-        <p:spPr/>
-        <p:txBody>
-          <a:bodyPr xmlns:a="http://schemas.openxmlformats.org/drawingml/2006/main"/>
-          <a:lstStyle xmlns:a="http://schemas.openxmlformats.org/drawingml/2006/main"/>
-          <a:p xmlns:a="http://schemas.openxmlformats.org/drawingml/2006/main"/>
-        </p:txBody>
-      </p:sp>
-    </p:spTree>
-  </p:cSld>
-  <p:clrMapOvr>
-    <a:masterClrMapping xmlns:a="http://schemas.openxmlformats.org/drawingml/2006/main"/>
-  </p:clrMapOvr>
-</p:notes>
-</file>
-
 <file path=ppt/slideLayouts/slideLayout1.xml><?xml version="1.0" encoding="utf-8"?>
 <p:sldLayout xmlns:p="http://schemas.openxmlformats.org/presentationml/2006/main" type="title">
   <p:cSld name="Title Slide">
@@ -2806,7 +176,7 @@
   </p:cSld>
   <p:clrMap bg1="lt1" tx1="dk1" bg2="lt2" tx2="dk2" accent1="accent1" accent2="accent2" accent3="accent3" accent4="accent4" accent5="accent5" accent6="accent6" hlink="hlink" folHlink="folHlink"/>
   <p:sldLayoutIdLst>
-    <p:sldLayoutId xmlns:r="http://schemas.openxmlformats.org/officeDocument/2006/relationships" id="2147483649" r:id="R182ae512b1c64e3a"/>
+    <p:sldLayoutId xmlns:r="http://schemas.openxmlformats.org/officeDocument/2006/relationships" id="2147483649" r:id="R70cf052346b944c4"/>
   </p:sldLayoutIdLst>
   <p:txStyles>
     <p:titleStyle>
@@ -3396,14 +766,14 @@
       </p:sp>
       <p:pic>
         <p:nvPicPr>
-          <p:cNvPr id="12" name=""/>
+          <p:cNvPr id="13" name=""/>
           <p:cNvPicPr>
             <a:picLocks xmlns:a="http://schemas.openxmlformats.org/drawingml/2006/main" noChangeAspect="1"/>
           </p:cNvPicPr>
           <p:nvPr/>
         </p:nvPicPr>
         <p:blipFill>
-          <a:blip xmlns:r="http://schemas.openxmlformats.org/officeDocument/2006/relationships" xmlns:a="http://schemas.openxmlformats.org/drawingml/2006/main" r:embed="Rba4668cba6bb4762"/>
+          <a:blip xmlns:r="http://schemas.openxmlformats.org/officeDocument/2006/relationships" xmlns:a="http://schemas.openxmlformats.org/drawingml/2006/main" r:embed="R009cf42edcc0407e"/>
           <a:srcRect xmlns:a="http://schemas.openxmlformats.org/drawingml/2006/main" l="16310" t="0" r="16310" b="0"/>
           <a:stretch xmlns:a="http://schemas.openxmlformats.org/drawingml/2006/main">
             <a:fillRect l="0" t="0" r="0" b="0"/>
@@ -20429,14 +17799,14 @@
       </p:sp>
       <p:pic>
         <p:nvPicPr>
-          <p:cNvPr id="18" name=""/>
+          <p:cNvPr id="19" name=""/>
           <p:cNvPicPr>
             <a:picLocks xmlns:a="http://schemas.openxmlformats.org/drawingml/2006/main" noChangeAspect="1"/>
           </p:cNvPicPr>
           <p:nvPr/>
         </p:nvPicPr>
         <p:blipFill>
-          <a:blip xmlns:r="http://schemas.openxmlformats.org/officeDocument/2006/relationships" xmlns:a="http://schemas.openxmlformats.org/drawingml/2006/main" r:embed="R67f397107d0a4b96"/>
+          <a:blip xmlns:r="http://schemas.openxmlformats.org/officeDocument/2006/relationships" xmlns:a="http://schemas.openxmlformats.org/drawingml/2006/main" r:embed="R80e1a89c134d47f5"/>
           <a:srcRect xmlns:a="http://schemas.openxmlformats.org/drawingml/2006/main" l="6150" t="0" r="6150" b="0"/>
           <a:stretch xmlns:a="http://schemas.openxmlformats.org/drawingml/2006/main">
             <a:fillRect l="0" t="0" r="0" b="0"/>
@@ -20448,9 +17818,7 @@
             <a:ext cx="4838700" cy="3105150"/>
           </a:xfrm>
           <a:prstGeom xmlns:a="http://schemas.openxmlformats.org/drawingml/2006/main" prst="roundRect">
-            <a:avLst>
-              <a:gd name="adj" fmla="val 4294"/>
-            </a:avLst>
+            <a:avLst/>
           </a:prstGeom>
         </p:spPr>
       </p:pic>

--- a/slides/docker-session4-dockerfile-resources.pptx
+++ b/slides/docker-session4-dockerfile-resources.pptx
@@ -10,48 +10,48 @@
     <p:sldId xmlns:r="http://schemas.openxmlformats.org/officeDocument/2006/relationships" id="258" r:id="R2cbc7cb8ee394c74"/>
     <p:sldId xmlns:r="http://schemas.openxmlformats.org/officeDocument/2006/relationships" id="259" r:id="Rb639ff8e4e31446a"/>
     <p:sldId xmlns:r="http://schemas.openxmlformats.org/officeDocument/2006/relationships" id="260" r:id="R03a227b220914ba2"/>
+    <p:sldId id="288" r:id="rId1"/>
     <p:sldId xmlns:r="http://schemas.openxmlformats.org/officeDocument/2006/relationships" id="261" r:id="R81e94a9dc4f2475c"/>
     <p:sldId xmlns:r="http://schemas.openxmlformats.org/officeDocument/2006/relationships" id="262" r:id="R5b484a6d39784ca5"/>
     <p:sldId xmlns:r="http://schemas.openxmlformats.org/officeDocument/2006/relationships" id="263" r:id="Rf5f9986d0ea64937"/>
+    <p:sldId id="289" r:id="rId2"/>
     <p:sldId xmlns:r="http://schemas.openxmlformats.org/officeDocument/2006/relationships" id="264" r:id="R19fc1f8749da4907"/>
     <p:sldId xmlns:r="http://schemas.openxmlformats.org/officeDocument/2006/relationships" id="265" r:id="R349323a25f904e9e"/>
     <p:sldId xmlns:r="http://schemas.openxmlformats.org/officeDocument/2006/relationships" id="266" r:id="R4448a22c92e44af1"/>
     <p:sldId xmlns:r="http://schemas.openxmlformats.org/officeDocument/2006/relationships" id="267" r:id="R9d19f78debf3492c"/>
     <p:sldId xmlns:r="http://schemas.openxmlformats.org/officeDocument/2006/relationships" id="268" r:id="Rfd2595cc16434a97"/>
+    <p:sldId id="290" r:id="rId3"/>
+    <p:sldId id="291" r:id="rId4"/>
     <p:sldId xmlns:r="http://schemas.openxmlformats.org/officeDocument/2006/relationships" id="269" r:id="Rccf662f41c874ed7"/>
+    <p:sldId id="292" r:id="rId5"/>
+    <p:sldId id="293" r:id="rId6"/>
     <p:sldId xmlns:r="http://schemas.openxmlformats.org/officeDocument/2006/relationships" id="270" r:id="Ra1e97e9bbf4c4951"/>
+    <p:sldId id="294" r:id="rId7"/>
     <p:sldId xmlns:r="http://schemas.openxmlformats.org/officeDocument/2006/relationships" id="271" r:id="Rc46e68138c534670"/>
     <p:sldId xmlns:r="http://schemas.openxmlformats.org/officeDocument/2006/relationships" id="272" r:id="Re4b3b31a7b254d13"/>
+    <p:sldId id="295" r:id="rId8"/>
     <p:sldId xmlns:r="http://schemas.openxmlformats.org/officeDocument/2006/relationships" id="273" r:id="Rb93b3fa0bc05425a"/>
     <p:sldId xmlns:r="http://schemas.openxmlformats.org/officeDocument/2006/relationships" id="274" r:id="R28b83384e37f4c88"/>
     <p:sldId xmlns:r="http://schemas.openxmlformats.org/officeDocument/2006/relationships" id="275" r:id="Rc9ba4814546d426b"/>
     <p:sldId xmlns:r="http://schemas.openxmlformats.org/officeDocument/2006/relationships" id="276" r:id="Rf6502b6bfa304bc6"/>
+    <p:sldId id="296" r:id="rId9"/>
+    <p:sldId id="297" r:id="rId10"/>
+    <p:sldId id="298" r:id="rId11"/>
+    <p:sldId id="299" r:id="rId12"/>
+    <p:sldId id="300" r:id="rId13"/>
     <p:sldId xmlns:r="http://schemas.openxmlformats.org/officeDocument/2006/relationships" id="277" r:id="R54990c5cbc81436a"/>
     <p:sldId xmlns:r="http://schemas.openxmlformats.org/officeDocument/2006/relationships" id="278" r:id="Ra4fa2f19ad5b4e6d"/>
     <p:sldId xmlns:r="http://schemas.openxmlformats.org/officeDocument/2006/relationships" id="279" r:id="R4914973bbf234e39"/>
     <p:sldId xmlns:r="http://schemas.openxmlformats.org/officeDocument/2006/relationships" id="280" r:id="R78d3eb8fc1d14dcc"/>
     <p:sldId xmlns:r="http://schemas.openxmlformats.org/officeDocument/2006/relationships" id="281" r:id="R709f0492932f40ba"/>
     <p:sldId xmlns:r="http://schemas.openxmlformats.org/officeDocument/2006/relationships" id="282" r:id="R850b44ad53e54bb8"/>
+    <p:sldId id="301" r:id="rId14"/>
     <p:sldId xmlns:r="http://schemas.openxmlformats.org/officeDocument/2006/relationships" id="283" r:id="Rac6f889fb5b346e7"/>
     <p:sldId xmlns:r="http://schemas.openxmlformats.org/officeDocument/2006/relationships" id="284" r:id="R096cef8eec324544"/>
     <p:sldId xmlns:r="http://schemas.openxmlformats.org/officeDocument/2006/relationships" id="285" r:id="Rbedd8024209a40a2"/>
+    <p:sldId id="302" r:id="rId15"/>
     <p:sldId xmlns:r="http://schemas.openxmlformats.org/officeDocument/2006/relationships" id="286" r:id="R906dcd8585de4ed3"/>
     <p:sldId xmlns:r="http://schemas.openxmlformats.org/officeDocument/2006/relationships" id="287" r:id="Re6f4ac5d4b644d3c"/>
-    <p:sldId id="288" r:id="rId1"/>
-    <p:sldId id="289" r:id="rId2"/>
-    <p:sldId id="290" r:id="rId3"/>
-    <p:sldId id="291" r:id="rId4"/>
-    <p:sldId id="292" r:id="rId5"/>
-    <p:sldId id="293" r:id="rId6"/>
-    <p:sldId id="294" r:id="rId7"/>
-    <p:sldId id="295" r:id="rId8"/>
-    <p:sldId id="296" r:id="rId9"/>
-    <p:sldId id="297" r:id="rId10"/>
-    <p:sldId id="298" r:id="rId11"/>
-    <p:sldId id="299" r:id="rId12"/>
-    <p:sldId id="300" r:id="rId13"/>
-    <p:sldId id="301" r:id="rId14"/>
-    <p:sldId id="302" r:id="rId15"/>
   </p:sldIdLst>
   <p:sldSz cx="12192000" cy="6858000"/>
   <p:notesSz cx="6858000" cy="9144000"/>
@@ -27332,7 +27332,7 @@
 
 <file path=ppt/slides/slide33.xml><?xml version="1.0" encoding="utf-8"?>
 <p:sld xmlns:a="http://schemas.openxmlformats.org/drawingml/2006/main" xmlns:r="http://schemas.openxmlformats.org/officeDocument/2006/relationships" xmlns:p="http://schemas.openxmlformats.org/presentationml/2006/main">
-  <p:cSld name="程式碼附錄 1: Flask 基礎 Dockerfile">
+  <p:cSld name="範例程式碼：Flask 基礎 Dockerfile">
     <p:bg>
       <p:bgPr>
         <a:solidFill>
@@ -27389,7 +27389,7 @@
                 <a:ea typeface="Aptos"/>
                 <a:cs typeface="Aptos"/>
               </a:rPr>
-              <a:t>CODE APPENDIX</a:t>
+              <a:t>CODE EXAMPLE</a:t>
             </a:r>
           </a:p>
         </p:txBody>
@@ -27428,7 +27428,7 @@
                 <a:ea typeface="Aptos"/>
                 <a:cs typeface="Aptos"/>
               </a:rPr>
-              <a:t>程式碼附錄 1: Flask 基礎 Dockerfile</a:t>
+              <a:t>範例程式碼：Flask 基礎 Dockerfile</a:t>
             </a:r>
           </a:p>
         </p:txBody>
@@ -27822,7 +27822,7 @@
                 <a:ea typeface="Aptos"/>
                 <a:cs typeface="Aptos"/>
               </a:rPr>
-              <a:t>Docker 基礎教學 | 第 4 堂 | Code 1/15</a:t>
+              <a:t>Docker 基礎教學 | 第 4 堂 | 範例程式碼</a:t>
             </a:r>
           </a:p>
         </p:txBody>
@@ -27861,7 +27861,7 @@
                 <a:ea typeface="Aptos"/>
                 <a:cs typeface="Aptos"/>
               </a:rPr>
-              <a:t>A1</a:t>
+              <a:t>CODE</a:t>
             </a:r>
           </a:p>
         </p:txBody>
@@ -27876,7 +27876,7 @@
 
 <file path=ppt/slides/slide34.xml><?xml version="1.0" encoding="utf-8"?>
 <p:sld xmlns:a="http://schemas.openxmlformats.org/drawingml/2006/main" xmlns:r="http://schemas.openxmlformats.org/officeDocument/2006/relationships" xmlns:p="http://schemas.openxmlformats.org/presentationml/2006/main">
-  <p:cSld name="程式碼附錄 2: Build cache 寫法">
+  <p:cSld name="範例程式碼：Build cache 寫法">
     <p:bg>
       <p:bgPr>
         <a:solidFill>
@@ -27933,7 +27933,7 @@
                 <a:ea typeface="Aptos"/>
                 <a:cs typeface="Aptos"/>
               </a:rPr>
-              <a:t>CODE APPENDIX</a:t>
+              <a:t>CODE EXAMPLE</a:t>
             </a:r>
           </a:p>
         </p:txBody>
@@ -27972,7 +27972,7 @@
                 <a:ea typeface="Aptos"/>
                 <a:cs typeface="Aptos"/>
               </a:rPr>
-              <a:t>程式碼附錄 2: Build cache 寫法</a:t>
+              <a:t>範例程式碼：Build cache 寫法</a:t>
             </a:r>
           </a:p>
         </p:txBody>
@@ -28223,7 +28223,7 @@
                 <a:ea typeface="Aptos"/>
                 <a:cs typeface="Aptos"/>
               </a:rPr>
-              <a:t>Docker 基礎教學 | 第 4 堂 | Code 2/15</a:t>
+              <a:t>Docker 基礎教學 | 第 4 堂 | 範例程式碼</a:t>
             </a:r>
           </a:p>
         </p:txBody>
@@ -28262,7 +28262,7 @@
                 <a:ea typeface="Aptos"/>
                 <a:cs typeface="Aptos"/>
               </a:rPr>
-              <a:t>A2</a:t>
+              <a:t>CODE</a:t>
             </a:r>
           </a:p>
         </p:txBody>
@@ -28277,7 +28277,7 @@
 
 <file path=ppt/slides/slide35.xml><?xml version="1.0" encoding="utf-8"?>
 <p:sld xmlns:a="http://schemas.openxmlformats.org/drawingml/2006/main" xmlns:r="http://schemas.openxmlformats.org/officeDocument/2006/relationships" xmlns:p="http://schemas.openxmlformats.org/presentationml/2006/main">
-  <p:cSld name="程式碼附錄 3: 優化版 Dockerfile (1/2)">
+  <p:cSld name="範例程式碼：優化版 Dockerfile (1/2)">
     <p:bg>
       <p:bgPr>
         <a:solidFill>
@@ -28334,7 +28334,7 @@
                 <a:ea typeface="Aptos"/>
                 <a:cs typeface="Aptos"/>
               </a:rPr>
-              <a:t>CODE APPENDIX</a:t>
+              <a:t>CODE EXAMPLE</a:t>
             </a:r>
           </a:p>
         </p:txBody>
@@ -28373,7 +28373,7 @@
                 <a:ea typeface="Aptos"/>
                 <a:cs typeface="Aptos"/>
               </a:rPr>
-              <a:t>程式碼附錄 3: 優化版 Dockerfile (1/2)</a:t>
+              <a:t>範例程式碼：優化版 Dockerfile (1/2)</a:t>
             </a:r>
           </a:p>
         </p:txBody>
@@ -28806,7 +28806,7 @@
                 <a:ea typeface="Aptos"/>
                 <a:cs typeface="Aptos"/>
               </a:rPr>
-              <a:t>Docker 基礎教學 | 第 4 堂 | Code 3/15</a:t>
+              <a:t>Docker 基礎教學 | 第 4 堂 | 範例程式碼</a:t>
             </a:r>
           </a:p>
         </p:txBody>
@@ -28845,7 +28845,7 @@
                 <a:ea typeface="Aptos"/>
                 <a:cs typeface="Aptos"/>
               </a:rPr>
-              <a:t>A3</a:t>
+              <a:t>CODE</a:t>
             </a:r>
           </a:p>
         </p:txBody>
@@ -28860,7 +28860,7 @@
 
 <file path=ppt/slides/slide36.xml><?xml version="1.0" encoding="utf-8"?>
 <p:sld xmlns:a="http://schemas.openxmlformats.org/drawingml/2006/main" xmlns:r="http://schemas.openxmlformats.org/officeDocument/2006/relationships" xmlns:p="http://schemas.openxmlformats.org/presentationml/2006/main">
-  <p:cSld name="程式碼附錄 4: 優化版 Dockerfile (2/2)">
+  <p:cSld name="範例程式碼：優化版 Dockerfile (2/2)">
     <p:bg>
       <p:bgPr>
         <a:solidFill>
@@ -28917,7 +28917,7 @@
                 <a:ea typeface="Aptos"/>
                 <a:cs typeface="Aptos"/>
               </a:rPr>
-              <a:t>CODE APPENDIX</a:t>
+              <a:t>CODE EXAMPLE</a:t>
             </a:r>
           </a:p>
         </p:txBody>
@@ -28956,7 +28956,7 @@
                 <a:ea typeface="Aptos"/>
                 <a:cs typeface="Aptos"/>
               </a:rPr>
-              <a:t>程式碼附錄 4: 優化版 Dockerfile (2/2)</a:t>
+              <a:t>範例程式碼：優化版 Dockerfile (2/2)</a:t>
             </a:r>
           </a:p>
         </p:txBody>
@@ -29155,7 +29155,7 @@
                 <a:ea typeface="Aptos"/>
                 <a:cs typeface="Aptos"/>
               </a:rPr>
-              <a:t>Docker 基礎教學 | 第 4 堂 | Code 4/15</a:t>
+              <a:t>Docker 基礎教學 | 第 4 堂 | 範例程式碼</a:t>
             </a:r>
           </a:p>
         </p:txBody>
@@ -29194,7 +29194,7 @@
                 <a:ea typeface="Aptos"/>
                 <a:cs typeface="Aptos"/>
               </a:rPr>
-              <a:t>A4</a:t>
+              <a:t>CODE</a:t>
             </a:r>
           </a:p>
         </p:txBody>
@@ -29209,7 +29209,7 @@
 
 <file path=ppt/slides/slide37.xml><?xml version="1.0" encoding="utf-8"?>
 <p:sld xmlns:a="http://schemas.openxmlformats.org/drawingml/2006/main" xmlns:r="http://schemas.openxmlformats.org/officeDocument/2006/relationships" xmlns:p="http://schemas.openxmlformats.org/presentationml/2006/main">
-  <p:cSld name="程式碼附錄 5: .dockerignore (1/2)">
+  <p:cSld name="範例程式碼：.dockerignore (1/2)">
     <p:bg>
       <p:bgPr>
         <a:solidFill>
@@ -29266,7 +29266,7 @@
                 <a:ea typeface="Aptos"/>
                 <a:cs typeface="Aptos"/>
               </a:rPr>
-              <a:t>CODE APPENDIX</a:t>
+              <a:t>CODE EXAMPLE</a:t>
             </a:r>
           </a:p>
         </p:txBody>
@@ -29305,7 +29305,7 @@
                 <a:ea typeface="Aptos"/>
                 <a:cs typeface="Aptos"/>
               </a:rPr>
-              <a:t>程式碼附錄 5: .dockerignore (1/2)</a:t>
+              <a:t>範例程式碼：.dockerignore (1/2)</a:t>
             </a:r>
           </a:p>
         </p:txBody>
@@ -29738,7 +29738,7 @@
                 <a:ea typeface="Aptos"/>
                 <a:cs typeface="Aptos"/>
               </a:rPr>
-              <a:t>Docker 基礎教學 | 第 4 堂 | Code 5/15</a:t>
+              <a:t>Docker 基礎教學 | 第 4 堂 | 範例程式碼</a:t>
             </a:r>
           </a:p>
         </p:txBody>
@@ -29777,7 +29777,7 @@
                 <a:ea typeface="Aptos"/>
                 <a:cs typeface="Aptos"/>
               </a:rPr>
-              <a:t>A5</a:t>
+              <a:t>CODE</a:t>
             </a:r>
           </a:p>
         </p:txBody>
@@ -29792,7 +29792,7 @@
 
 <file path=ppt/slides/slide38.xml><?xml version="1.0" encoding="utf-8"?>
 <p:sld xmlns:a="http://schemas.openxmlformats.org/drawingml/2006/main" xmlns:r="http://schemas.openxmlformats.org/officeDocument/2006/relationships" xmlns:p="http://schemas.openxmlformats.org/presentationml/2006/main">
-  <p:cSld name="程式碼附錄 6: .dockerignore (2/2)">
+  <p:cSld name="範例程式碼：.dockerignore (2/2)">
     <p:bg>
       <p:bgPr>
         <a:solidFill>
@@ -29849,7 +29849,7 @@
                 <a:ea typeface="Aptos"/>
                 <a:cs typeface="Aptos"/>
               </a:rPr>
-              <a:t>CODE APPENDIX</a:t>
+              <a:t>CODE EXAMPLE</a:t>
             </a:r>
           </a:p>
         </p:txBody>
@@ -29888,7 +29888,7 @@
                 <a:ea typeface="Aptos"/>
                 <a:cs typeface="Aptos"/>
               </a:rPr>
-              <a:t>程式碼附錄 6: .dockerignore (2/2)</a:t>
+              <a:t>範例程式碼：.dockerignore (2/2)</a:t>
             </a:r>
           </a:p>
         </p:txBody>
@@ -30061,7 +30061,7 @@
                 <a:ea typeface="Aptos"/>
                 <a:cs typeface="Aptos"/>
               </a:rPr>
-              <a:t>Docker 基礎教學 | 第 4 堂 | Code 6/15</a:t>
+              <a:t>Docker 基礎教學 | 第 4 堂 | 範例程式碼</a:t>
             </a:r>
           </a:p>
         </p:txBody>
@@ -30100,7 +30100,7 @@
                 <a:ea typeface="Aptos"/>
                 <a:cs typeface="Aptos"/>
               </a:rPr>
-              <a:t>A6</a:t>
+              <a:t>CODE</a:t>
             </a:r>
           </a:p>
         </p:txBody>
@@ -30115,7 +30115,7 @@
 
 <file path=ppt/slides/slide39.xml><?xml version="1.0" encoding="utf-8"?>
 <p:sld xmlns:a="http://schemas.openxmlformats.org/drawingml/2006/main" xmlns:r="http://schemas.openxmlformats.org/officeDocument/2006/relationships" xmlns:p="http://schemas.openxmlformats.org/presentationml/2006/main">
-  <p:cSld name="程式碼附錄 7: 測試映像檔指令">
+  <p:cSld name="範例程式碼：測試映像檔指令">
     <p:bg>
       <p:bgPr>
         <a:solidFill>
@@ -30172,7 +30172,7 @@
                 <a:ea typeface="Aptos"/>
                 <a:cs typeface="Aptos"/>
               </a:rPr>
-              <a:t>CODE APPENDIX</a:t>
+              <a:t>CODE EXAMPLE</a:t>
             </a:r>
           </a:p>
         </p:txBody>
@@ -30211,7 +30211,7 @@
                 <a:ea typeface="Aptos"/>
                 <a:cs typeface="Aptos"/>
               </a:rPr>
-              <a:t>程式碼附錄 7: 測試映像檔指令</a:t>
+              <a:t>範例程式碼：測試映像檔指令</a:t>
             </a:r>
           </a:p>
         </p:txBody>
@@ -30462,7 +30462,7 @@
                 <a:ea typeface="Aptos"/>
                 <a:cs typeface="Aptos"/>
               </a:rPr>
-              <a:t>Docker 基礎教學 | 第 4 堂 | Code 7/15</a:t>
+              <a:t>Docker 基礎教學 | 第 4 堂 | 範例程式碼</a:t>
             </a:r>
           </a:p>
         </p:txBody>
@@ -30501,7 +30501,7 @@
                 <a:ea typeface="Aptos"/>
                 <a:cs typeface="Aptos"/>
               </a:rPr>
-              <a:t>A7</a:t>
+              <a:t>CODE</a:t>
             </a:r>
           </a:p>
         </p:txBody>
@@ -31608,7 +31608,7 @@
 
 <file path=ppt/slides/slide40.xml><?xml version="1.0" encoding="utf-8"?>
 <p:sld xmlns:a="http://schemas.openxmlformats.org/drawingml/2006/main" xmlns:r="http://schemas.openxmlformats.org/officeDocument/2006/relationships" xmlns:p="http://schemas.openxmlformats.org/presentationml/2006/main">
-  <p:cSld name="程式碼附錄 8: Docker Hub tag / push">
+  <p:cSld name="範例程式碼：Docker Hub tag / push">
     <p:bg>
       <p:bgPr>
         <a:solidFill>
@@ -31665,7 +31665,7 @@
                 <a:ea typeface="Aptos"/>
                 <a:cs typeface="Aptos"/>
               </a:rPr>
-              <a:t>CODE APPENDIX</a:t>
+              <a:t>CODE EXAMPLE</a:t>
             </a:r>
           </a:p>
         </p:txBody>
@@ -31704,7 +31704,7 @@
                 <a:ea typeface="Aptos"/>
                 <a:cs typeface="Aptos"/>
               </a:rPr>
-              <a:t>程式碼附錄 8: Docker Hub tag / push</a:t>
+              <a:t>範例程式碼：Docker Hub tag / push</a:t>
             </a:r>
           </a:p>
         </p:txBody>
@@ -31942,7 +31942,7 @@
                 <a:ea typeface="Aptos"/>
                 <a:cs typeface="Aptos"/>
               </a:rPr>
-              <a:t>Docker 基礎教學 | 第 4 堂 | Code 8/15</a:t>
+              <a:t>Docker 基礎教學 | 第 4 堂 | 範例程式碼</a:t>
             </a:r>
           </a:p>
         </p:txBody>
@@ -31981,7 +31981,7 @@
                 <a:ea typeface="Aptos"/>
                 <a:cs typeface="Aptos"/>
               </a:rPr>
-              <a:t>A8</a:t>
+              <a:t>CODE</a:t>
             </a:r>
           </a:p>
         </p:txBody>
@@ -31996,7 +31996,7 @@
 
 <file path=ppt/slides/slide41.xml><?xml version="1.0" encoding="utf-8"?>
 <p:sld xmlns:a="http://schemas.openxmlformats.org/drawingml/2006/main" xmlns:r="http://schemas.openxmlformats.org/officeDocument/2006/relationships" xmlns:p="http://schemas.openxmlformats.org/presentationml/2006/main">
-  <p:cSld name="程式碼附錄 9: Flask + MySQL app.py (1/4)">
+  <p:cSld name="範例程式碼：Flask + MySQL app.py (1/4)">
     <p:bg>
       <p:bgPr>
         <a:solidFill>
@@ -32053,7 +32053,7 @@
                 <a:ea typeface="Aptos"/>
                 <a:cs typeface="Aptos"/>
               </a:rPr>
-              <a:t>CODE APPENDIX</a:t>
+              <a:t>CODE EXAMPLE</a:t>
             </a:r>
           </a:p>
         </p:txBody>
@@ -32092,7 +32092,7 @@
                 <a:ea typeface="Aptos"/>
                 <a:cs typeface="Aptos"/>
               </a:rPr>
-              <a:t>程式碼附錄 9: Flask + MySQL app.py (1/4)</a:t>
+              <a:t>範例程式碼：Flask + MySQL app.py (1/4)</a:t>
             </a:r>
           </a:p>
         </p:txBody>
@@ -32525,7 +32525,7 @@
                 <a:ea typeface="Aptos"/>
                 <a:cs typeface="Aptos"/>
               </a:rPr>
-              <a:t>Docker 基礎教學 | 第 4 堂 | Code 9/15</a:t>
+              <a:t>Docker 基礎教學 | 第 4 堂 | 範例程式碼</a:t>
             </a:r>
           </a:p>
         </p:txBody>
@@ -32564,7 +32564,7 @@
                 <a:ea typeface="Aptos"/>
                 <a:cs typeface="Aptos"/>
               </a:rPr>
-              <a:t>A9</a:t>
+              <a:t>CODE</a:t>
             </a:r>
           </a:p>
         </p:txBody>
@@ -32579,7 +32579,7 @@
 
 <file path=ppt/slides/slide42.xml><?xml version="1.0" encoding="utf-8"?>
 <p:sld xmlns:a="http://schemas.openxmlformats.org/drawingml/2006/main" xmlns:r="http://schemas.openxmlformats.org/officeDocument/2006/relationships" xmlns:p="http://schemas.openxmlformats.org/presentationml/2006/main">
-  <p:cSld name="程式碼附錄 10: Flask + MySQL app.py (2/4)">
+  <p:cSld name="範例程式碼：Flask + MySQL app.py (2/4)">
     <p:bg>
       <p:bgPr>
         <a:solidFill>
@@ -32636,7 +32636,7 @@
                 <a:ea typeface="Aptos"/>
                 <a:cs typeface="Aptos"/>
               </a:rPr>
-              <a:t>CODE APPENDIX</a:t>
+              <a:t>CODE EXAMPLE</a:t>
             </a:r>
           </a:p>
         </p:txBody>
@@ -32675,7 +32675,7 @@
                 <a:ea typeface="Aptos"/>
                 <a:cs typeface="Aptos"/>
               </a:rPr>
-              <a:t>程式碼附錄 10: Flask + MySQL app.py (2/4)</a:t>
+              <a:t>範例程式碼：Flask + MySQL app.py (2/4)</a:t>
             </a:r>
           </a:p>
         </p:txBody>
@@ -33108,7 +33108,7 @@
                 <a:ea typeface="Aptos"/>
                 <a:cs typeface="Aptos"/>
               </a:rPr>
-              <a:t>Docker 基礎教學 | 第 4 堂 | Code 10/15</a:t>
+              <a:t>Docker 基礎教學 | 第 4 堂 | 範例程式碼</a:t>
             </a:r>
           </a:p>
         </p:txBody>
@@ -33147,7 +33147,7 @@
                 <a:ea typeface="Aptos"/>
                 <a:cs typeface="Aptos"/>
               </a:rPr>
-              <a:t>A10</a:t>
+              <a:t>CODE</a:t>
             </a:r>
           </a:p>
         </p:txBody>
@@ -33162,7 +33162,7 @@
 
 <file path=ppt/slides/slide43.xml><?xml version="1.0" encoding="utf-8"?>
 <p:sld xmlns:a="http://schemas.openxmlformats.org/drawingml/2006/main" xmlns:r="http://schemas.openxmlformats.org/officeDocument/2006/relationships" xmlns:p="http://schemas.openxmlformats.org/presentationml/2006/main">
-  <p:cSld name="程式碼附錄 11: Flask + MySQL app.py (3/4)">
+  <p:cSld name="範例程式碼：Flask + MySQL app.py (3/4)">
     <p:bg>
       <p:bgPr>
         <a:solidFill>
@@ -33219,7 +33219,7 @@
                 <a:ea typeface="Aptos"/>
                 <a:cs typeface="Aptos"/>
               </a:rPr>
-              <a:t>CODE APPENDIX</a:t>
+              <a:t>CODE EXAMPLE</a:t>
             </a:r>
           </a:p>
         </p:txBody>
@@ -33258,7 +33258,7 @@
                 <a:ea typeface="Aptos"/>
                 <a:cs typeface="Aptos"/>
               </a:rPr>
-              <a:t>程式碼附錄 11: Flask + MySQL app.py (3/4)</a:t>
+              <a:t>範例程式碼：Flask + MySQL app.py (3/4)</a:t>
             </a:r>
           </a:p>
         </p:txBody>
@@ -33691,7 +33691,7 @@
                 <a:ea typeface="Aptos"/>
                 <a:cs typeface="Aptos"/>
               </a:rPr>
-              <a:t>Docker 基礎教學 | 第 4 堂 | Code 11/15</a:t>
+              <a:t>Docker 基礎教學 | 第 4 堂 | 範例程式碼</a:t>
             </a:r>
           </a:p>
         </p:txBody>
@@ -33730,7 +33730,7 @@
                 <a:ea typeface="Aptos"/>
                 <a:cs typeface="Aptos"/>
               </a:rPr>
-              <a:t>A11</a:t>
+              <a:t>CODE</a:t>
             </a:r>
           </a:p>
         </p:txBody>
@@ -33745,7 +33745,7 @@
 
 <file path=ppt/slides/slide44.xml><?xml version="1.0" encoding="utf-8"?>
 <p:sld xmlns:a="http://schemas.openxmlformats.org/drawingml/2006/main" xmlns:r="http://schemas.openxmlformats.org/officeDocument/2006/relationships" xmlns:p="http://schemas.openxmlformats.org/presentationml/2006/main">
-  <p:cSld name="程式碼附錄 12: Flask + MySQL app.py (4/4)">
+  <p:cSld name="範例程式碼：Flask + MySQL app.py (4/4)">
     <p:bg>
       <p:bgPr>
         <a:solidFill>
@@ -33802,7 +33802,7 @@
                 <a:ea typeface="Aptos"/>
                 <a:cs typeface="Aptos"/>
               </a:rPr>
-              <a:t>CODE APPENDIX</a:t>
+              <a:t>CODE EXAMPLE</a:t>
             </a:r>
           </a:p>
         </p:txBody>
@@ -33841,7 +33841,7 @@
                 <a:ea typeface="Aptos"/>
                 <a:cs typeface="Aptos"/>
               </a:rPr>
-              <a:t>程式碼附錄 12: Flask + MySQL app.py (4/4)</a:t>
+              <a:t>範例程式碼：Flask + MySQL app.py (4/4)</a:t>
             </a:r>
           </a:p>
         </p:txBody>
@@ -34105,7 +34105,7 @@
                 <a:ea typeface="Aptos"/>
                 <a:cs typeface="Aptos"/>
               </a:rPr>
-              <a:t>Docker 基礎教學 | 第 4 堂 | Code 12/15</a:t>
+              <a:t>Docker 基礎教學 | 第 4 堂 | 範例程式碼</a:t>
             </a:r>
           </a:p>
         </p:txBody>
@@ -34144,7 +34144,7 @@
                 <a:ea typeface="Aptos"/>
                 <a:cs typeface="Aptos"/>
               </a:rPr>
-              <a:t>A12</a:t>
+              <a:t>CODE</a:t>
             </a:r>
           </a:p>
         </p:txBody>
@@ -34159,7 +34159,7 @@
 
 <file path=ppt/slides/slide45.xml><?xml version="1.0" encoding="utf-8"?>
 <p:sld xmlns:a="http://schemas.openxmlformats.org/drawingml/2006/main" xmlns:r="http://schemas.openxmlformats.org/officeDocument/2006/relationships" xmlns:p="http://schemas.openxmlformats.org/presentationml/2006/main">
-  <p:cSld name="程式碼附錄 13: Flask + MySQL 容器指令">
+  <p:cSld name="範例程式碼：Flask + MySQL 容器指令">
     <p:bg>
       <p:bgPr>
         <a:solidFill>
@@ -34216,7 +34216,7 @@
                 <a:ea typeface="Aptos"/>
                 <a:cs typeface="Aptos"/>
               </a:rPr>
-              <a:t>CODE APPENDIX</a:t>
+              <a:t>CODE EXAMPLE</a:t>
             </a:r>
           </a:p>
         </p:txBody>
@@ -34255,7 +34255,7 @@
                 <a:ea typeface="Aptos"/>
                 <a:cs typeface="Aptos"/>
               </a:rPr>
-              <a:t>程式碼附錄 13: Flask + MySQL 容器指令</a:t>
+              <a:t>範例程式碼：Flask + MySQL 容器指令</a:t>
             </a:r>
           </a:p>
         </p:txBody>
@@ -34623,7 +34623,7 @@
                 <a:ea typeface="Aptos"/>
                 <a:cs typeface="Aptos"/>
               </a:rPr>
-              <a:t>Docker 基礎教學 | 第 4 堂 | Code 13/15</a:t>
+              <a:t>Docker 基礎教學 | 第 4 堂 | 範例程式碼</a:t>
             </a:r>
           </a:p>
         </p:txBody>
@@ -34662,7 +34662,7 @@
                 <a:ea typeface="Aptos"/>
                 <a:cs typeface="Aptos"/>
               </a:rPr>
-              <a:t>A13</a:t>
+              <a:t>CODE</a:t>
             </a:r>
           </a:p>
         </p:txBody>
@@ -34677,7 +34677,7 @@
 
 <file path=ppt/slides/slide46.xml><?xml version="1.0" encoding="utf-8"?>
 <p:sld xmlns:a="http://schemas.openxmlformats.org/drawingml/2006/main" xmlns:r="http://schemas.openxmlformats.org/officeDocument/2006/relationships" xmlns:p="http://schemas.openxmlformats.org/presentationml/2006/main">
-  <p:cSld name="程式碼附錄 14: CPU / Memory 壓力測試">
+  <p:cSld name="範例程式碼：CPU / Memory 壓力測試">
     <p:bg>
       <p:bgPr>
         <a:solidFill>
@@ -34734,7 +34734,7 @@
                 <a:ea typeface="Aptos"/>
                 <a:cs typeface="Aptos"/>
               </a:rPr>
-              <a:t>CODE APPENDIX</a:t>
+              <a:t>CODE EXAMPLE</a:t>
             </a:r>
           </a:p>
         </p:txBody>
@@ -34773,7 +34773,7 @@
                 <a:ea typeface="Aptos"/>
                 <a:cs typeface="Aptos"/>
               </a:rPr>
-              <a:t>程式碼附錄 14: CPU / Memory 壓力測試</a:t>
+              <a:t>範例程式碼：CPU / Memory 壓力測試</a:t>
             </a:r>
           </a:p>
         </p:txBody>
@@ -35011,7 +35011,7 @@
                 <a:ea typeface="Aptos"/>
                 <a:cs typeface="Aptos"/>
               </a:rPr>
-              <a:t>Docker 基礎教學 | 第 4 堂 | Code 14/15</a:t>
+              <a:t>Docker 基礎教學 | 第 4 堂 | 範例程式碼</a:t>
             </a:r>
           </a:p>
         </p:txBody>
@@ -35050,7 +35050,7 @@
                 <a:ea typeface="Aptos"/>
                 <a:cs typeface="Aptos"/>
               </a:rPr>
-              <a:t>A14</a:t>
+              <a:t>CODE</a:t>
             </a:r>
           </a:p>
         </p:txBody>
@@ -35065,7 +35065,7 @@
 
 <file path=ppt/slides/slide47.xml><?xml version="1.0" encoding="utf-8"?>
 <p:sld xmlns:a="http://schemas.openxmlformats.org/drawingml/2006/main" xmlns:r="http://schemas.openxmlformats.org/officeDocument/2006/relationships" xmlns:p="http://schemas.openxmlformats.org/presentationml/2006/main">
-  <p:cSld name="程式碼附錄 15: Production-like 三容器">
+  <p:cSld name="範例程式碼：Production-like 三容器">
     <p:bg>
       <p:bgPr>
         <a:solidFill>
@@ -35122,7 +35122,7 @@
                 <a:ea typeface="Aptos"/>
                 <a:cs typeface="Aptos"/>
               </a:rPr>
-              <a:t>CODE APPENDIX</a:t>
+              <a:t>CODE EXAMPLE</a:t>
             </a:r>
           </a:p>
         </p:txBody>
@@ -35161,7 +35161,7 @@
                 <a:ea typeface="Aptos"/>
                 <a:cs typeface="Aptos"/>
               </a:rPr>
-              <a:t>程式碼附錄 15: Production-like 三容器</a:t>
+              <a:t>範例程式碼：Production-like 三容器</a:t>
             </a:r>
           </a:p>
         </p:txBody>
@@ -35581,7 +35581,7 @@
                 <a:ea typeface="Aptos"/>
                 <a:cs typeface="Aptos"/>
               </a:rPr>
-              <a:t>Docker 基礎教學 | 第 4 堂 | Code 15/15</a:t>
+              <a:t>Docker 基礎教學 | 第 4 堂 | 範例程式碼</a:t>
             </a:r>
           </a:p>
         </p:txBody>
@@ -35620,7 +35620,7 @@
                 <a:ea typeface="Aptos"/>
                 <a:cs typeface="Aptos"/>
               </a:rPr>
-              <a:t>A15</a:t>
+              <a:t>CODE</a:t>
             </a:r>
           </a:p>
         </p:txBody>

--- a/slides/docker-session4-dockerfile-resources.pptx
+++ b/slides/docker-session4-dockerfile-resources.pptx
@@ -10,7 +10,9 @@
     <p:sldId xmlns:r="http://schemas.openxmlformats.org/officeDocument/2006/relationships" id="258" r:id="R2cbc7cb8ee394c74"/>
     <p:sldId xmlns:r="http://schemas.openxmlformats.org/officeDocument/2006/relationships" id="259" r:id="Rb639ff8e4e31446a"/>
     <p:sldId xmlns:r="http://schemas.openxmlformats.org/officeDocument/2006/relationships" id="260" r:id="R03a227b220914ba2"/>
+    <p:sldId id="303" r:id="rIdCodexDockerfileMap48"/>
     <p:sldId id="288" r:id="rId1"/>
+    <p:sldId id="304" r:id="rIdCodexDockerfileBehavior49"/>
     <p:sldId xmlns:r="http://schemas.openxmlformats.org/officeDocument/2006/relationships" id="261" r:id="R81e94a9dc4f2475c"/>
     <p:sldId xmlns:r="http://schemas.openxmlformats.org/officeDocument/2006/relationships" id="262" r:id="R5b484a6d39784ca5"/>
     <p:sldId xmlns:r="http://schemas.openxmlformats.org/officeDocument/2006/relationships" id="263" r:id="Rf5f9986d0ea64937"/>
@@ -35633,6 +35635,2049 @@
 </p:sld>
 </file>
 
+<file path=ppt/slides/slide48.xml><?xml version="1.0" encoding="utf-8"?>
+<p:sld xmlns:a="http://schemas.openxmlformats.org/drawingml/2006/main" xmlns:p="http://schemas.openxmlformats.org/presentationml/2006/main" xmlns:r="http://schemas.openxmlformats.org/officeDocument/2006/relationships">
+  <p:cSld name="Dockerfile 常見指令地圖">
+    <p:bg>
+      <p:bgPr>
+        <a:solidFill>
+          <a:srgbClr val="F6F8FB"/>
+        </a:solidFill>
+      </p:bgPr>
+    </p:bg>
+    <p:spTree>
+      <p:nvGrpSpPr>
+        <p:cNvPr id="1" name=""/>
+        <p:cNvGrpSpPr/>
+        <p:nvPr/>
+      </p:nvGrpSpPr>
+      <p:grpSpPr>
+        <a:xfrm/>
+      </p:grpSpPr>
+      <p:sp>
+        <p:nvSpPr>
+          <p:cNvPr id="2" name=""/>
+          <p:cNvSpPr>
+            <a:spLocks noGrp="1"/>
+          </p:cNvSpPr>
+          <p:nvPr/>
+        </p:nvSpPr>
+        <p:spPr>
+          <a:xfrm>
+            <a:off x="609600" y="400050"/>
+            <a:ext cx="6191250" cy="228600"/>
+          </a:xfrm>
+          <a:prstGeom prst="rect">
+            <a:avLst/>
+          </a:prstGeom>
+          <a:noFill/>
+          <a:ln w="0">
+            <a:noFill/>
+            <a:prstDash val="solid"/>
+          </a:ln>
+        </p:spPr>
+        <p:txBody>
+          <a:bodyPr lIns="0" tIns="0" rIns="0" bIns="0" anchor="t">
+            <a:normAutofit fontScale="100000"/>
+          </a:bodyPr>
+          <a:lstStyle/>
+          <a:p>
+            <a:pPr algn="l">
+              <a:lnSpc>
+                <a:spcPct val="106000"/>
+              </a:lnSpc>
+              <a:buNone/>
+              <a:defRPr sz="900" b="1">
+                <a:solidFill>
+                  <a:srgbClr val="0B5CAD"/>
+                </a:solidFill>
+                <a:latin typeface="Aptos"/>
+                <a:ea typeface="Aptos"/>
+                <a:cs typeface="Aptos"/>
+              </a:defRPr>
+            </a:pPr>
+            <a:r>
+              <a:rPr sz="900" b="1">
+                <a:solidFill>
+                  <a:srgbClr val="0B5CAD"/>
+                </a:solidFill>
+                <a:latin typeface="Aptos"/>
+                <a:ea typeface="Aptos"/>
+                <a:cs typeface="Aptos"/>
+              </a:rPr>
+              <a:t>DOCKERFILE MAP</a:t>
+            </a:r>
+          </a:p>
+        </p:txBody>
+      </p:sp>
+      <p:sp>
+        <p:nvSpPr>
+          <p:cNvPr id="3" name=""/>
+          <p:cNvSpPr>
+            <a:spLocks noGrp="1"/>
+          </p:cNvSpPr>
+          <p:nvPr/>
+        </p:nvSpPr>
+        <p:spPr>
+          <a:xfrm>
+            <a:off x="609600" y="742950"/>
+            <a:ext cx="9906000" cy="571500"/>
+          </a:xfrm>
+          <a:prstGeom prst="rect">
+            <a:avLst/>
+          </a:prstGeom>
+          <a:noFill/>
+          <a:ln w="0">
+            <a:noFill/>
+            <a:prstDash val="solid"/>
+          </a:ln>
+        </p:spPr>
+        <p:txBody>
+          <a:bodyPr lIns="0" tIns="0" rIns="0" bIns="0" anchor="t">
+            <a:normAutofit fontScale="100000"/>
+          </a:bodyPr>
+          <a:lstStyle/>
+          <a:p>
+            <a:pPr algn="l">
+              <a:lnSpc>
+                <a:spcPct val="106000"/>
+              </a:lnSpc>
+              <a:buNone/>
+              <a:defRPr sz="2850" b="1">
+                <a:solidFill>
+                  <a:srgbClr val="0B1220"/>
+                </a:solidFill>
+                <a:latin typeface="Aptos Display"/>
+                <a:ea typeface="Aptos Display"/>
+                <a:cs typeface="Aptos Display"/>
+              </a:defRPr>
+            </a:pPr>
+            <a:r>
+              <a:rPr sz="2850" b="1">
+                <a:solidFill>
+                  <a:srgbClr val="0B1220"/>
+                </a:solidFill>
+                <a:latin typeface="Aptos Display"/>
+                <a:ea typeface="Aptos Display"/>
+                <a:cs typeface="Aptos Display"/>
+              </a:rPr>
+              <a:t>Dockerfile 常見指令地圖</a:t>
+            </a:r>
+          </a:p>
+        </p:txBody>
+      </p:sp>
+      <p:sp>
+        <p:nvSpPr>
+          <p:cNvPr id="4" name=""/>
+          <p:cNvSpPr>
+            <a:spLocks noGrp="1"/>
+          </p:cNvSpPr>
+          <p:nvPr/>
+        </p:nvSpPr>
+        <p:spPr>
+          <a:xfrm>
+            <a:off x="609600" y="1514475"/>
+            <a:ext cx="2571750" cy="971550"/>
+          </a:xfrm>
+          <a:prstGeom prst="roundRect">
+            <a:avLst>
+              <a:gd name="adj" fmla="val 8000"/>
+            </a:avLst>
+          </a:prstGeom>
+          <a:solidFill>
+            <a:srgbClr val="E8F3FF"/>
+          </a:solidFill>
+          <a:ln w="9525">
+            <a:solidFill>
+              <a:srgbClr val="B7DCFF"/>
+            </a:solidFill>
+            <a:prstDash val="solid"/>
+          </a:ln>
+        </p:spPr>
+        <p:txBody>
+          <a:bodyPr lIns="152400" tIns="152400" rIns="152400" bIns="152400" anchor="t">
+            <a:normAutofit fontScale="100000"/>
+          </a:bodyPr>
+          <a:lstStyle/>
+          <a:p>
+            <a:pPr algn="l">
+              <a:lnSpc>
+                <a:spcPct val="106000"/>
+              </a:lnSpc>
+              <a:buNone/>
+              <a:defRPr sz="1650" b="1">
+                <a:solidFill>
+                  <a:srgbClr val="0B5CAD"/>
+                </a:solidFill>
+                <a:latin typeface="Aptos Display"/>
+                <a:ea typeface="Aptos Display"/>
+                <a:cs typeface="Aptos Display"/>
+              </a:defRPr>
+            </a:pPr>
+            <a:r>
+              <a:rPr sz="1650" b="1">
+                <a:solidFill>
+                  <a:srgbClr val="0B5CAD"/>
+                </a:solidFill>
+                <a:latin typeface="Aptos Display"/>
+                <a:ea typeface="Aptos Display"/>
+                <a:cs typeface="Aptos Display"/>
+              </a:rPr>
+              <a:t>FROM</a:t>
+            </a:r>
+          </a:p>
+          <a:p>
+            <a:pPr algn="l">
+              <a:lnSpc>
+                <a:spcPct val="106000"/>
+              </a:lnSpc>
+              <a:buNone/>
+              <a:defRPr sz="1275" b="1">
+                <a:solidFill>
+                  <a:srgbClr val="111827"/>
+                </a:solidFill>
+                <a:latin typeface="Aptos"/>
+                <a:ea typeface="Aptos"/>
+                <a:cs typeface="Aptos"/>
+              </a:defRPr>
+            </a:pPr>
+            <a:r>
+              <a:rPr sz="1275" b="1">
+                <a:solidFill>
+                  <a:srgbClr val="111827"/>
+                </a:solidFill>
+                <a:latin typeface="Aptos"/>
+                <a:ea typeface="Aptos"/>
+                <a:cs typeface="Aptos"/>
+              </a:rPr>
+              <a:t>選 base image</a:t>
+            </a:r>
+          </a:p>
+          <a:p>
+            <a:pPr algn="l">
+              <a:lnSpc>
+                <a:spcPct val="106000"/>
+              </a:lnSpc>
+              <a:buNone/>
+              <a:defRPr sz="1050" b="0">
+                <a:solidFill>
+                  <a:srgbClr val="475569"/>
+                </a:solidFill>
+                <a:latin typeface="Aptos"/>
+                <a:ea typeface="Aptos"/>
+                <a:cs typeface="Aptos"/>
+              </a:defRPr>
+            </a:pPr>
+            <a:r>
+              <a:rPr sz="1050" b="0">
+                <a:solidFill>
+                  <a:srgbClr val="475569"/>
+                </a:solidFill>
+                <a:latin typeface="Aptos"/>
+                <a:ea typeface="Aptos"/>
+                <a:cs typeface="Aptos"/>
+              </a:rPr>
+              <a:t>例：python:3.11-slim</a:t>
+            </a:r>
+          </a:p>
+        </p:txBody>
+      </p:sp>
+      <p:sp>
+        <p:nvSpPr>
+          <p:cNvPr id="5" name=""/>
+          <p:cNvSpPr>
+            <a:spLocks noGrp="1"/>
+          </p:cNvSpPr>
+          <p:nvPr/>
+        </p:nvSpPr>
+        <p:spPr>
+          <a:xfrm>
+            <a:off x="3409950" y="1514475"/>
+            <a:ext cx="2571750" cy="971550"/>
+          </a:xfrm>
+          <a:prstGeom prst="roundRect">
+            <a:avLst>
+              <a:gd name="adj" fmla="val 8000"/>
+            </a:avLst>
+          </a:prstGeom>
+          <a:solidFill>
+            <a:srgbClr val="E8F3FF"/>
+          </a:solidFill>
+          <a:ln w="9525">
+            <a:solidFill>
+              <a:srgbClr val="B7DCFF"/>
+            </a:solidFill>
+            <a:prstDash val="solid"/>
+          </a:ln>
+        </p:spPr>
+        <p:txBody>
+          <a:bodyPr lIns="152400" tIns="152400" rIns="152400" bIns="152400" anchor="t">
+            <a:normAutofit fontScale="100000"/>
+          </a:bodyPr>
+          <a:lstStyle/>
+          <a:p>
+            <a:pPr algn="l">
+              <a:lnSpc>
+                <a:spcPct val="106000"/>
+              </a:lnSpc>
+              <a:buNone/>
+              <a:defRPr sz="1650" b="1">
+                <a:solidFill>
+                  <a:srgbClr val="0B5CAD"/>
+                </a:solidFill>
+                <a:latin typeface="Aptos Display"/>
+                <a:ea typeface="Aptos Display"/>
+                <a:cs typeface="Aptos Display"/>
+              </a:defRPr>
+            </a:pPr>
+            <a:r>
+              <a:rPr sz="1650" b="1">
+                <a:solidFill>
+                  <a:srgbClr val="0B5CAD"/>
+                </a:solidFill>
+                <a:latin typeface="Aptos Display"/>
+                <a:ea typeface="Aptos Display"/>
+                <a:cs typeface="Aptos Display"/>
+              </a:rPr>
+              <a:t>WORKDIR</a:t>
+            </a:r>
+          </a:p>
+          <a:p>
+            <a:pPr algn="l">
+              <a:lnSpc>
+                <a:spcPct val="106000"/>
+              </a:lnSpc>
+              <a:buNone/>
+              <a:defRPr sz="1275" b="1">
+                <a:solidFill>
+                  <a:srgbClr val="111827"/>
+                </a:solidFill>
+                <a:latin typeface="Aptos"/>
+                <a:ea typeface="Aptos"/>
+                <a:cs typeface="Aptos"/>
+              </a:defRPr>
+            </a:pPr>
+            <a:r>
+              <a:rPr sz="1275" b="1">
+                <a:solidFill>
+                  <a:srgbClr val="111827"/>
+                </a:solidFill>
+                <a:latin typeface="Aptos"/>
+                <a:ea typeface="Aptos"/>
+                <a:cs typeface="Aptos"/>
+              </a:rPr>
+              <a:t>設定工作目錄</a:t>
+            </a:r>
+          </a:p>
+          <a:p>
+            <a:pPr algn="l">
+              <a:lnSpc>
+                <a:spcPct val="106000"/>
+              </a:lnSpc>
+              <a:buNone/>
+              <a:defRPr sz="1050" b="0">
+                <a:solidFill>
+                  <a:srgbClr val="475569"/>
+                </a:solidFill>
+                <a:latin typeface="Aptos"/>
+                <a:ea typeface="Aptos"/>
+                <a:cs typeface="Aptos"/>
+              </a:defRPr>
+            </a:pPr>
+            <a:r>
+              <a:rPr sz="1050" b="0">
+                <a:solidFill>
+                  <a:srgbClr val="475569"/>
+                </a:solidFill>
+                <a:latin typeface="Aptos"/>
+                <a:ea typeface="Aptos"/>
+                <a:cs typeface="Aptos"/>
+              </a:rPr>
+              <a:t>後面的指令都在這裡跑</a:t>
+            </a:r>
+          </a:p>
+        </p:txBody>
+      </p:sp>
+      <p:sp>
+        <p:nvSpPr>
+          <p:cNvPr id="6" name=""/>
+          <p:cNvSpPr>
+            <a:spLocks noGrp="1"/>
+          </p:cNvSpPr>
+          <p:nvPr/>
+        </p:nvSpPr>
+        <p:spPr>
+          <a:xfrm>
+            <a:off x="6210300" y="1514475"/>
+            <a:ext cx="2571750" cy="971550"/>
+          </a:xfrm>
+          <a:prstGeom prst="roundRect">
+            <a:avLst>
+              <a:gd name="adj" fmla="val 8000"/>
+            </a:avLst>
+          </a:prstGeom>
+          <a:solidFill>
+            <a:srgbClr val="E8F3FF"/>
+          </a:solidFill>
+          <a:ln w="9525">
+            <a:solidFill>
+              <a:srgbClr val="B7DCFF"/>
+            </a:solidFill>
+            <a:prstDash val="solid"/>
+          </a:ln>
+        </p:spPr>
+        <p:txBody>
+          <a:bodyPr lIns="152400" tIns="152400" rIns="152400" bIns="152400" anchor="t">
+            <a:normAutofit fontScale="100000"/>
+          </a:bodyPr>
+          <a:lstStyle/>
+          <a:p>
+            <a:pPr algn="l">
+              <a:lnSpc>
+                <a:spcPct val="106000"/>
+              </a:lnSpc>
+              <a:buNone/>
+              <a:defRPr sz="1650" b="1">
+                <a:solidFill>
+                  <a:srgbClr val="0B5CAD"/>
+                </a:solidFill>
+                <a:latin typeface="Aptos Display"/>
+                <a:ea typeface="Aptos Display"/>
+                <a:cs typeface="Aptos Display"/>
+              </a:defRPr>
+            </a:pPr>
+            <a:r>
+              <a:rPr sz="1650" b="1">
+                <a:solidFill>
+                  <a:srgbClr val="0B5CAD"/>
+                </a:solidFill>
+                <a:latin typeface="Aptos Display"/>
+                <a:ea typeface="Aptos Display"/>
+                <a:cs typeface="Aptos Display"/>
+              </a:rPr>
+              <a:t>COPY</a:t>
+            </a:r>
+          </a:p>
+          <a:p>
+            <a:pPr algn="l">
+              <a:lnSpc>
+                <a:spcPct val="106000"/>
+              </a:lnSpc>
+              <a:buNone/>
+              <a:defRPr sz="1275" b="1">
+                <a:solidFill>
+                  <a:srgbClr val="111827"/>
+                </a:solidFill>
+                <a:latin typeface="Aptos"/>
+                <a:ea typeface="Aptos"/>
+                <a:cs typeface="Aptos"/>
+              </a:defRPr>
+            </a:pPr>
+            <a:r>
+              <a:rPr sz="1275" b="1">
+                <a:solidFill>
+                  <a:srgbClr val="111827"/>
+                </a:solidFill>
+                <a:latin typeface="Aptos"/>
+                <a:ea typeface="Aptos"/>
+                <a:cs typeface="Aptos"/>
+              </a:rPr>
+              <a:t>把檔案放進 image</a:t>
+            </a:r>
+          </a:p>
+          <a:p>
+            <a:pPr algn="l">
+              <a:lnSpc>
+                <a:spcPct val="106000"/>
+              </a:lnSpc>
+              <a:buNone/>
+              <a:defRPr sz="1050" b="0">
+                <a:solidFill>
+                  <a:srgbClr val="475569"/>
+                </a:solidFill>
+                <a:latin typeface="Aptos"/>
+                <a:ea typeface="Aptos"/>
+                <a:cs typeface="Aptos"/>
+              </a:defRPr>
+            </a:pPr>
+            <a:r>
+              <a:rPr sz="1050" b="0">
+                <a:solidFill>
+                  <a:srgbClr val="475569"/>
+                </a:solidFill>
+                <a:latin typeface="Aptos"/>
+                <a:ea typeface="Aptos"/>
+                <a:cs typeface="Aptos"/>
+              </a:rPr>
+              <a:t>初學先用 COPY，不急著用 ADD</a:t>
+            </a:r>
+          </a:p>
+        </p:txBody>
+      </p:sp>
+      <p:sp>
+        <p:nvSpPr>
+          <p:cNvPr id="7" name=""/>
+          <p:cNvSpPr>
+            <a:spLocks noGrp="1"/>
+          </p:cNvSpPr>
+          <p:nvPr/>
+        </p:nvSpPr>
+        <p:spPr>
+          <a:xfrm>
+            <a:off x="9010650" y="1514475"/>
+            <a:ext cx="2571750" cy="971550"/>
+          </a:xfrm>
+          <a:prstGeom prst="roundRect">
+            <a:avLst>
+              <a:gd name="adj" fmla="val 8000"/>
+            </a:avLst>
+          </a:prstGeom>
+          <a:solidFill>
+            <a:srgbClr val="E8F3FF"/>
+          </a:solidFill>
+          <a:ln w="9525">
+            <a:solidFill>
+              <a:srgbClr val="B7DCFF"/>
+            </a:solidFill>
+            <a:prstDash val="solid"/>
+          </a:ln>
+        </p:spPr>
+        <p:txBody>
+          <a:bodyPr lIns="152400" tIns="152400" rIns="152400" bIns="152400" anchor="t">
+            <a:normAutofit fontScale="100000"/>
+          </a:bodyPr>
+          <a:lstStyle/>
+          <a:p>
+            <a:pPr algn="l">
+              <a:lnSpc>
+                <a:spcPct val="106000"/>
+              </a:lnSpc>
+              <a:buNone/>
+              <a:defRPr sz="1650" b="1">
+                <a:solidFill>
+                  <a:srgbClr val="0B5CAD"/>
+                </a:solidFill>
+                <a:latin typeface="Aptos Display"/>
+                <a:ea typeface="Aptos Display"/>
+                <a:cs typeface="Aptos Display"/>
+              </a:defRPr>
+            </a:pPr>
+            <a:r>
+              <a:rPr sz="1650" b="1">
+                <a:solidFill>
+                  <a:srgbClr val="0B5CAD"/>
+                </a:solidFill>
+                <a:latin typeface="Aptos Display"/>
+                <a:ea typeface="Aptos Display"/>
+                <a:cs typeface="Aptos Display"/>
+              </a:rPr>
+              <a:t>RUN</a:t>
+            </a:r>
+          </a:p>
+          <a:p>
+            <a:pPr algn="l">
+              <a:lnSpc>
+                <a:spcPct val="106000"/>
+              </a:lnSpc>
+              <a:buNone/>
+              <a:defRPr sz="1275" b="1">
+                <a:solidFill>
+                  <a:srgbClr val="111827"/>
+                </a:solidFill>
+                <a:latin typeface="Aptos"/>
+                <a:ea typeface="Aptos"/>
+                <a:cs typeface="Aptos"/>
+              </a:defRPr>
+            </a:pPr>
+            <a:r>
+              <a:rPr sz="1275" b="1">
+                <a:solidFill>
+                  <a:srgbClr val="111827"/>
+                </a:solidFill>
+                <a:latin typeface="Aptos"/>
+                <a:ea typeface="Aptos"/>
+                <a:cs typeface="Aptos"/>
+              </a:rPr>
+              <a:t>build 時執行</a:t>
+            </a:r>
+          </a:p>
+          <a:p>
+            <a:pPr algn="l">
+              <a:lnSpc>
+                <a:spcPct val="106000"/>
+              </a:lnSpc>
+              <a:buNone/>
+              <a:defRPr sz="1050" b="0">
+                <a:solidFill>
+                  <a:srgbClr val="475569"/>
+                </a:solidFill>
+                <a:latin typeface="Aptos"/>
+                <a:ea typeface="Aptos"/>
+                <a:cs typeface="Aptos"/>
+              </a:defRPr>
+            </a:pPr>
+            <a:r>
+              <a:rPr sz="1050" b="0">
+                <a:solidFill>
+                  <a:srgbClr val="475569"/>
+                </a:solidFill>
+                <a:latin typeface="Aptos"/>
+                <a:ea typeface="Aptos"/>
+                <a:cs typeface="Aptos"/>
+              </a:rPr>
+              <a:t>安裝套件、建立資料夾</a:t>
+            </a:r>
+          </a:p>
+        </p:txBody>
+      </p:sp>
+      <p:sp>
+        <p:nvSpPr>
+          <p:cNvPr id="8" name=""/>
+          <p:cNvSpPr>
+            <a:spLocks noGrp="1"/>
+          </p:cNvSpPr>
+          <p:nvPr/>
+        </p:nvSpPr>
+        <p:spPr>
+          <a:xfrm>
+            <a:off x="609600" y="2733675"/>
+            <a:ext cx="2571750" cy="971550"/>
+          </a:xfrm>
+          <a:prstGeom prst="roundRect">
+            <a:avLst>
+              <a:gd name="adj" fmla="val 8000"/>
+            </a:avLst>
+          </a:prstGeom>
+          <a:solidFill>
+            <a:srgbClr val="FFFFFF"/>
+          </a:solidFill>
+          <a:ln w="9525">
+            <a:solidFill>
+              <a:srgbClr val="D9E2EC"/>
+            </a:solidFill>
+            <a:prstDash val="solid"/>
+          </a:ln>
+        </p:spPr>
+        <p:txBody>
+          <a:bodyPr lIns="152400" tIns="152400" rIns="152400" bIns="152400" anchor="t">
+            <a:normAutofit fontScale="100000"/>
+          </a:bodyPr>
+          <a:lstStyle/>
+          <a:p>
+            <a:pPr algn="l">
+              <a:lnSpc>
+                <a:spcPct val="106000"/>
+              </a:lnSpc>
+              <a:buNone/>
+              <a:defRPr sz="1650" b="1">
+                <a:solidFill>
+                  <a:srgbClr val="0B5CAD"/>
+                </a:solidFill>
+                <a:latin typeface="Aptos Display"/>
+                <a:ea typeface="Aptos Display"/>
+                <a:cs typeface="Aptos Display"/>
+              </a:defRPr>
+            </a:pPr>
+            <a:r>
+              <a:rPr sz="1650" b="1">
+                <a:solidFill>
+                  <a:srgbClr val="0B5CAD"/>
+                </a:solidFill>
+                <a:latin typeface="Aptos Display"/>
+                <a:ea typeface="Aptos Display"/>
+                <a:cs typeface="Aptos Display"/>
+              </a:rPr>
+              <a:t>CMD</a:t>
+            </a:r>
+          </a:p>
+          <a:p>
+            <a:pPr algn="l">
+              <a:lnSpc>
+                <a:spcPct val="106000"/>
+              </a:lnSpc>
+              <a:buNone/>
+              <a:defRPr sz="1275" b="1">
+                <a:solidFill>
+                  <a:srgbClr val="111827"/>
+                </a:solidFill>
+                <a:latin typeface="Aptos"/>
+                <a:ea typeface="Aptos"/>
+                <a:cs typeface="Aptos"/>
+              </a:defRPr>
+            </a:pPr>
+            <a:r>
+              <a:rPr sz="1275" b="1">
+                <a:solidFill>
+                  <a:srgbClr val="111827"/>
+                </a:solidFill>
+                <a:latin typeface="Aptos"/>
+                <a:ea typeface="Aptos"/>
+                <a:cs typeface="Aptos"/>
+              </a:rPr>
+              <a:t>container 啟動時執行</a:t>
+            </a:r>
+          </a:p>
+          <a:p>
+            <a:pPr algn="l">
+              <a:lnSpc>
+                <a:spcPct val="106000"/>
+              </a:lnSpc>
+              <a:buNone/>
+              <a:defRPr sz="1050" b="0">
+                <a:solidFill>
+                  <a:srgbClr val="475569"/>
+                </a:solidFill>
+                <a:latin typeface="Aptos"/>
+                <a:ea typeface="Aptos"/>
+                <a:cs typeface="Aptos"/>
+              </a:defRPr>
+            </a:pPr>
+            <a:r>
+              <a:rPr sz="1050" b="0">
+                <a:solidFill>
+                  <a:srgbClr val="475569"/>
+                </a:solidFill>
+                <a:latin typeface="Aptos"/>
+                <a:ea typeface="Aptos"/>
+                <a:cs typeface="Aptos"/>
+              </a:rPr>
+              <a:t>通常放啟動程式</a:t>
+            </a:r>
+          </a:p>
+        </p:txBody>
+      </p:sp>
+      <p:sp>
+        <p:nvSpPr>
+          <p:cNvPr id="9" name=""/>
+          <p:cNvSpPr>
+            <a:spLocks noGrp="1"/>
+          </p:cNvSpPr>
+          <p:nvPr/>
+        </p:nvSpPr>
+        <p:spPr>
+          <a:xfrm>
+            <a:off x="3409950" y="2733675"/>
+            <a:ext cx="2571750" cy="971550"/>
+          </a:xfrm>
+          <a:prstGeom prst="roundRect">
+            <a:avLst>
+              <a:gd name="adj" fmla="val 8000"/>
+            </a:avLst>
+          </a:prstGeom>
+          <a:solidFill>
+            <a:srgbClr val="FFFFFF"/>
+          </a:solidFill>
+          <a:ln w="9525">
+            <a:solidFill>
+              <a:srgbClr val="D9E2EC"/>
+            </a:solidFill>
+            <a:prstDash val="solid"/>
+          </a:ln>
+        </p:spPr>
+        <p:txBody>
+          <a:bodyPr lIns="152400" tIns="152400" rIns="152400" bIns="152400" anchor="t">
+            <a:normAutofit fontScale="100000"/>
+          </a:bodyPr>
+          <a:lstStyle/>
+          <a:p>
+            <a:pPr algn="l">
+              <a:lnSpc>
+                <a:spcPct val="106000"/>
+              </a:lnSpc>
+              <a:buNone/>
+              <a:defRPr sz="1650" b="1">
+                <a:solidFill>
+                  <a:srgbClr val="0B5CAD"/>
+                </a:solidFill>
+                <a:latin typeface="Aptos Display"/>
+                <a:ea typeface="Aptos Display"/>
+                <a:cs typeface="Aptos Display"/>
+              </a:defRPr>
+            </a:pPr>
+            <a:r>
+              <a:rPr sz="1650" b="1">
+                <a:solidFill>
+                  <a:srgbClr val="0B5CAD"/>
+                </a:solidFill>
+                <a:latin typeface="Aptos Display"/>
+                <a:ea typeface="Aptos Display"/>
+                <a:cs typeface="Aptos Display"/>
+              </a:rPr>
+              <a:t>EXPOSE</a:t>
+            </a:r>
+          </a:p>
+          <a:p>
+            <a:pPr algn="l">
+              <a:lnSpc>
+                <a:spcPct val="106000"/>
+              </a:lnSpc>
+              <a:buNone/>
+              <a:defRPr sz="1275" b="1">
+                <a:solidFill>
+                  <a:srgbClr val="111827"/>
+                </a:solidFill>
+                <a:latin typeface="Aptos"/>
+                <a:ea typeface="Aptos"/>
+                <a:cs typeface="Aptos"/>
+              </a:defRPr>
+            </a:pPr>
+            <a:r>
+              <a:rPr sz="1275" b="1">
+                <a:solidFill>
+                  <a:srgbClr val="111827"/>
+                </a:solidFill>
+                <a:latin typeface="Aptos"/>
+                <a:ea typeface="Aptos"/>
+                <a:cs typeface="Aptos"/>
+              </a:rPr>
+              <a:t>文件提示 port</a:t>
+            </a:r>
+          </a:p>
+          <a:p>
+            <a:pPr algn="l">
+              <a:lnSpc>
+                <a:spcPct val="106000"/>
+              </a:lnSpc>
+              <a:buNone/>
+              <a:defRPr sz="1050" b="0">
+                <a:solidFill>
+                  <a:srgbClr val="475569"/>
+                </a:solidFill>
+                <a:latin typeface="Aptos"/>
+                <a:ea typeface="Aptos"/>
+                <a:cs typeface="Aptos"/>
+              </a:defRPr>
+            </a:pPr>
+            <a:r>
+              <a:rPr sz="1050" b="0">
+                <a:solidFill>
+                  <a:srgbClr val="475569"/>
+                </a:solidFill>
+                <a:latin typeface="Aptos"/>
+                <a:ea typeface="Aptos"/>
+                <a:cs typeface="Aptos"/>
+              </a:rPr>
+              <a:t>不等於真的開 port</a:t>
+            </a:r>
+          </a:p>
+        </p:txBody>
+      </p:sp>
+      <p:sp>
+        <p:nvSpPr>
+          <p:cNvPr id="10" name=""/>
+          <p:cNvSpPr>
+            <a:spLocks noGrp="1"/>
+          </p:cNvSpPr>
+          <p:nvPr/>
+        </p:nvSpPr>
+        <p:spPr>
+          <a:xfrm>
+            <a:off x="6210300" y="2733675"/>
+            <a:ext cx="2571750" cy="971550"/>
+          </a:xfrm>
+          <a:prstGeom prst="roundRect">
+            <a:avLst>
+              <a:gd name="adj" fmla="val 8000"/>
+            </a:avLst>
+          </a:prstGeom>
+          <a:solidFill>
+            <a:srgbClr val="FFFFFF"/>
+          </a:solidFill>
+          <a:ln w="9525">
+            <a:solidFill>
+              <a:srgbClr val="D9E2EC"/>
+            </a:solidFill>
+            <a:prstDash val="solid"/>
+          </a:ln>
+        </p:spPr>
+        <p:txBody>
+          <a:bodyPr lIns="152400" tIns="152400" rIns="152400" bIns="152400" anchor="t">
+            <a:normAutofit fontScale="100000"/>
+          </a:bodyPr>
+          <a:lstStyle/>
+          <a:p>
+            <a:pPr algn="l">
+              <a:lnSpc>
+                <a:spcPct val="106000"/>
+              </a:lnSpc>
+              <a:buNone/>
+              <a:defRPr sz="1650" b="1">
+                <a:solidFill>
+                  <a:srgbClr val="0B5CAD"/>
+                </a:solidFill>
+                <a:latin typeface="Aptos Display"/>
+                <a:ea typeface="Aptos Display"/>
+                <a:cs typeface="Aptos Display"/>
+              </a:defRPr>
+            </a:pPr>
+            <a:r>
+              <a:rPr sz="1650" b="1">
+                <a:solidFill>
+                  <a:srgbClr val="0B5CAD"/>
+                </a:solidFill>
+                <a:latin typeface="Aptos Display"/>
+                <a:ea typeface="Aptos Display"/>
+                <a:cs typeface="Aptos Display"/>
+              </a:rPr>
+              <a:t>ENV</a:t>
+            </a:r>
+          </a:p>
+          <a:p>
+            <a:pPr algn="l">
+              <a:lnSpc>
+                <a:spcPct val="106000"/>
+              </a:lnSpc>
+              <a:buNone/>
+              <a:defRPr sz="1275" b="1">
+                <a:solidFill>
+                  <a:srgbClr val="111827"/>
+                </a:solidFill>
+                <a:latin typeface="Aptos"/>
+                <a:ea typeface="Aptos"/>
+                <a:cs typeface="Aptos"/>
+              </a:defRPr>
+            </a:pPr>
+            <a:r>
+              <a:rPr sz="1275" b="1">
+                <a:solidFill>
+                  <a:srgbClr val="111827"/>
+                </a:solidFill>
+                <a:latin typeface="Aptos"/>
+                <a:ea typeface="Aptos"/>
+                <a:cs typeface="Aptos"/>
+              </a:rPr>
+              <a:t>非機密設定</a:t>
+            </a:r>
+          </a:p>
+          <a:p>
+            <a:pPr algn="l">
+              <a:lnSpc>
+                <a:spcPct val="106000"/>
+              </a:lnSpc>
+              <a:buNone/>
+              <a:defRPr sz="1050" b="0">
+                <a:solidFill>
+                  <a:srgbClr val="475569"/>
+                </a:solidFill>
+                <a:latin typeface="Aptos"/>
+                <a:ea typeface="Aptos"/>
+                <a:cs typeface="Aptos"/>
+              </a:defRPr>
+            </a:pPr>
+            <a:r>
+              <a:rPr sz="1050" b="0">
+                <a:solidFill>
+                  <a:srgbClr val="475569"/>
+                </a:solidFill>
+                <a:latin typeface="Aptos"/>
+                <a:ea typeface="Aptos"/>
+                <a:cs typeface="Aptos"/>
+              </a:rPr>
+              <a:t>密碼、token 不放這裡</a:t>
+            </a:r>
+          </a:p>
+        </p:txBody>
+      </p:sp>
+      <p:sp>
+        <p:nvSpPr>
+          <p:cNvPr id="11" name=""/>
+          <p:cNvSpPr>
+            <a:spLocks noGrp="1"/>
+          </p:cNvSpPr>
+          <p:nvPr/>
+        </p:nvSpPr>
+        <p:spPr>
+          <a:xfrm>
+            <a:off x="9010650" y="2733675"/>
+            <a:ext cx="2571750" cy="971550"/>
+          </a:xfrm>
+          <a:prstGeom prst="roundRect">
+            <a:avLst>
+              <a:gd name="adj" fmla="val 8000"/>
+            </a:avLst>
+          </a:prstGeom>
+          <a:solidFill>
+            <a:srgbClr val="FFFFFF"/>
+          </a:solidFill>
+          <a:ln w="9525">
+            <a:solidFill>
+              <a:srgbClr val="D9E2EC"/>
+            </a:solidFill>
+            <a:prstDash val="solid"/>
+          </a:ln>
+        </p:spPr>
+        <p:txBody>
+          <a:bodyPr lIns="152400" tIns="152400" rIns="152400" bIns="152400" anchor="t">
+            <a:normAutofit fontScale="100000"/>
+          </a:bodyPr>
+          <a:lstStyle/>
+          <a:p>
+            <a:pPr algn="l">
+              <a:lnSpc>
+                <a:spcPct val="106000"/>
+              </a:lnSpc>
+              <a:buNone/>
+              <a:defRPr sz="1650" b="1">
+                <a:solidFill>
+                  <a:srgbClr val="0B5CAD"/>
+                </a:solidFill>
+                <a:latin typeface="Aptos Display"/>
+                <a:ea typeface="Aptos Display"/>
+                <a:cs typeface="Aptos Display"/>
+              </a:defRPr>
+            </a:pPr>
+            <a:r>
+              <a:rPr sz="1650" b="1">
+                <a:solidFill>
+                  <a:srgbClr val="0B5CAD"/>
+                </a:solidFill>
+                <a:latin typeface="Aptos Display"/>
+                <a:ea typeface="Aptos Display"/>
+                <a:cs typeface="Aptos Display"/>
+              </a:rPr>
+              <a:t>USER</a:t>
+            </a:r>
+          </a:p>
+          <a:p>
+            <a:pPr algn="l">
+              <a:lnSpc>
+                <a:spcPct val="106000"/>
+              </a:lnSpc>
+              <a:buNone/>
+              <a:defRPr sz="1275" b="1">
+                <a:solidFill>
+                  <a:srgbClr val="111827"/>
+                </a:solidFill>
+                <a:latin typeface="Aptos"/>
+                <a:ea typeface="Aptos"/>
+                <a:cs typeface="Aptos"/>
+              </a:defRPr>
+            </a:pPr>
+            <a:r>
+              <a:rPr sz="1275" b="1">
+                <a:solidFill>
+                  <a:srgbClr val="111827"/>
+                </a:solidFill>
+                <a:latin typeface="Aptos"/>
+                <a:ea typeface="Aptos"/>
+                <a:cs typeface="Aptos"/>
+              </a:rPr>
+              <a:t>不用 root 跑程式</a:t>
+            </a:r>
+          </a:p>
+          <a:p>
+            <a:pPr algn="l">
+              <a:lnSpc>
+                <a:spcPct val="106000"/>
+              </a:lnSpc>
+              <a:buNone/>
+              <a:defRPr sz="1050" b="0">
+                <a:solidFill>
+                  <a:srgbClr val="475569"/>
+                </a:solidFill>
+                <a:latin typeface="Aptos"/>
+                <a:ea typeface="Aptos"/>
+                <a:cs typeface="Aptos"/>
+              </a:defRPr>
+            </a:pPr>
+            <a:r>
+              <a:rPr sz="1050" b="0">
+                <a:solidFill>
+                  <a:srgbClr val="475569"/>
+                </a:solidFill>
+                <a:latin typeface="Aptos"/>
+                <a:ea typeface="Aptos"/>
+                <a:cs typeface="Aptos"/>
+              </a:rPr>
+              <a:t>production 會更常看到</a:t>
+            </a:r>
+          </a:p>
+        </p:txBody>
+      </p:sp>
+      <p:sp>
+        <p:nvSpPr>
+          <p:cNvPr id="12" name=""/>
+          <p:cNvSpPr>
+            <a:spLocks noGrp="1"/>
+          </p:cNvSpPr>
+          <p:nvPr/>
+        </p:nvSpPr>
+        <p:spPr>
+          <a:xfrm>
+            <a:off x="1143000" y="4210050"/>
+            <a:ext cx="9144000" cy="609600"/>
+          </a:xfrm>
+          <a:prstGeom prst="roundRect">
+            <a:avLst>
+              <a:gd name="adj" fmla="val 8000"/>
+            </a:avLst>
+          </a:prstGeom>
+          <a:solidFill>
+            <a:srgbClr val="EEF2F7"/>
+          </a:solidFill>
+          <a:ln w="9525">
+            <a:solidFill>
+              <a:srgbClr val="D9E2EC"/>
+            </a:solidFill>
+            <a:prstDash val="solid"/>
+          </a:ln>
+        </p:spPr>
+        <p:txBody>
+          <a:bodyPr lIns="152400" tIns="152400" rIns="152400" bIns="152400" anchor="t">
+            <a:normAutofit fontScale="100000"/>
+          </a:bodyPr>
+          <a:lstStyle/>
+          <a:p>
+            <a:pPr algn="ctr">
+              <a:lnSpc>
+                <a:spcPct val="106000"/>
+              </a:lnSpc>
+              <a:buNone/>
+              <a:defRPr sz="1500" b="1">
+                <a:solidFill>
+                  <a:srgbClr val="0B1220"/>
+                </a:solidFill>
+                <a:latin typeface="Aptos"/>
+                <a:ea typeface="Aptos"/>
+                <a:cs typeface="Aptos"/>
+              </a:defRPr>
+            </a:pPr>
+            <a:r>
+              <a:rPr sz="1500" b="1">
+                <a:solidFill>
+                  <a:srgbClr val="0B1220"/>
+                </a:solidFill>
+                <a:latin typeface="Aptos"/>
+                <a:ea typeface="Aptos"/>
+                <a:cs typeface="Aptos"/>
+              </a:rPr>
+              <a:t>這堂要會讀懂前七個；USER 和 ENV 先知道用途，細節之後遇到 production 再補。</a:t>
+            </a:r>
+          </a:p>
+        </p:txBody>
+      </p:sp>
+      <p:sp>
+        <p:nvSpPr>
+          <p:cNvPr id="40" name=""/>
+          <p:cNvSpPr>
+            <a:spLocks noGrp="1"/>
+          </p:cNvSpPr>
+          <p:nvPr/>
+        </p:nvSpPr>
+        <p:spPr>
+          <a:xfrm>
+            <a:off x="609600" y="6305550"/>
+            <a:ext cx="9906000" cy="13335"/>
+          </a:xfrm>
+          <a:prstGeom prst="rect">
+            <a:avLst/>
+          </a:prstGeom>
+          <a:solidFill>
+            <a:srgbClr val="D9E2EC"/>
+          </a:solidFill>
+          <a:ln w="0">
+            <a:noFill/>
+            <a:prstDash val="solid"/>
+          </a:ln>
+        </p:spPr>
+        <p:txBody>
+          <a:bodyPr lIns="0" tIns="0" rIns="0" bIns="0" anchor="t">
+            <a:normAutofit fontScale="100000"/>
+          </a:bodyPr>
+          <a:lstStyle/>
+        </p:txBody>
+      </p:sp>
+      <p:sp>
+        <p:nvSpPr>
+          <p:cNvPr id="41" name=""/>
+          <p:cNvSpPr>
+            <a:spLocks noGrp="1"/>
+          </p:cNvSpPr>
+          <p:nvPr/>
+        </p:nvSpPr>
+        <p:spPr>
+          <a:xfrm>
+            <a:off x="609600" y="6400800"/>
+            <a:ext cx="2762250" cy="171450"/>
+          </a:xfrm>
+          <a:prstGeom prst="rect">
+            <a:avLst/>
+          </a:prstGeom>
+          <a:noFill/>
+          <a:ln w="0">
+            <a:noFill/>
+            <a:prstDash val="solid"/>
+          </a:ln>
+        </p:spPr>
+        <p:txBody>
+          <a:bodyPr lIns="0" tIns="0" rIns="0" bIns="0" anchor="t">
+            <a:normAutofit fontScale="100000"/>
+          </a:bodyPr>
+          <a:lstStyle/>
+          <a:p>
+            <a:pPr algn="l">
+              <a:lnSpc>
+                <a:spcPct val="106000"/>
+              </a:lnSpc>
+              <a:buNone/>
+              <a:defRPr sz="825" b="0">
+                <a:solidFill>
+                  <a:srgbClr val="64748B"/>
+                </a:solidFill>
+                <a:latin typeface="Aptos"/>
+                <a:ea typeface="Aptos"/>
+                <a:cs typeface="Aptos"/>
+              </a:defRPr>
+            </a:pPr>
+            <a:r>
+              <a:rPr sz="825" b="0">
+                <a:solidFill>
+                  <a:srgbClr val="64748B"/>
+                </a:solidFill>
+                <a:latin typeface="Aptos"/>
+                <a:ea typeface="Aptos"/>
+                <a:cs typeface="Aptos"/>
+              </a:rPr>
+              <a:t>Docker 基礎教學 | 第 4 堂</a:t>
+            </a:r>
+          </a:p>
+        </p:txBody>
+      </p:sp>
+      <p:sp>
+        <p:nvSpPr>
+          <p:cNvPr id="42" name=""/>
+          <p:cNvSpPr>
+            <a:spLocks noGrp="1"/>
+          </p:cNvSpPr>
+          <p:nvPr/>
+        </p:nvSpPr>
+        <p:spPr>
+          <a:xfrm>
+            <a:off x="10858500" y="6381750"/>
+            <a:ext cx="723900" cy="190500"/>
+          </a:xfrm>
+          <a:prstGeom prst="rect">
+            <a:avLst/>
+          </a:prstGeom>
+          <a:noFill/>
+          <a:ln w="0">
+            <a:noFill/>
+            <a:prstDash val="solid"/>
+          </a:ln>
+        </p:spPr>
+        <p:txBody>
+          <a:bodyPr lIns="0" tIns="0" rIns="0" bIns="0" anchor="t">
+            <a:normAutofit fontScale="100000"/>
+          </a:bodyPr>
+          <a:lstStyle/>
+          <a:p>
+            <a:pPr algn="r">
+              <a:lnSpc>
+                <a:spcPct val="106000"/>
+              </a:lnSpc>
+              <a:buNone/>
+              <a:defRPr sz="900" b="1">
+                <a:solidFill>
+                  <a:srgbClr val="64748B"/>
+                </a:solidFill>
+                <a:latin typeface="Aptos"/>
+                <a:ea typeface="Aptos"/>
+                <a:cs typeface="Aptos"/>
+              </a:defRPr>
+            </a:pPr>
+            <a:r>
+              <a:rPr sz="900" b="1">
+                <a:solidFill>
+                  <a:srgbClr val="64748B"/>
+                </a:solidFill>
+                <a:latin typeface="Aptos"/>
+                <a:ea typeface="Aptos"/>
+                <a:cs typeface="Aptos"/>
+              </a:rPr>
+              <a:t>05A</a:t>
+            </a:r>
+          </a:p>
+        </p:txBody>
+      </p:sp>
+    </p:spTree>
+  </p:cSld>
+  <p:clrMapOvr>
+    <a:masterClrMapping/>
+  </p:clrMapOvr>
+</p:sld>
+</file>
+
+<file path=ppt/slides/slide49.xml><?xml version="1.0" encoding="utf-8"?>
+<p:sld xmlns:a="http://schemas.openxmlformats.org/drawingml/2006/main" xmlns:p="http://schemas.openxmlformats.org/presentationml/2006/main" xmlns:r="http://schemas.openxmlformats.org/officeDocument/2006/relationships">
+  <p:cSld name="RUN CMD EXPOSE 差異">
+    <p:bg>
+      <p:bgPr>
+        <a:solidFill>
+          <a:srgbClr val="F6F8FB"/>
+        </a:solidFill>
+      </p:bgPr>
+    </p:bg>
+    <p:spTree>
+      <p:nvGrpSpPr>
+        <p:cNvPr id="1" name=""/>
+        <p:cNvGrpSpPr/>
+        <p:nvPr/>
+      </p:nvGrpSpPr>
+      <p:grpSpPr>
+        <a:xfrm/>
+      </p:grpSpPr>
+      <p:sp>
+        <p:nvSpPr>
+          <p:cNvPr id="2" name=""/>
+          <p:cNvSpPr>
+            <a:spLocks noGrp="1"/>
+          </p:cNvSpPr>
+          <p:nvPr/>
+        </p:nvSpPr>
+        <p:spPr>
+          <a:xfrm>
+            <a:off x="609600" y="400050"/>
+            <a:ext cx="6191250" cy="228600"/>
+          </a:xfrm>
+          <a:prstGeom prst="rect">
+            <a:avLst/>
+          </a:prstGeom>
+          <a:noFill/>
+          <a:ln w="0">
+            <a:noFill/>
+            <a:prstDash val="solid"/>
+          </a:ln>
+        </p:spPr>
+        <p:txBody>
+          <a:bodyPr lIns="0" tIns="0" rIns="0" bIns="0" anchor="t">
+            <a:normAutofit fontScale="100000"/>
+          </a:bodyPr>
+          <a:lstStyle/>
+          <a:p>
+            <a:pPr algn="l">
+              <a:lnSpc>
+                <a:spcPct val="106000"/>
+              </a:lnSpc>
+              <a:buNone/>
+              <a:defRPr sz="900" b="1">
+                <a:solidFill>
+                  <a:srgbClr val="0B5CAD"/>
+                </a:solidFill>
+                <a:latin typeface="Aptos"/>
+                <a:ea typeface="Aptos"/>
+                <a:cs typeface="Aptos"/>
+              </a:defRPr>
+            </a:pPr>
+            <a:r>
+              <a:rPr sz="900" b="1">
+                <a:solidFill>
+                  <a:srgbClr val="0B5CAD"/>
+                </a:solidFill>
+                <a:latin typeface="Aptos"/>
+                <a:ea typeface="Aptos"/>
+                <a:cs typeface="Aptos"/>
+              </a:rPr>
+              <a:t>DOCKERFILE BEHAVIOR</a:t>
+            </a:r>
+          </a:p>
+        </p:txBody>
+      </p:sp>
+      <p:sp>
+        <p:nvSpPr>
+          <p:cNvPr id="3" name=""/>
+          <p:cNvSpPr>
+            <a:spLocks noGrp="1"/>
+          </p:cNvSpPr>
+          <p:nvPr/>
+        </p:nvSpPr>
+        <p:spPr>
+          <a:xfrm>
+            <a:off x="609600" y="742950"/>
+            <a:ext cx="9906000" cy="571500"/>
+          </a:xfrm>
+          <a:prstGeom prst="rect">
+            <a:avLst/>
+          </a:prstGeom>
+          <a:noFill/>
+          <a:ln w="0">
+            <a:noFill/>
+            <a:prstDash val="solid"/>
+          </a:ln>
+        </p:spPr>
+        <p:txBody>
+          <a:bodyPr lIns="0" tIns="0" rIns="0" bIns="0" anchor="t">
+            <a:normAutofit fontScale="100000"/>
+          </a:bodyPr>
+          <a:lstStyle/>
+          <a:p>
+            <a:pPr algn="l">
+              <a:lnSpc>
+                <a:spcPct val="106000"/>
+              </a:lnSpc>
+              <a:buNone/>
+              <a:defRPr sz="2850" b="1">
+                <a:solidFill>
+                  <a:srgbClr val="0B1220"/>
+                </a:solidFill>
+                <a:latin typeface="Aptos Display"/>
+                <a:ea typeface="Aptos Display"/>
+                <a:cs typeface="Aptos Display"/>
+              </a:defRPr>
+            </a:pPr>
+            <a:r>
+              <a:rPr sz="2850" b="1">
+                <a:solidFill>
+                  <a:srgbClr val="0B1220"/>
+                </a:solidFill>
+                <a:latin typeface="Aptos Display"/>
+                <a:ea typeface="Aptos Display"/>
+                <a:cs typeface="Aptos Display"/>
+              </a:rPr>
+              <a:t>RUN / CMD / EXPOSE 差異</a:t>
+            </a:r>
+          </a:p>
+        </p:txBody>
+      </p:sp>
+      <p:sp>
+        <p:nvSpPr>
+          <p:cNvPr id="4" name=""/>
+          <p:cNvSpPr>
+            <a:spLocks noGrp="1"/>
+          </p:cNvSpPr>
+          <p:nvPr/>
+        </p:nvSpPr>
+        <p:spPr>
+          <a:xfrm>
+            <a:off x="914400" y="1590675"/>
+            <a:ext cx="3276600" cy="2476500"/>
+          </a:xfrm>
+          <a:prstGeom prst="roundRect">
+            <a:avLst>
+              <a:gd name="adj" fmla="val 8000"/>
+            </a:avLst>
+          </a:prstGeom>
+          <a:solidFill>
+            <a:srgbClr val="E8F3FF"/>
+          </a:solidFill>
+          <a:ln w="9525">
+            <a:solidFill>
+              <a:srgbClr val="B7DCFF"/>
+            </a:solidFill>
+            <a:prstDash val="solid"/>
+          </a:ln>
+        </p:spPr>
+        <p:txBody>
+          <a:bodyPr lIns="190500" tIns="190500" rIns="190500" bIns="190500" anchor="t">
+            <a:normAutofit fontScale="100000"/>
+          </a:bodyPr>
+          <a:lstStyle/>
+          <a:p>
+            <a:pPr algn="ctr">
+              <a:lnSpc>
+                <a:spcPct val="106000"/>
+              </a:lnSpc>
+              <a:buNone/>
+              <a:defRPr sz="2100" b="1">
+                <a:solidFill>
+                  <a:srgbClr val="0B5CAD"/>
+                </a:solidFill>
+                <a:latin typeface="Aptos Display"/>
+                <a:ea typeface="Aptos Display"/>
+                <a:cs typeface="Aptos Display"/>
+              </a:defRPr>
+            </a:pPr>
+            <a:r>
+              <a:rPr sz="2100" b="1">
+                <a:solidFill>
+                  <a:srgbClr val="0B5CAD"/>
+                </a:solidFill>
+                <a:latin typeface="Aptos Display"/>
+                <a:ea typeface="Aptos Display"/>
+                <a:cs typeface="Aptos Display"/>
+              </a:rPr>
+              <a:t>RUN</a:t>
+            </a:r>
+          </a:p>
+          <a:p>
+            <a:pPr algn="ctr">
+              <a:lnSpc>
+                <a:spcPct val="106000"/>
+              </a:lnSpc>
+              <a:buNone/>
+              <a:defRPr sz="1500" b="1">
+                <a:solidFill>
+                  <a:srgbClr val="0B1220"/>
+                </a:solidFill>
+                <a:latin typeface="Aptos"/>
+                <a:ea typeface="Aptos"/>
+                <a:cs typeface="Aptos"/>
+              </a:defRPr>
+            </a:pPr>
+            <a:r>
+              <a:rPr sz="1500" b="1">
+                <a:solidFill>
+                  <a:srgbClr val="0B1220"/>
+                </a:solidFill>
+                <a:latin typeface="Aptos"/>
+                <a:ea typeface="Aptos"/>
+                <a:cs typeface="Aptos"/>
+              </a:rPr>
+              <a:t>build image 的時候跑</a:t>
+            </a:r>
+          </a:p>
+          <a:p>
+            <a:pPr algn="ctr">
+              <a:lnSpc>
+                <a:spcPct val="106000"/>
+              </a:lnSpc>
+              <a:buNone/>
+              <a:defRPr sz="1275" b="0">
+                <a:solidFill>
+                  <a:srgbClr val="334155"/>
+                </a:solidFill>
+                <a:latin typeface="Aptos"/>
+                <a:ea typeface="Aptos"/>
+                <a:cs typeface="Aptos"/>
+              </a:defRPr>
+            </a:pPr>
+            <a:r>
+              <a:rPr sz="1275" b="0">
+                <a:solidFill>
+                  <a:srgbClr val="334155"/>
+                </a:solidFill>
+                <a:latin typeface="Aptos"/>
+                <a:ea typeface="Aptos"/>
+                <a:cs typeface="Aptos"/>
+              </a:rPr>
+              <a:t>會產生新的 image layer</a:t>
+            </a:r>
+          </a:p>
+          <a:p>
+            <a:pPr algn="ctr">
+              <a:lnSpc>
+                <a:spcPct val="106000"/>
+              </a:lnSpc>
+              <a:buNone/>
+              <a:defRPr sz="1125" b="1">
+                <a:solidFill>
+                  <a:srgbClr val="0B1220"/>
+                </a:solidFill>
+                <a:latin typeface="Aptos"/>
+                <a:ea typeface="Aptos"/>
+                <a:cs typeface="Aptos"/>
+              </a:defRPr>
+            </a:pPr>
+            <a:r>
+              <a:rPr sz="1125" b="1">
+                <a:solidFill>
+                  <a:srgbClr val="0B1220"/>
+                </a:solidFill>
+                <a:latin typeface="Aptos"/>
+                <a:ea typeface="Aptos"/>
+                <a:cs typeface="Aptos"/>
+              </a:rPr>
+              <a:t>例：RUN pip install -r requirements.txt</a:t>
+            </a:r>
+          </a:p>
+        </p:txBody>
+      </p:sp>
+      <p:sp>
+        <p:nvSpPr>
+          <p:cNvPr id="5" name=""/>
+          <p:cNvSpPr>
+            <a:spLocks noGrp="1"/>
+          </p:cNvSpPr>
+          <p:nvPr/>
+        </p:nvSpPr>
+        <p:spPr>
+          <a:xfrm>
+            <a:off x="4495800" y="1590675"/>
+            <a:ext cx="3276600" cy="2476500"/>
+          </a:xfrm>
+          <a:prstGeom prst="roundRect">
+            <a:avLst>
+              <a:gd name="adj" fmla="val 8000"/>
+            </a:avLst>
+          </a:prstGeom>
+          <a:solidFill>
+            <a:srgbClr val="EAF7EF"/>
+          </a:solidFill>
+          <a:ln w="9525">
+            <a:solidFill>
+              <a:srgbClr val="B7E4C7"/>
+            </a:solidFill>
+            <a:prstDash val="solid"/>
+          </a:ln>
+        </p:spPr>
+        <p:txBody>
+          <a:bodyPr lIns="190500" tIns="190500" rIns="190500" bIns="190500" anchor="t">
+            <a:normAutofit fontScale="100000"/>
+          </a:bodyPr>
+          <a:lstStyle/>
+          <a:p>
+            <a:pPr algn="ctr">
+              <a:lnSpc>
+                <a:spcPct val="106000"/>
+              </a:lnSpc>
+              <a:buNone/>
+              <a:defRPr sz="2100" b="1">
+                <a:solidFill>
+                  <a:srgbClr val="087F5B"/>
+                </a:solidFill>
+                <a:latin typeface="Aptos Display"/>
+                <a:ea typeface="Aptos Display"/>
+                <a:cs typeface="Aptos Display"/>
+              </a:defRPr>
+            </a:pPr>
+            <a:r>
+              <a:rPr sz="2100" b="1">
+                <a:solidFill>
+                  <a:srgbClr val="087F5B"/>
+                </a:solidFill>
+                <a:latin typeface="Aptos Display"/>
+                <a:ea typeface="Aptos Display"/>
+                <a:cs typeface="Aptos Display"/>
+              </a:rPr>
+              <a:t>CMD</a:t>
+            </a:r>
+          </a:p>
+          <a:p>
+            <a:pPr algn="ctr">
+              <a:lnSpc>
+                <a:spcPct val="106000"/>
+              </a:lnSpc>
+              <a:buNone/>
+              <a:defRPr sz="1500" b="1">
+                <a:solidFill>
+                  <a:srgbClr val="0B1220"/>
+                </a:solidFill>
+                <a:latin typeface="Aptos"/>
+                <a:ea typeface="Aptos"/>
+                <a:cs typeface="Aptos"/>
+              </a:defRPr>
+            </a:pPr>
+            <a:r>
+              <a:rPr sz="1500" b="1">
+                <a:solidFill>
+                  <a:srgbClr val="0B1220"/>
+                </a:solidFill>
+                <a:latin typeface="Aptos"/>
+                <a:ea typeface="Aptos"/>
+                <a:cs typeface="Aptos"/>
+              </a:rPr>
+              <a:t>container 啟動時跑</a:t>
+            </a:r>
+          </a:p>
+          <a:p>
+            <a:pPr algn="ctr">
+              <a:lnSpc>
+                <a:spcPct val="106000"/>
+              </a:lnSpc>
+              <a:buNone/>
+              <a:defRPr sz="1275" b="0">
+                <a:solidFill>
+                  <a:srgbClr val="334155"/>
+                </a:solidFill>
+                <a:latin typeface="Aptos"/>
+                <a:ea typeface="Aptos"/>
+                <a:cs typeface="Aptos"/>
+              </a:defRPr>
+            </a:pPr>
+            <a:r>
+              <a:rPr sz="1275" b="0">
+                <a:solidFill>
+                  <a:srgbClr val="334155"/>
+                </a:solidFill>
+                <a:latin typeface="Aptos"/>
+                <a:ea typeface="Aptos"/>
+                <a:cs typeface="Aptos"/>
+              </a:rPr>
+              <a:t>可被 docker run 後面的 command 覆蓋</a:t>
+            </a:r>
+          </a:p>
+          <a:p>
+            <a:pPr algn="ctr">
+              <a:lnSpc>
+                <a:spcPct val="106000"/>
+              </a:lnSpc>
+              <a:buNone/>
+              <a:defRPr sz="1125" b="1">
+                <a:solidFill>
+                  <a:srgbClr val="0B1220"/>
+                </a:solidFill>
+                <a:latin typeface="Aptos"/>
+                <a:ea typeface="Aptos"/>
+                <a:cs typeface="Aptos"/>
+              </a:defRPr>
+            </a:pPr>
+            <a:r>
+              <a:rPr sz="1125" b="1">
+                <a:solidFill>
+                  <a:srgbClr val="0B1220"/>
+                </a:solidFill>
+                <a:latin typeface="Aptos"/>
+                <a:ea typeface="Aptos"/>
+                <a:cs typeface="Aptos"/>
+              </a:rPr>
+              <a:t>例：CMD ["python", "app.py"]</a:t>
+            </a:r>
+          </a:p>
+        </p:txBody>
+      </p:sp>
+      <p:sp>
+        <p:nvSpPr>
+          <p:cNvPr id="6" name=""/>
+          <p:cNvSpPr>
+            <a:spLocks noGrp="1"/>
+          </p:cNvSpPr>
+          <p:nvPr/>
+        </p:nvSpPr>
+        <p:spPr>
+          <a:xfrm>
+            <a:off x="8077200" y="1590675"/>
+            <a:ext cx="3276600" cy="2476500"/>
+          </a:xfrm>
+          <a:prstGeom prst="roundRect">
+            <a:avLst>
+              <a:gd name="adj" fmla="val 8000"/>
+            </a:avLst>
+          </a:prstGeom>
+          <a:solidFill>
+            <a:srgbClr val="FFF7E6"/>
+          </a:solidFill>
+          <a:ln w="9525">
+            <a:solidFill>
+              <a:srgbClr val="FFD999"/>
+            </a:solidFill>
+            <a:prstDash val="solid"/>
+          </a:ln>
+        </p:spPr>
+        <p:txBody>
+          <a:bodyPr lIns="190500" tIns="190500" rIns="190500" bIns="190500" anchor="t">
+            <a:normAutofit fontScale="100000"/>
+          </a:bodyPr>
+          <a:lstStyle/>
+          <a:p>
+            <a:pPr algn="ctr">
+              <a:lnSpc>
+                <a:spcPct val="106000"/>
+              </a:lnSpc>
+              <a:buNone/>
+              <a:defRPr sz="2100" b="1">
+                <a:solidFill>
+                  <a:srgbClr val="A16207"/>
+                </a:solidFill>
+                <a:latin typeface="Aptos Display"/>
+                <a:ea typeface="Aptos Display"/>
+                <a:cs typeface="Aptos Display"/>
+              </a:defRPr>
+            </a:pPr>
+            <a:r>
+              <a:rPr sz="2100" b="1">
+                <a:solidFill>
+                  <a:srgbClr val="A16207"/>
+                </a:solidFill>
+                <a:latin typeface="Aptos Display"/>
+                <a:ea typeface="Aptos Display"/>
+                <a:cs typeface="Aptos Display"/>
+              </a:rPr>
+              <a:t>EXPOSE</a:t>
+            </a:r>
+          </a:p>
+          <a:p>
+            <a:pPr algn="ctr">
+              <a:lnSpc>
+                <a:spcPct val="106000"/>
+              </a:lnSpc>
+              <a:buNone/>
+              <a:defRPr sz="1500" b="1">
+                <a:solidFill>
+                  <a:srgbClr val="0B1220"/>
+                </a:solidFill>
+                <a:latin typeface="Aptos"/>
+                <a:ea typeface="Aptos"/>
+                <a:cs typeface="Aptos"/>
+              </a:defRPr>
+            </a:pPr>
+            <a:r>
+              <a:rPr sz="1500" b="1">
+                <a:solidFill>
+                  <a:srgbClr val="0B1220"/>
+                </a:solidFill>
+                <a:latin typeface="Aptos"/>
+                <a:ea typeface="Aptos"/>
+                <a:cs typeface="Aptos"/>
+              </a:rPr>
+              <a:t>只是文件提示</a:t>
+            </a:r>
+          </a:p>
+          <a:p>
+            <a:pPr algn="ctr">
+              <a:lnSpc>
+                <a:spcPct val="106000"/>
+              </a:lnSpc>
+              <a:buNone/>
+              <a:defRPr sz="1275" b="0">
+                <a:solidFill>
+                  <a:srgbClr val="334155"/>
+                </a:solidFill>
+                <a:latin typeface="Aptos"/>
+                <a:ea typeface="Aptos"/>
+                <a:cs typeface="Aptos"/>
+              </a:defRPr>
+            </a:pPr>
+            <a:r>
+              <a:rPr sz="1275" b="0">
+                <a:solidFill>
+                  <a:srgbClr val="334155"/>
+                </a:solidFill>
+                <a:latin typeface="Aptos"/>
+                <a:ea typeface="Aptos"/>
+                <a:cs typeface="Aptos"/>
+              </a:rPr>
+              <a:t>不會自動對外開 port</a:t>
+            </a:r>
+          </a:p>
+          <a:p>
+            <a:pPr algn="ctr">
+              <a:lnSpc>
+                <a:spcPct val="106000"/>
+              </a:lnSpc>
+              <a:buNone/>
+              <a:defRPr sz="1125" b="1">
+                <a:solidFill>
+                  <a:srgbClr val="0B1220"/>
+                </a:solidFill>
+                <a:latin typeface="Aptos"/>
+                <a:ea typeface="Aptos"/>
+                <a:cs typeface="Aptos"/>
+              </a:defRPr>
+            </a:pPr>
+            <a:r>
+              <a:rPr sz="1125" b="1">
+                <a:solidFill>
+                  <a:srgbClr val="0B1220"/>
+                </a:solidFill>
+                <a:latin typeface="Aptos"/>
+                <a:ea typeface="Aptos"/>
+                <a:cs typeface="Aptos"/>
+              </a:rPr>
+              <a:t>仍要 -p 5000:5000 或 compose ports</a:t>
+            </a:r>
+          </a:p>
+        </p:txBody>
+      </p:sp>
+      <p:sp>
+        <p:nvSpPr>
+          <p:cNvPr id="8" name=""/>
+          <p:cNvSpPr>
+            <a:spLocks noGrp="1"/>
+          </p:cNvSpPr>
+          <p:nvPr/>
+        </p:nvSpPr>
+        <p:spPr>
+          <a:xfrm>
+            <a:off x="990600" y="4541525"/>
+            <a:ext cx="10210800" cy="628650"/>
+          </a:xfrm>
+          <a:prstGeom prst="roundRect">
+            <a:avLst>
+              <a:gd name="adj" fmla="val 8000"/>
+            </a:avLst>
+          </a:prstGeom>
+          <a:solidFill>
+            <a:srgbClr val="111827"/>
+          </a:solidFill>
+          <a:ln w="0">
+            <a:noFill/>
+            <a:prstDash val="solid"/>
+          </a:ln>
+        </p:spPr>
+        <p:txBody>
+          <a:bodyPr lIns="152400" tIns="152400" rIns="152400" bIns="152400" anchor="t">
+            <a:normAutofit fontScale="100000"/>
+          </a:bodyPr>
+          <a:lstStyle/>
+          <a:p>
+            <a:pPr algn="ctr">
+              <a:lnSpc>
+                <a:spcPct val="106000"/>
+              </a:lnSpc>
+              <a:buNone/>
+              <a:defRPr sz="1450" b="1">
+                <a:solidFill>
+                  <a:srgbClr val="FFFFFF"/>
+                </a:solidFill>
+                <a:latin typeface="Aptos"/>
+                <a:ea typeface="Aptos"/>
+                <a:cs typeface="Aptos"/>
+              </a:defRPr>
+            </a:pPr>
+            <a:r>
+              <a:rPr sz="1450" b="1">
+                <a:solidFill>
+                  <a:srgbClr val="FFFFFF"/>
+                </a:solidFill>
+                <a:latin typeface="Aptos"/>
+                <a:ea typeface="Aptos"/>
+                <a:cs typeface="Aptos"/>
+              </a:rPr>
+              <a:t>記法：RUN 做安裝，CMD 啟動程式，EXPOSE 留提醒。真的要開 port，要看 docker run -p 或 compose ports。</a:t>
+            </a:r>
+          </a:p>
+        </p:txBody>
+      </p:sp>
+      <p:sp>
+        <p:nvSpPr>
+          <p:cNvPr id="40" name=""/>
+          <p:cNvSpPr>
+            <a:spLocks noGrp="1"/>
+          </p:cNvSpPr>
+          <p:nvPr/>
+        </p:nvSpPr>
+        <p:spPr>
+          <a:xfrm>
+            <a:off x="609600" y="6305550"/>
+            <a:ext cx="9906000" cy="13335"/>
+          </a:xfrm>
+          <a:prstGeom prst="rect">
+            <a:avLst/>
+          </a:prstGeom>
+          <a:solidFill>
+            <a:srgbClr val="D9E2EC"/>
+          </a:solidFill>
+          <a:ln w="0">
+            <a:noFill/>
+            <a:prstDash val="solid"/>
+          </a:ln>
+        </p:spPr>
+        <p:txBody>
+          <a:bodyPr lIns="0" tIns="0" rIns="0" bIns="0" anchor="t">
+            <a:normAutofit fontScale="100000"/>
+          </a:bodyPr>
+          <a:lstStyle/>
+        </p:txBody>
+      </p:sp>
+      <p:sp>
+        <p:nvSpPr>
+          <p:cNvPr id="41" name=""/>
+          <p:cNvSpPr>
+            <a:spLocks noGrp="1"/>
+          </p:cNvSpPr>
+          <p:nvPr/>
+        </p:nvSpPr>
+        <p:spPr>
+          <a:xfrm>
+            <a:off x="609600" y="6400800"/>
+            <a:ext cx="2762250" cy="171450"/>
+          </a:xfrm>
+          <a:prstGeom prst="rect">
+            <a:avLst/>
+          </a:prstGeom>
+          <a:noFill/>
+          <a:ln w="0">
+            <a:noFill/>
+            <a:prstDash val="solid"/>
+          </a:ln>
+        </p:spPr>
+        <p:txBody>
+          <a:bodyPr lIns="0" tIns="0" rIns="0" bIns="0" anchor="t">
+            <a:normAutofit fontScale="100000"/>
+          </a:bodyPr>
+          <a:lstStyle/>
+          <a:p>
+            <a:pPr algn="l">
+              <a:lnSpc>
+                <a:spcPct val="106000"/>
+              </a:lnSpc>
+              <a:buNone/>
+              <a:defRPr sz="825" b="0">
+                <a:solidFill>
+                  <a:srgbClr val="64748B"/>
+                </a:solidFill>
+                <a:latin typeface="Aptos"/>
+                <a:ea typeface="Aptos"/>
+                <a:cs typeface="Aptos"/>
+              </a:defRPr>
+            </a:pPr>
+            <a:r>
+              <a:rPr sz="825" b="0">
+                <a:solidFill>
+                  <a:srgbClr val="64748B"/>
+                </a:solidFill>
+                <a:latin typeface="Aptos"/>
+                <a:ea typeface="Aptos"/>
+                <a:cs typeface="Aptos"/>
+              </a:rPr>
+              <a:t>Docker 基礎教學 | 第 4 堂</a:t>
+            </a:r>
+          </a:p>
+        </p:txBody>
+      </p:sp>
+      <p:sp>
+        <p:nvSpPr>
+          <p:cNvPr id="42" name=""/>
+          <p:cNvSpPr>
+            <a:spLocks noGrp="1"/>
+          </p:cNvSpPr>
+          <p:nvPr/>
+        </p:nvSpPr>
+        <p:spPr>
+          <a:xfrm>
+            <a:off x="10858500" y="6381750"/>
+            <a:ext cx="723900" cy="190500"/>
+          </a:xfrm>
+          <a:prstGeom prst="rect">
+            <a:avLst/>
+          </a:prstGeom>
+          <a:noFill/>
+          <a:ln w="0">
+            <a:noFill/>
+            <a:prstDash val="solid"/>
+          </a:ln>
+        </p:spPr>
+        <p:txBody>
+          <a:bodyPr lIns="0" tIns="0" rIns="0" bIns="0" anchor="t">
+            <a:normAutofit fontScale="100000"/>
+          </a:bodyPr>
+          <a:lstStyle/>
+          <a:p>
+            <a:pPr algn="r">
+              <a:lnSpc>
+                <a:spcPct val="106000"/>
+              </a:lnSpc>
+              <a:buNone/>
+              <a:defRPr sz="900" b="1">
+                <a:solidFill>
+                  <a:srgbClr val="64748B"/>
+                </a:solidFill>
+                <a:latin typeface="Aptos"/>
+                <a:ea typeface="Aptos"/>
+                <a:cs typeface="Aptos"/>
+              </a:defRPr>
+            </a:pPr>
+            <a:r>
+              <a:rPr sz="900" b="1">
+                <a:solidFill>
+                  <a:srgbClr val="64748B"/>
+                </a:solidFill>
+                <a:latin typeface="Aptos"/>
+                <a:ea typeface="Aptos"/>
+                <a:cs typeface="Aptos"/>
+              </a:rPr>
+              <a:t>05B</a:t>
+            </a:r>
+          </a:p>
+        </p:txBody>
+      </p:sp>
+    </p:spTree>
+  </p:cSld>
+  <p:clrMapOvr>
+    <a:masterClrMapping/>
+  </p:clrMapOvr>
+</p:sld>
+</file>
+
 <file path=ppt/slides/slide5.xml><?xml version="1.0" encoding="utf-8"?>
 <p:sld xmlns:a="http://schemas.openxmlformats.org/drawingml/2006/main" xmlns:ns2="http://schemas.microsoft.com/office/drawing/2014/main" xmlns:ns3="http://schemas.microsoft.com/office/powerpoint/2010/main" xmlns:p="http://schemas.openxmlformats.org/presentationml/2006/main">
   <p:cSld>
